--- a/mandala_l1_handout.pptx
+++ b/mandala_l1_handout.pptx
@@ -5531,7 +5531,7 @@
         <p:spPr>
           <a:xfrm>
             <a:off x="502920" y="8266175"/>
-            <a:ext cx="6556248" cy="969264"/>
+            <a:ext cx="6556248" cy="1188720"/>
           </a:xfrm>
           <a:prstGeom prst="roundRect">
             <a:avLst/>
@@ -5614,7 +5614,7 @@
         <p:spPr>
           <a:xfrm>
             <a:off x="667512" y="8650224"/>
-            <a:ext cx="6227064" cy="512064"/>
+            <a:ext cx="6227064" cy="731520"/>
           </a:xfrm>
           <a:prstGeom prst="rect">
             <a:avLst/>
@@ -7750,7 +7750,7 @@
         <p:spPr>
           <a:xfrm>
             <a:off x="502920" y="8266175"/>
-            <a:ext cx="6556248" cy="969264"/>
+            <a:ext cx="6556248" cy="1188720"/>
           </a:xfrm>
           <a:prstGeom prst="roundRect">
             <a:avLst/>
@@ -7833,7 +7833,7 @@
         <p:spPr>
           <a:xfrm>
             <a:off x="667512" y="8650224"/>
-            <a:ext cx="6227064" cy="512064"/>
+            <a:ext cx="6227064" cy="731520"/>
           </a:xfrm>
           <a:prstGeom prst="rect">
             <a:avLst/>
@@ -9969,7 +9969,7 @@
         <p:spPr>
           <a:xfrm>
             <a:off x="502920" y="8266175"/>
-            <a:ext cx="6556248" cy="969264"/>
+            <a:ext cx="6556248" cy="1188720"/>
           </a:xfrm>
           <a:prstGeom prst="roundRect">
             <a:avLst/>
@@ -10052,7 +10052,7 @@
         <p:spPr>
           <a:xfrm>
             <a:off x="667512" y="8650224"/>
-            <a:ext cx="6227064" cy="512064"/>
+            <a:ext cx="6227064" cy="731520"/>
           </a:xfrm>
           <a:prstGeom prst="rect">
             <a:avLst/>
@@ -12188,7 +12188,7 @@
         <p:spPr>
           <a:xfrm>
             <a:off x="502920" y="8266175"/>
-            <a:ext cx="6556248" cy="969264"/>
+            <a:ext cx="6556248" cy="1188720"/>
           </a:xfrm>
           <a:prstGeom prst="roundRect">
             <a:avLst/>
@@ -12271,7 +12271,7 @@
         <p:spPr>
           <a:xfrm>
             <a:off x="667512" y="8650224"/>
-            <a:ext cx="6227064" cy="512064"/>
+            <a:ext cx="6227064" cy="731520"/>
           </a:xfrm>
           <a:prstGeom prst="rect">
             <a:avLst/>
@@ -14407,7 +14407,7 @@
         <p:spPr>
           <a:xfrm>
             <a:off x="502920" y="8266175"/>
-            <a:ext cx="6556248" cy="969264"/>
+            <a:ext cx="6556248" cy="1188720"/>
           </a:xfrm>
           <a:prstGeom prst="roundRect">
             <a:avLst/>
@@ -14490,7 +14490,7 @@
         <p:spPr>
           <a:xfrm>
             <a:off x="667512" y="8650224"/>
-            <a:ext cx="6227064" cy="512064"/>
+            <a:ext cx="6227064" cy="731520"/>
           </a:xfrm>
           <a:prstGeom prst="rect">
             <a:avLst/>
@@ -16626,7 +16626,7 @@
         <p:spPr>
           <a:xfrm>
             <a:off x="502920" y="8266175"/>
-            <a:ext cx="6556248" cy="969264"/>
+            <a:ext cx="6556248" cy="1188720"/>
           </a:xfrm>
           <a:prstGeom prst="roundRect">
             <a:avLst/>
@@ -16709,7 +16709,7 @@
         <p:spPr>
           <a:xfrm>
             <a:off x="667512" y="8650224"/>
-            <a:ext cx="6227064" cy="512064"/>
+            <a:ext cx="6227064" cy="731520"/>
           </a:xfrm>
           <a:prstGeom prst="rect">
             <a:avLst/>
@@ -18845,7 +18845,7 @@
         <p:spPr>
           <a:xfrm>
             <a:off x="502920" y="8266175"/>
-            <a:ext cx="6556248" cy="969264"/>
+            <a:ext cx="6556248" cy="1188720"/>
           </a:xfrm>
           <a:prstGeom prst="roundRect">
             <a:avLst/>
@@ -18928,7 +18928,7 @@
         <p:spPr>
           <a:xfrm>
             <a:off x="667512" y="8650224"/>
-            <a:ext cx="6227064" cy="512064"/>
+            <a:ext cx="6227064" cy="731520"/>
           </a:xfrm>
           <a:prstGeom prst="rect">
             <a:avLst/>
@@ -21064,7 +21064,7 @@
         <p:spPr>
           <a:xfrm>
             <a:off x="502920" y="8266175"/>
-            <a:ext cx="6556248" cy="969264"/>
+            <a:ext cx="6556248" cy="1188720"/>
           </a:xfrm>
           <a:prstGeom prst="roundRect">
             <a:avLst/>
@@ -21147,7 +21147,7 @@
         <p:spPr>
           <a:xfrm>
             <a:off x="667512" y="8650224"/>
-            <a:ext cx="6227064" cy="512064"/>
+            <a:ext cx="6227064" cy="731520"/>
           </a:xfrm>
           <a:prstGeom prst="rect">
             <a:avLst/>
@@ -22866,7 +22866,7 @@
         <p:spPr>
           <a:xfrm>
             <a:off x="502920" y="1078992"/>
-            <a:ext cx="6556248" cy="329184"/>
+            <a:ext cx="6556248" cy="493776"/>
           </a:xfrm>
           <a:prstGeom prst="rect">
             <a:avLst/>
@@ -22913,7 +22913,7 @@
         </p:blipFill>
         <p:spPr>
           <a:xfrm>
-            <a:off x="502920" y="1481328"/>
+            <a:off x="502920" y="1682496"/>
             <a:ext cx="1570482" cy="1570482"/>
           </a:xfrm>
           <a:prstGeom prst="rect">
@@ -22932,7 +22932,7 @@
         </p:nvSpPr>
         <p:spPr>
           <a:xfrm>
-            <a:off x="502920" y="3106674"/>
+            <a:off x="502920" y="3307842"/>
             <a:ext cx="1570482" cy="310896"/>
           </a:xfrm>
           <a:prstGeom prst="rect">
@@ -22971,7 +22971,7 @@
         </p:nvSpPr>
         <p:spPr>
           <a:xfrm>
-            <a:off x="502920" y="3417570"/>
+            <a:off x="502920" y="3618738"/>
             <a:ext cx="1570482" cy="256032"/>
           </a:xfrm>
           <a:prstGeom prst="rect">
@@ -23019,7 +23019,7 @@
         </p:blipFill>
         <p:spPr>
           <a:xfrm>
-            <a:off x="2164842" y="1481328"/>
+            <a:off x="2164842" y="1682496"/>
             <a:ext cx="1570482" cy="1570482"/>
           </a:xfrm>
           <a:prstGeom prst="rect">
@@ -23038,7 +23038,7 @@
         </p:nvSpPr>
         <p:spPr>
           <a:xfrm>
-            <a:off x="2164842" y="3106674"/>
+            <a:off x="2164842" y="3307842"/>
             <a:ext cx="1570482" cy="310896"/>
           </a:xfrm>
           <a:prstGeom prst="rect">
@@ -23077,7 +23077,7 @@
         </p:nvSpPr>
         <p:spPr>
           <a:xfrm>
-            <a:off x="2164842" y="3417570"/>
+            <a:off x="2164842" y="3618738"/>
             <a:ext cx="1570482" cy="256032"/>
           </a:xfrm>
           <a:prstGeom prst="rect">
@@ -23125,7 +23125,7 @@
         </p:blipFill>
         <p:spPr>
           <a:xfrm>
-            <a:off x="3826764" y="1481328"/>
+            <a:off x="3826764" y="1682496"/>
             <a:ext cx="1570482" cy="1570482"/>
           </a:xfrm>
           <a:prstGeom prst="rect">
@@ -23144,7 +23144,7 @@
         </p:nvSpPr>
         <p:spPr>
           <a:xfrm>
-            <a:off x="3826764" y="3106674"/>
+            <a:off x="3826764" y="3307842"/>
             <a:ext cx="1570482" cy="310896"/>
           </a:xfrm>
           <a:prstGeom prst="rect">
@@ -23183,7 +23183,7 @@
         </p:nvSpPr>
         <p:spPr>
           <a:xfrm>
-            <a:off x="3826764" y="3417570"/>
+            <a:off x="3826764" y="3618738"/>
             <a:ext cx="1570482" cy="256032"/>
           </a:xfrm>
           <a:prstGeom prst="rect">
@@ -23231,7 +23231,7 @@
         </p:blipFill>
         <p:spPr>
           <a:xfrm>
-            <a:off x="5488686" y="1481328"/>
+            <a:off x="5488686" y="1682496"/>
             <a:ext cx="1570482" cy="1570482"/>
           </a:xfrm>
           <a:prstGeom prst="rect">
@@ -23250,7 +23250,7 @@
         </p:nvSpPr>
         <p:spPr>
           <a:xfrm>
-            <a:off x="5488686" y="3106674"/>
+            <a:off x="5488686" y="3307842"/>
             <a:ext cx="1570482" cy="310896"/>
           </a:xfrm>
           <a:prstGeom prst="rect">
@@ -23289,7 +23289,7 @@
         </p:nvSpPr>
         <p:spPr>
           <a:xfrm>
-            <a:off x="5488686" y="3417570"/>
+            <a:off x="5488686" y="3618738"/>
             <a:ext cx="1570482" cy="256032"/>
           </a:xfrm>
           <a:prstGeom prst="rect">
@@ -23328,7 +23328,7 @@
         </p:nvSpPr>
         <p:spPr>
           <a:xfrm>
-            <a:off x="502920" y="3746754"/>
+            <a:off x="502920" y="3947922"/>
             <a:ext cx="6556248" cy="1170432"/>
           </a:xfrm>
           <a:prstGeom prst="rect">
@@ -25464,7 +25464,7 @@
         </p:nvSpPr>
         <p:spPr>
           <a:xfrm>
-            <a:off x="502920" y="1645920"/>
+            <a:off x="502920" y="1828800"/>
             <a:ext cx="3177540" cy="1298448"/>
           </a:xfrm>
           <a:prstGeom prst="roundRect">
@@ -25519,7 +25519,7 @@
         </p:blipFill>
         <p:spPr>
           <a:xfrm>
-            <a:off x="557784" y="1837943"/>
+            <a:off x="557784" y="2020824"/>
             <a:ext cx="914400" cy="914400"/>
           </a:xfrm>
           <a:prstGeom prst="rect">
@@ -25538,7 +25538,7 @@
         </p:nvSpPr>
         <p:spPr>
           <a:xfrm>
-            <a:off x="1581912" y="1737360"/>
+            <a:off x="1581912" y="1920240"/>
             <a:ext cx="2043684" cy="384048"/>
           </a:xfrm>
           <a:prstGeom prst="rect">
@@ -25577,7 +25577,7 @@
         </p:nvSpPr>
         <p:spPr>
           <a:xfrm>
-            <a:off x="1581912" y="2176272"/>
+            <a:off x="1581912" y="2359152"/>
             <a:ext cx="2043684" cy="694944"/>
           </a:xfrm>
           <a:prstGeom prst="rect">
@@ -25616,7 +25616,7 @@
         </p:nvSpPr>
         <p:spPr>
           <a:xfrm>
-            <a:off x="3881628" y="1645920"/>
+            <a:off x="3881628" y="1828800"/>
             <a:ext cx="3177540" cy="1298448"/>
           </a:xfrm>
           <a:prstGeom prst="roundRect">
@@ -25671,7 +25671,7 @@
         </p:blipFill>
         <p:spPr>
           <a:xfrm>
-            <a:off x="3936491" y="1837943"/>
+            <a:off x="3936491" y="2020824"/>
             <a:ext cx="914400" cy="914400"/>
           </a:xfrm>
           <a:prstGeom prst="rect">
@@ -25690,7 +25690,7 @@
         </p:nvSpPr>
         <p:spPr>
           <a:xfrm>
-            <a:off x="4960620" y="1737360"/>
+            <a:off x="4960620" y="1920240"/>
             <a:ext cx="2043684" cy="384048"/>
           </a:xfrm>
           <a:prstGeom prst="rect">
@@ -25729,7 +25729,7 @@
         </p:nvSpPr>
         <p:spPr>
           <a:xfrm>
-            <a:off x="4960620" y="2176272"/>
+            <a:off x="4960620" y="2359152"/>
             <a:ext cx="2043684" cy="694944"/>
           </a:xfrm>
           <a:prstGeom prst="rect">
@@ -25768,7 +25768,7 @@
         </p:nvSpPr>
         <p:spPr>
           <a:xfrm>
-            <a:off x="502920" y="3145536"/>
+            <a:off x="502920" y="3328415"/>
             <a:ext cx="3177540" cy="1298448"/>
           </a:xfrm>
           <a:prstGeom prst="roundRect">
@@ -25823,7 +25823,7 @@
         </p:blipFill>
         <p:spPr>
           <a:xfrm>
-            <a:off x="557784" y="3337560"/>
+            <a:off x="557784" y="3520439"/>
             <a:ext cx="914400" cy="914400"/>
           </a:xfrm>
           <a:prstGeom prst="rect">
@@ -25842,7 +25842,7 @@
         </p:nvSpPr>
         <p:spPr>
           <a:xfrm>
-            <a:off x="1581912" y="3236976"/>
+            <a:off x="1581912" y="3419856"/>
             <a:ext cx="2043684" cy="384048"/>
           </a:xfrm>
           <a:prstGeom prst="rect">
@@ -25881,7 +25881,7 @@
         </p:nvSpPr>
         <p:spPr>
           <a:xfrm>
-            <a:off x="1581912" y="3675887"/>
+            <a:off x="1581912" y="3858768"/>
             <a:ext cx="2043684" cy="694944"/>
           </a:xfrm>
           <a:prstGeom prst="rect">
@@ -25920,7 +25920,7 @@
         </p:nvSpPr>
         <p:spPr>
           <a:xfrm>
-            <a:off x="3881628" y="3145536"/>
+            <a:off x="3881628" y="3328415"/>
             <a:ext cx="3177540" cy="1298448"/>
           </a:xfrm>
           <a:prstGeom prst="roundRect">
@@ -25975,7 +25975,7 @@
         </p:blipFill>
         <p:spPr>
           <a:xfrm>
-            <a:off x="3936491" y="3337560"/>
+            <a:off x="3936491" y="3520439"/>
             <a:ext cx="914400" cy="914400"/>
           </a:xfrm>
           <a:prstGeom prst="rect">
@@ -25994,7 +25994,7 @@
         </p:nvSpPr>
         <p:spPr>
           <a:xfrm>
-            <a:off x="4960620" y="3236976"/>
+            <a:off x="4960620" y="3419856"/>
             <a:ext cx="2043684" cy="384048"/>
           </a:xfrm>
           <a:prstGeom prst="rect">
@@ -26033,7 +26033,7 @@
         </p:nvSpPr>
         <p:spPr>
           <a:xfrm>
-            <a:off x="4960620" y="3675887"/>
+            <a:off x="4960620" y="3858768"/>
             <a:ext cx="2043684" cy="694944"/>
           </a:xfrm>
           <a:prstGeom prst="rect">
@@ -26072,7 +26072,7 @@
         </p:nvSpPr>
         <p:spPr>
           <a:xfrm>
-            <a:off x="502920" y="4645152"/>
+            <a:off x="502920" y="4828031"/>
             <a:ext cx="3177540" cy="1298448"/>
           </a:xfrm>
           <a:prstGeom prst="roundRect">
@@ -26127,7 +26127,7 @@
         </p:blipFill>
         <p:spPr>
           <a:xfrm>
-            <a:off x="557784" y="4837176"/>
+            <a:off x="557784" y="5020055"/>
             <a:ext cx="914400" cy="914400"/>
           </a:xfrm>
           <a:prstGeom prst="rect">
@@ -26146,7 +26146,7 @@
         </p:nvSpPr>
         <p:spPr>
           <a:xfrm>
-            <a:off x="1581912" y="4736592"/>
+            <a:off x="1581912" y="4919471"/>
             <a:ext cx="2043684" cy="384048"/>
           </a:xfrm>
           <a:prstGeom prst="rect">
@@ -26185,7 +26185,7 @@
         </p:nvSpPr>
         <p:spPr>
           <a:xfrm>
-            <a:off x="1581912" y="5175504"/>
+            <a:off x="1581912" y="5358383"/>
             <a:ext cx="2043684" cy="694944"/>
           </a:xfrm>
           <a:prstGeom prst="rect">
@@ -26224,7 +26224,7 @@
         </p:nvSpPr>
         <p:spPr>
           <a:xfrm>
-            <a:off x="3881628" y="4645152"/>
+            <a:off x="3881628" y="4828031"/>
             <a:ext cx="3177540" cy="1298448"/>
           </a:xfrm>
           <a:prstGeom prst="roundRect">
@@ -26279,7 +26279,7 @@
         </p:blipFill>
         <p:spPr>
           <a:xfrm>
-            <a:off x="3936491" y="4837176"/>
+            <a:off x="3936491" y="5020055"/>
             <a:ext cx="914400" cy="914400"/>
           </a:xfrm>
           <a:prstGeom prst="rect">
@@ -26298,7 +26298,7 @@
         </p:nvSpPr>
         <p:spPr>
           <a:xfrm>
-            <a:off x="4960620" y="4736592"/>
+            <a:off x="4960620" y="4919471"/>
             <a:ext cx="2043684" cy="384048"/>
           </a:xfrm>
           <a:prstGeom prst="rect">
@@ -26337,7 +26337,7 @@
         </p:nvSpPr>
         <p:spPr>
           <a:xfrm>
-            <a:off x="4960620" y="5175504"/>
+            <a:off x="4960620" y="5358383"/>
             <a:ext cx="2043684" cy="694944"/>
           </a:xfrm>
           <a:prstGeom prst="rect">

--- a/mandala_l1_handout.pptx
+++ b/mandala_l1_handout.pptx
@@ -26637,7 +26637,7 @@
         <p:spPr>
           <a:xfrm>
             <a:off x="502920" y="1115568"/>
-            <a:ext cx="3177540" cy="1325880"/>
+            <a:ext cx="3177540" cy="1444752"/>
           </a:xfrm>
           <a:prstGeom prst="roundRect">
             <a:avLst/>
@@ -26805,7 +26805,7 @@
         <p:spPr>
           <a:xfrm>
             <a:off x="1453896" y="1709928"/>
-            <a:ext cx="2061972" cy="621792"/>
+            <a:ext cx="2061972" cy="749808"/>
           </a:xfrm>
           <a:prstGeom prst="rect">
             <a:avLst/>
@@ -26844,7 +26844,7 @@
         <p:spPr>
           <a:xfrm>
             <a:off x="3881628" y="1115568"/>
-            <a:ext cx="3177540" cy="1325880"/>
+            <a:ext cx="3177540" cy="1444752"/>
           </a:xfrm>
           <a:prstGeom prst="roundRect">
             <a:avLst/>
@@ -27012,7 +27012,7 @@
         <p:spPr>
           <a:xfrm>
             <a:off x="4832604" y="1709928"/>
-            <a:ext cx="2061972" cy="621792"/>
+            <a:ext cx="2061972" cy="749808"/>
           </a:xfrm>
           <a:prstGeom prst="rect">
             <a:avLst/>
@@ -27050,8 +27050,8 @@
         </p:nvSpPr>
         <p:spPr>
           <a:xfrm>
-            <a:off x="502920" y="2642615"/>
-            <a:ext cx="3177540" cy="1325880"/>
+            <a:off x="502920" y="2724912"/>
+            <a:ext cx="3177540" cy="1444752"/>
           </a:xfrm>
           <a:prstGeom prst="roundRect">
             <a:avLst/>
@@ -27096,7 +27096,7 @@
         </p:nvSpPr>
         <p:spPr>
           <a:xfrm>
-            <a:off x="685800" y="2953511"/>
+            <a:off x="685800" y="3035808"/>
             <a:ext cx="566928" cy="566928"/>
           </a:xfrm>
           <a:prstGeom prst="ellipse">
@@ -27140,7 +27140,7 @@
         </p:nvSpPr>
         <p:spPr>
           <a:xfrm>
-            <a:off x="685800" y="3008375"/>
+            <a:off x="685800" y="3090672"/>
             <a:ext cx="566928" cy="475488"/>
           </a:xfrm>
           <a:prstGeom prst="rect">
@@ -27179,7 +27179,7 @@
         </p:nvSpPr>
         <p:spPr>
           <a:xfrm>
-            <a:off x="1435608" y="2807208"/>
+            <a:off x="1435608" y="2889504"/>
             <a:ext cx="2098548" cy="402336"/>
           </a:xfrm>
           <a:prstGeom prst="rect">
@@ -27218,8 +27218,8 @@
         </p:nvSpPr>
         <p:spPr>
           <a:xfrm>
-            <a:off x="1453896" y="3236975"/>
-            <a:ext cx="2061972" cy="621792"/>
+            <a:off x="1453896" y="3319272"/>
+            <a:ext cx="2061972" cy="749808"/>
           </a:xfrm>
           <a:prstGeom prst="rect">
             <a:avLst/>
@@ -27257,8 +27257,8 @@
         </p:nvSpPr>
         <p:spPr>
           <a:xfrm>
-            <a:off x="3881628" y="2642615"/>
-            <a:ext cx="3177540" cy="1325880"/>
+            <a:off x="3881628" y="2724912"/>
+            <a:ext cx="3177540" cy="1444752"/>
           </a:xfrm>
           <a:prstGeom prst="roundRect">
             <a:avLst/>
@@ -27303,7 +27303,7 @@
         </p:nvSpPr>
         <p:spPr>
           <a:xfrm>
-            <a:off x="4064508" y="2953511"/>
+            <a:off x="4064508" y="3035808"/>
             <a:ext cx="566928" cy="566928"/>
           </a:xfrm>
           <a:prstGeom prst="ellipse">
@@ -27347,7 +27347,7 @@
         </p:nvSpPr>
         <p:spPr>
           <a:xfrm>
-            <a:off x="4064508" y="3008375"/>
+            <a:off x="4064508" y="3090672"/>
             <a:ext cx="566928" cy="475488"/>
           </a:xfrm>
           <a:prstGeom prst="rect">
@@ -27386,7 +27386,7 @@
         </p:nvSpPr>
         <p:spPr>
           <a:xfrm>
-            <a:off x="4814316" y="2807208"/>
+            <a:off x="4814316" y="2889504"/>
             <a:ext cx="2098548" cy="402336"/>
           </a:xfrm>
           <a:prstGeom prst="rect">
@@ -27425,8 +27425,8 @@
         </p:nvSpPr>
         <p:spPr>
           <a:xfrm>
-            <a:off x="4832604" y="3236975"/>
-            <a:ext cx="2061972" cy="621792"/>
+            <a:off x="4832604" y="3319272"/>
+            <a:ext cx="2061972" cy="749808"/>
           </a:xfrm>
           <a:prstGeom prst="rect">
             <a:avLst/>
@@ -27464,8 +27464,8 @@
         </p:nvSpPr>
         <p:spPr>
           <a:xfrm>
-            <a:off x="502920" y="4169663"/>
-            <a:ext cx="3177540" cy="1325880"/>
+            <a:off x="502920" y="4334256"/>
+            <a:ext cx="3177540" cy="1444752"/>
           </a:xfrm>
           <a:prstGeom prst="roundRect">
             <a:avLst/>
@@ -27510,7 +27510,7 @@
         </p:nvSpPr>
         <p:spPr>
           <a:xfrm>
-            <a:off x="685800" y="4480559"/>
+            <a:off x="685800" y="4645152"/>
             <a:ext cx="566928" cy="566928"/>
           </a:xfrm>
           <a:prstGeom prst="ellipse">
@@ -27554,7 +27554,7 @@
         </p:nvSpPr>
         <p:spPr>
           <a:xfrm>
-            <a:off x="685800" y="4535424"/>
+            <a:off x="685800" y="4700016"/>
             <a:ext cx="566928" cy="475488"/>
           </a:xfrm>
           <a:prstGeom prst="rect">
@@ -27593,7 +27593,7 @@
         </p:nvSpPr>
         <p:spPr>
           <a:xfrm>
-            <a:off x="1435608" y="4334255"/>
+            <a:off x="1435608" y="4498848"/>
             <a:ext cx="2098548" cy="402336"/>
           </a:xfrm>
           <a:prstGeom prst="rect">
@@ -27632,8 +27632,8 @@
         </p:nvSpPr>
         <p:spPr>
           <a:xfrm>
-            <a:off x="1453896" y="4764024"/>
-            <a:ext cx="2061972" cy="621792"/>
+            <a:off x="1453896" y="4928616"/>
+            <a:ext cx="2061972" cy="749808"/>
           </a:xfrm>
           <a:prstGeom prst="rect">
             <a:avLst/>
@@ -27671,8 +27671,8 @@
         </p:nvSpPr>
         <p:spPr>
           <a:xfrm>
-            <a:off x="3881628" y="4169663"/>
-            <a:ext cx="3177540" cy="1325880"/>
+            <a:off x="3881628" y="4334256"/>
+            <a:ext cx="3177540" cy="1444752"/>
           </a:xfrm>
           <a:prstGeom prst="roundRect">
             <a:avLst/>
@@ -27717,7 +27717,7 @@
         </p:nvSpPr>
         <p:spPr>
           <a:xfrm>
-            <a:off x="4064508" y="4480559"/>
+            <a:off x="4064508" y="4645152"/>
             <a:ext cx="566928" cy="566928"/>
           </a:xfrm>
           <a:prstGeom prst="ellipse">
@@ -27761,7 +27761,7 @@
         </p:nvSpPr>
         <p:spPr>
           <a:xfrm>
-            <a:off x="4064508" y="4535424"/>
+            <a:off x="4064508" y="4700016"/>
             <a:ext cx="566928" cy="475488"/>
           </a:xfrm>
           <a:prstGeom prst="rect">
@@ -27800,7 +27800,7 @@
         </p:nvSpPr>
         <p:spPr>
           <a:xfrm>
-            <a:off x="4814316" y="4334255"/>
+            <a:off x="4814316" y="4498848"/>
             <a:ext cx="2098548" cy="402336"/>
           </a:xfrm>
           <a:prstGeom prst="rect">
@@ -27839,8 +27839,8 @@
         </p:nvSpPr>
         <p:spPr>
           <a:xfrm>
-            <a:off x="4832604" y="4764024"/>
-            <a:ext cx="2061972" cy="621792"/>
+            <a:off x="4832604" y="4928616"/>
+            <a:ext cx="2061972" cy="749808"/>
           </a:xfrm>
           <a:prstGeom prst="rect">
             <a:avLst/>
@@ -27887,7 +27887,7 @@
         </p:blipFill>
         <p:spPr>
           <a:xfrm>
-            <a:off x="502920" y="5742432"/>
+            <a:off x="502920" y="5943600"/>
             <a:ext cx="2093976" cy="1719072"/>
           </a:xfrm>
           <a:prstGeom prst="rect">
@@ -27917,7 +27917,7 @@
         </p:blipFill>
         <p:spPr>
           <a:xfrm>
-            <a:off x="2734056" y="5742432"/>
+            <a:off x="2734056" y="5943600"/>
             <a:ext cx="2093976" cy="1719072"/>
           </a:xfrm>
           <a:prstGeom prst="rect">
@@ -27947,7 +27947,7 @@
         </p:blipFill>
         <p:spPr>
           <a:xfrm>
-            <a:off x="4965192" y="5742432"/>
+            <a:off x="4965192" y="5943600"/>
             <a:ext cx="2093976" cy="1719072"/>
           </a:xfrm>
           <a:prstGeom prst="rect">
@@ -29687,7 +29687,7 @@
               </a:lnSpc>
             </a:pPr>
             <a:r>
-              <a:rPr sz="2160" b="1" i="0">
+              <a:rPr sz="1920" b="1" i="0">
                 <a:solidFill>
                   <a:srgbClr val="4A403A"/>
                 </a:solidFill>
@@ -31093,7 +31093,7 @@
         <p:spPr>
           <a:xfrm>
             <a:off x="502920" y="1078992"/>
-            <a:ext cx="6556248" cy="822960"/>
+            <a:ext cx="6556248" cy="914400"/>
           </a:xfrm>
           <a:prstGeom prst="rect">
             <a:avLst/>
@@ -31131,8 +31131,8 @@
         </p:nvSpPr>
         <p:spPr>
           <a:xfrm>
-            <a:off x="502920" y="1883664"/>
-            <a:ext cx="6556248" cy="1536192"/>
+            <a:off x="502920" y="2048256"/>
+            <a:ext cx="6556248" cy="1572768"/>
           </a:xfrm>
           <a:prstGeom prst="roundRect">
             <a:avLst/>
@@ -31177,8 +31177,8 @@
         </p:nvSpPr>
         <p:spPr>
           <a:xfrm>
-            <a:off x="502920" y="1883664"/>
-            <a:ext cx="91440" cy="1536192"/>
+            <a:off x="502920" y="2048256"/>
+            <a:ext cx="91440" cy="1572768"/>
           </a:xfrm>
           <a:prstGeom prst="roundRect">
             <a:avLst/>
@@ -31221,8 +31221,8 @@
         </p:nvSpPr>
         <p:spPr>
           <a:xfrm>
-            <a:off x="548640" y="1883664"/>
-            <a:ext cx="45720" cy="1536192"/>
+            <a:off x="548640" y="2048256"/>
+            <a:ext cx="45720" cy="1572768"/>
           </a:xfrm>
           <a:prstGeom prst="rect">
             <a:avLst/>
@@ -31265,7 +31265,7 @@
         </p:nvSpPr>
         <p:spPr>
           <a:xfrm>
-            <a:off x="685800" y="2011680"/>
+            <a:off x="685800" y="2176272"/>
             <a:ext cx="512064" cy="512064"/>
           </a:xfrm>
           <a:prstGeom prst="ellipse">
@@ -31309,7 +31309,7 @@
         </p:nvSpPr>
         <p:spPr>
           <a:xfrm>
-            <a:off x="685800" y="2048256"/>
+            <a:off x="685800" y="2212848"/>
             <a:ext cx="512064" cy="438912"/>
           </a:xfrm>
           <a:prstGeom prst="rect">
@@ -31348,7 +31348,7 @@
         </p:nvSpPr>
         <p:spPr>
           <a:xfrm>
-            <a:off x="1362456" y="2011680"/>
+            <a:off x="1362456" y="2176272"/>
             <a:ext cx="5550408" cy="347472"/>
           </a:xfrm>
           <a:prstGeom prst="rect">
@@ -31387,8 +31387,8 @@
         </p:nvSpPr>
         <p:spPr>
           <a:xfrm>
-            <a:off x="1362456" y="2386584"/>
-            <a:ext cx="5550408" cy="969264"/>
+            <a:off x="1362456" y="2551176"/>
+            <a:ext cx="5550408" cy="1005840"/>
           </a:xfrm>
           <a:prstGeom prst="rect">
             <a:avLst/>
@@ -31426,8 +31426,8 @@
         </p:nvSpPr>
         <p:spPr>
           <a:xfrm>
-            <a:off x="502920" y="3584448"/>
-            <a:ext cx="6556248" cy="1536192"/>
+            <a:off x="502920" y="3712464"/>
+            <a:ext cx="6556248" cy="1572768"/>
           </a:xfrm>
           <a:prstGeom prst="roundRect">
             <a:avLst/>
@@ -31472,8 +31472,8 @@
         </p:nvSpPr>
         <p:spPr>
           <a:xfrm>
-            <a:off x="502920" y="3584448"/>
-            <a:ext cx="91440" cy="1536192"/>
+            <a:off x="502920" y="3712464"/>
+            <a:ext cx="91440" cy="1572768"/>
           </a:xfrm>
           <a:prstGeom prst="roundRect">
             <a:avLst/>
@@ -31516,8 +31516,8 @@
         </p:nvSpPr>
         <p:spPr>
           <a:xfrm>
-            <a:off x="548640" y="3584448"/>
-            <a:ext cx="45720" cy="1536192"/>
+            <a:off x="548640" y="3712464"/>
+            <a:ext cx="45720" cy="1572768"/>
           </a:xfrm>
           <a:prstGeom prst="rect">
             <a:avLst/>
@@ -31560,7 +31560,7 @@
         </p:nvSpPr>
         <p:spPr>
           <a:xfrm>
-            <a:off x="685800" y="3712463"/>
+            <a:off x="685800" y="3840480"/>
             <a:ext cx="512064" cy="512064"/>
           </a:xfrm>
           <a:prstGeom prst="ellipse">
@@ -31604,7 +31604,7 @@
         </p:nvSpPr>
         <p:spPr>
           <a:xfrm>
-            <a:off x="685800" y="3749039"/>
+            <a:off x="685800" y="3877056"/>
             <a:ext cx="512064" cy="438912"/>
           </a:xfrm>
           <a:prstGeom prst="rect">
@@ -31643,7 +31643,7 @@
         </p:nvSpPr>
         <p:spPr>
           <a:xfrm>
-            <a:off x="1362456" y="3712463"/>
+            <a:off x="1362456" y="3840480"/>
             <a:ext cx="5550408" cy="347472"/>
           </a:xfrm>
           <a:prstGeom prst="rect">
@@ -31682,8 +31682,8 @@
         </p:nvSpPr>
         <p:spPr>
           <a:xfrm>
-            <a:off x="1362456" y="4087368"/>
-            <a:ext cx="5550408" cy="969264"/>
+            <a:off x="1362456" y="4215384"/>
+            <a:ext cx="5550408" cy="1005840"/>
           </a:xfrm>
           <a:prstGeom prst="rect">
             <a:avLst/>
@@ -31721,8 +31721,8 @@
         </p:nvSpPr>
         <p:spPr>
           <a:xfrm>
-            <a:off x="502920" y="5285231"/>
-            <a:ext cx="6556248" cy="1536192"/>
+            <a:off x="502920" y="5376672"/>
+            <a:ext cx="6556248" cy="1572768"/>
           </a:xfrm>
           <a:prstGeom prst="roundRect">
             <a:avLst/>
@@ -31767,8 +31767,8 @@
         </p:nvSpPr>
         <p:spPr>
           <a:xfrm>
-            <a:off x="502920" y="5285231"/>
-            <a:ext cx="91440" cy="1536192"/>
+            <a:off x="502920" y="5376672"/>
+            <a:ext cx="91440" cy="1572768"/>
           </a:xfrm>
           <a:prstGeom prst="roundRect">
             <a:avLst/>
@@ -31811,8 +31811,8 @@
         </p:nvSpPr>
         <p:spPr>
           <a:xfrm>
-            <a:off x="548640" y="5285231"/>
-            <a:ext cx="45720" cy="1536192"/>
+            <a:off x="548640" y="5376672"/>
+            <a:ext cx="45720" cy="1572768"/>
           </a:xfrm>
           <a:prstGeom prst="rect">
             <a:avLst/>
@@ -31855,7 +31855,7 @@
         </p:nvSpPr>
         <p:spPr>
           <a:xfrm>
-            <a:off x="685800" y="5413247"/>
+            <a:off x="685800" y="5504688"/>
             <a:ext cx="512064" cy="512064"/>
           </a:xfrm>
           <a:prstGeom prst="ellipse">
@@ -31899,7 +31899,7 @@
         </p:nvSpPr>
         <p:spPr>
           <a:xfrm>
-            <a:off x="685800" y="5449823"/>
+            <a:off x="685800" y="5541264"/>
             <a:ext cx="512064" cy="438912"/>
           </a:xfrm>
           <a:prstGeom prst="rect">
@@ -31938,7 +31938,7 @@
         </p:nvSpPr>
         <p:spPr>
           <a:xfrm>
-            <a:off x="1362456" y="5413247"/>
+            <a:off x="1362456" y="5504688"/>
             <a:ext cx="5550408" cy="347472"/>
           </a:xfrm>
           <a:prstGeom prst="rect">
@@ -31977,8 +31977,8 @@
         </p:nvSpPr>
         <p:spPr>
           <a:xfrm>
-            <a:off x="1362456" y="5788151"/>
-            <a:ext cx="5550408" cy="969264"/>
+            <a:off x="1362456" y="5879592"/>
+            <a:ext cx="5550408" cy="1005840"/>
           </a:xfrm>
           <a:prstGeom prst="rect">
             <a:avLst/>
@@ -32016,8 +32016,8 @@
         </p:nvSpPr>
         <p:spPr>
           <a:xfrm>
-            <a:off x="502920" y="6986016"/>
-            <a:ext cx="6556248" cy="1536192"/>
+            <a:off x="502920" y="7040880"/>
+            <a:ext cx="6556248" cy="1572768"/>
           </a:xfrm>
           <a:prstGeom prst="roundRect">
             <a:avLst/>
@@ -32062,8 +32062,8 @@
         </p:nvSpPr>
         <p:spPr>
           <a:xfrm>
-            <a:off x="502920" y="6986016"/>
-            <a:ext cx="91440" cy="1536192"/>
+            <a:off x="502920" y="7040880"/>
+            <a:ext cx="91440" cy="1572768"/>
           </a:xfrm>
           <a:prstGeom prst="roundRect">
             <a:avLst/>
@@ -32106,8 +32106,8 @@
         </p:nvSpPr>
         <p:spPr>
           <a:xfrm>
-            <a:off x="548640" y="6986016"/>
-            <a:ext cx="45720" cy="1536192"/>
+            <a:off x="548640" y="7040880"/>
+            <a:ext cx="45720" cy="1572768"/>
           </a:xfrm>
           <a:prstGeom prst="rect">
             <a:avLst/>
@@ -32150,7 +32150,7 @@
         </p:nvSpPr>
         <p:spPr>
           <a:xfrm>
-            <a:off x="685800" y="7114032"/>
+            <a:off x="685800" y="7168896"/>
             <a:ext cx="512064" cy="512064"/>
           </a:xfrm>
           <a:prstGeom prst="ellipse">
@@ -32194,7 +32194,7 @@
         </p:nvSpPr>
         <p:spPr>
           <a:xfrm>
-            <a:off x="685800" y="7150608"/>
+            <a:off x="685800" y="7205472"/>
             <a:ext cx="512064" cy="438912"/>
           </a:xfrm>
           <a:prstGeom prst="rect">
@@ -32233,7 +32233,7 @@
         </p:nvSpPr>
         <p:spPr>
           <a:xfrm>
-            <a:off x="1362456" y="7114032"/>
+            <a:off x="1362456" y="7168896"/>
             <a:ext cx="5550408" cy="347472"/>
           </a:xfrm>
           <a:prstGeom prst="rect">
@@ -32272,8 +32272,8 @@
         </p:nvSpPr>
         <p:spPr>
           <a:xfrm>
-            <a:off x="1362456" y="7488936"/>
-            <a:ext cx="5550408" cy="969264"/>
+            <a:off x="1362456" y="7543800"/>
+            <a:ext cx="5550408" cy="1005840"/>
           </a:xfrm>
           <a:prstGeom prst="rect">
             <a:avLst/>
@@ -32311,8 +32311,8 @@
         </p:nvSpPr>
         <p:spPr>
           <a:xfrm>
-            <a:off x="502920" y="8686800"/>
-            <a:ext cx="6556248" cy="1536192"/>
+            <a:off x="502920" y="8705088"/>
+            <a:ext cx="6556248" cy="1572768"/>
           </a:xfrm>
           <a:prstGeom prst="roundRect">
             <a:avLst/>
@@ -32357,8 +32357,8 @@
         </p:nvSpPr>
         <p:spPr>
           <a:xfrm>
-            <a:off x="502920" y="8686800"/>
-            <a:ext cx="91440" cy="1536192"/>
+            <a:off x="502920" y="8705088"/>
+            <a:ext cx="91440" cy="1572768"/>
           </a:xfrm>
           <a:prstGeom prst="roundRect">
             <a:avLst/>
@@ -32401,8 +32401,8 @@
         </p:nvSpPr>
         <p:spPr>
           <a:xfrm>
-            <a:off x="548640" y="8686800"/>
-            <a:ext cx="45720" cy="1536192"/>
+            <a:off x="548640" y="8705088"/>
+            <a:ext cx="45720" cy="1572768"/>
           </a:xfrm>
           <a:prstGeom prst="rect">
             <a:avLst/>
@@ -32445,7 +32445,7 @@
         </p:nvSpPr>
         <p:spPr>
           <a:xfrm>
-            <a:off x="685800" y="8814816"/>
+            <a:off x="685800" y="8833104"/>
             <a:ext cx="512064" cy="512064"/>
           </a:xfrm>
           <a:prstGeom prst="ellipse">
@@ -32489,7 +32489,7 @@
         </p:nvSpPr>
         <p:spPr>
           <a:xfrm>
-            <a:off x="685800" y="8851392"/>
+            <a:off x="685800" y="8869680"/>
             <a:ext cx="512064" cy="438912"/>
           </a:xfrm>
           <a:prstGeom prst="rect">
@@ -32528,7 +32528,7 @@
         </p:nvSpPr>
         <p:spPr>
           <a:xfrm>
-            <a:off x="1362456" y="8814816"/>
+            <a:off x="1362456" y="8833104"/>
             <a:ext cx="5550408" cy="347472"/>
           </a:xfrm>
           <a:prstGeom prst="rect">
@@ -32567,8 +32567,8 @@
         </p:nvSpPr>
         <p:spPr>
           <a:xfrm>
-            <a:off x="1362456" y="9189720"/>
-            <a:ext cx="5550408" cy="969264"/>
+            <a:off x="1362456" y="9208008"/>
+            <a:ext cx="5550408" cy="1005840"/>
           </a:xfrm>
           <a:prstGeom prst="rect">
             <a:avLst/>

--- a/mandala_l1_handout.pptx
+++ b/mandala_l1_handout.pptx
@@ -23793,8 +23793,8 @@
         </p:nvSpPr>
         <p:spPr>
           <a:xfrm>
-            <a:off x="630936" y="1207008"/>
-            <a:ext cx="365760" cy="274320"/>
+            <a:off x="649224" y="1207008"/>
+            <a:ext cx="457200" cy="274320"/>
           </a:xfrm>
           <a:prstGeom prst="rect">
             <a:avLst/>
@@ -23813,13 +23813,13 @@
               </a:lnSpc>
             </a:pPr>
             <a:r>
-              <a:rPr sz="1320" b="1" i="0">
+              <a:rPr sz="1560" b="1" i="0">
                 <a:solidFill>
                   <a:srgbClr val="A95C66"/>
                 </a:solidFill>
                 <a:latin typeface="微軟正黑體"/>
               </a:rPr>
-              <a:t>01</a:t>
+              <a:t>1.</a:t>
             </a:r>
           </a:p>
         </p:txBody>
@@ -24044,8 +24044,8 @@
         </p:nvSpPr>
         <p:spPr>
           <a:xfrm>
-            <a:off x="4009644" y="1207008"/>
-            <a:ext cx="365760" cy="274320"/>
+            <a:off x="4027932" y="1207008"/>
+            <a:ext cx="457200" cy="274320"/>
           </a:xfrm>
           <a:prstGeom prst="rect">
             <a:avLst/>
@@ -24064,13 +24064,13 @@
               </a:lnSpc>
             </a:pPr>
             <a:r>
-              <a:rPr sz="1320" b="1" i="0">
+              <a:rPr sz="1560" b="1" i="0">
                 <a:solidFill>
                   <a:srgbClr val="A95C66"/>
                 </a:solidFill>
                 <a:latin typeface="微軟正黑體"/>
               </a:rPr>
-              <a:t>02</a:t>
+              <a:t>2.</a:t>
             </a:r>
           </a:p>
         </p:txBody>
@@ -24295,8 +24295,8 @@
         </p:nvSpPr>
         <p:spPr>
           <a:xfrm>
-            <a:off x="630936" y="2852927"/>
-            <a:ext cx="365760" cy="274320"/>
+            <a:off x="649224" y="2852927"/>
+            <a:ext cx="457200" cy="274320"/>
           </a:xfrm>
           <a:prstGeom prst="rect">
             <a:avLst/>
@@ -24315,13 +24315,13 @@
               </a:lnSpc>
             </a:pPr>
             <a:r>
-              <a:rPr sz="1320" b="1" i="0">
+              <a:rPr sz="1560" b="1" i="0">
                 <a:solidFill>
                   <a:srgbClr val="A95C66"/>
                 </a:solidFill>
                 <a:latin typeface="微軟正黑體"/>
               </a:rPr>
-              <a:t>03</a:t>
+              <a:t>3.</a:t>
             </a:r>
           </a:p>
         </p:txBody>
@@ -24546,8 +24546,8 @@
         </p:nvSpPr>
         <p:spPr>
           <a:xfrm>
-            <a:off x="4009644" y="2852927"/>
-            <a:ext cx="365760" cy="274320"/>
+            <a:off x="4027932" y="2852927"/>
+            <a:ext cx="457200" cy="274320"/>
           </a:xfrm>
           <a:prstGeom prst="rect">
             <a:avLst/>
@@ -24566,13 +24566,13 @@
               </a:lnSpc>
             </a:pPr>
             <a:r>
-              <a:rPr sz="1320" b="1" i="0">
+              <a:rPr sz="1560" b="1" i="0">
                 <a:solidFill>
                   <a:srgbClr val="A95C66"/>
                 </a:solidFill>
                 <a:latin typeface="微軟正黑體"/>
               </a:rPr>
-              <a:t>04</a:t>
+              <a:t>4.</a:t>
             </a:r>
           </a:p>
         </p:txBody>
@@ -24797,8 +24797,8 @@
         </p:nvSpPr>
         <p:spPr>
           <a:xfrm>
-            <a:off x="630936" y="4498848"/>
-            <a:ext cx="365760" cy="274320"/>
+            <a:off x="649224" y="4498848"/>
+            <a:ext cx="457200" cy="274320"/>
           </a:xfrm>
           <a:prstGeom prst="rect">
             <a:avLst/>
@@ -24817,13 +24817,13 @@
               </a:lnSpc>
             </a:pPr>
             <a:r>
-              <a:rPr sz="1320" b="1" i="0">
+              <a:rPr sz="1560" b="1" i="0">
                 <a:solidFill>
                   <a:srgbClr val="A95C66"/>
                 </a:solidFill>
                 <a:latin typeface="微軟正黑體"/>
               </a:rPr>
-              <a:t>05</a:t>
+              <a:t>5.</a:t>
             </a:r>
           </a:p>
         </p:txBody>
@@ -25048,8 +25048,8 @@
         </p:nvSpPr>
         <p:spPr>
           <a:xfrm>
-            <a:off x="4009644" y="4498848"/>
-            <a:ext cx="365760" cy="274320"/>
+            <a:off x="4027932" y="4498848"/>
+            <a:ext cx="457200" cy="274320"/>
           </a:xfrm>
           <a:prstGeom prst="rect">
             <a:avLst/>
@@ -25068,13 +25068,13 @@
               </a:lnSpc>
             </a:pPr>
             <a:r>
-              <a:rPr sz="1320" b="1" i="0">
+              <a:rPr sz="1560" b="1" i="0">
                 <a:solidFill>
                   <a:srgbClr val="A95C66"/>
                 </a:solidFill>
                 <a:latin typeface="微軟正黑體"/>
               </a:rPr>
-              <a:t>06</a:t>
+              <a:t>6.</a:t>
             </a:r>
           </a:p>
         </p:txBody>

--- a/mandala_l1_handout.pptx
+++ b/mandala_l1_handout.pptx
@@ -3596,7 +3596,7 @@
               </a:lnSpc>
             </a:pPr>
             <a:r>
-              <a:rPr sz="1200" b="1" i="0">
+              <a:rPr sz="1100" b="1" i="0">
                 <a:solidFill>
                   <a:srgbClr val="C9A96E"/>
                 </a:solidFill>
@@ -3635,7 +3635,7 @@
               </a:lnSpc>
             </a:pPr>
             <a:r>
-              <a:rPr sz="2640" b="1" i="0">
+              <a:rPr sz="2540" b="1" i="0">
                 <a:solidFill>
                   <a:srgbClr val="4A403A"/>
                 </a:solidFill>
@@ -3674,7 +3674,7 @@
               </a:lnSpc>
             </a:pPr>
             <a:r>
-              <a:rPr sz="1080" b="0" i="0">
+              <a:rPr sz="979" b="0" i="0">
                 <a:solidFill>
                   <a:srgbClr val="8A7A6A"/>
                 </a:solidFill>
@@ -3757,7 +3757,7 @@
               </a:lnSpc>
             </a:pPr>
             <a:r>
-              <a:rPr sz="6240" b="1" i="0">
+              <a:rPr sz="6140" b="1" i="0">
                 <a:solidFill>
                   <a:srgbClr val="FFFFFF"/>
                 </a:solidFill>
@@ -3796,7 +3796,7 @@
               </a:lnSpc>
             </a:pPr>
             <a:r>
-              <a:rPr sz="2160" b="1" i="0">
+              <a:rPr sz="2059" b="1" i="0">
                 <a:solidFill>
                   <a:srgbClr val="FFFFFF"/>
                 </a:solidFill>
@@ -3835,7 +3835,7 @@
               </a:lnSpc>
             </a:pPr>
             <a:r>
-              <a:rPr sz="1439" b="1" i="0">
+              <a:rPr sz="1339" b="1" i="0">
                 <a:solidFill>
                   <a:srgbClr val="FFFFFF"/>
                 </a:solidFill>
@@ -3874,7 +3874,7 @@
               </a:lnSpc>
             </a:pPr>
             <a:r>
-              <a:rPr sz="1439" b="1" i="0">
+              <a:rPr sz="1339" b="1" i="0">
                 <a:solidFill>
                   <a:srgbClr val="A95C66"/>
                 </a:solidFill>
@@ -3957,7 +3957,7 @@
               </a:lnSpc>
             </a:pPr>
             <a:r>
-              <a:rPr sz="1200" b="0" i="0">
+              <a:rPr sz="1100" b="0" i="0">
                 <a:solidFill>
                   <a:srgbClr val="8A7A6A"/>
                 </a:solidFill>
@@ -4084,7 +4084,7 @@
               </a:lnSpc>
             </a:pPr>
             <a:r>
-              <a:rPr sz="1200" b="1" i="0">
+              <a:rPr sz="1100" b="1" i="0">
                 <a:solidFill>
                   <a:srgbClr val="8A7A6A"/>
                 </a:solidFill>
@@ -4123,7 +4123,7 @@
               </a:lnSpc>
             </a:pPr>
             <a:r>
-              <a:rPr sz="1200" b="0" i="0">
+              <a:rPr sz="1100" b="0" i="0">
                 <a:solidFill>
                   <a:srgbClr val="8A7A6A"/>
                 </a:solidFill>
@@ -4250,7 +4250,7 @@
               </a:lnSpc>
             </a:pPr>
             <a:r>
-              <a:rPr sz="1200" b="1" i="0">
+              <a:rPr sz="1100" b="1" i="0">
                 <a:solidFill>
                   <a:srgbClr val="8A7A6A"/>
                 </a:solidFill>
@@ -4289,7 +4289,7 @@
               </a:lnSpc>
             </a:pPr>
             <a:r>
-              <a:rPr sz="1200" b="0" i="0">
+              <a:rPr sz="1100" b="0" i="0">
                 <a:solidFill>
                   <a:srgbClr val="8A7A6A"/>
                 </a:solidFill>
@@ -4416,7 +4416,7 @@
               </a:lnSpc>
             </a:pPr>
             <a:r>
-              <a:rPr sz="1200" b="1" i="0">
+              <a:rPr sz="1100" b="1" i="0">
                 <a:solidFill>
                   <a:srgbClr val="8A7A6A"/>
                 </a:solidFill>
@@ -4455,7 +4455,7 @@
               </a:lnSpc>
             </a:pPr>
             <a:r>
-              <a:rPr sz="1200" b="0" i="0">
+              <a:rPr sz="1100" b="0" i="0">
                 <a:solidFill>
                   <a:srgbClr val="8A7A6A"/>
                 </a:solidFill>
@@ -4582,7 +4582,7 @@
               </a:lnSpc>
             </a:pPr>
             <a:r>
-              <a:rPr sz="1200" b="1" i="0">
+              <a:rPr sz="1100" b="1" i="0">
                 <a:solidFill>
                   <a:srgbClr val="8A7A6A"/>
                 </a:solidFill>
@@ -4621,7 +4621,7 @@
               </a:lnSpc>
             </a:pPr>
             <a:r>
-              <a:rPr sz="1200" b="0" i="0">
+              <a:rPr sz="1100" b="0" i="0">
                 <a:solidFill>
                   <a:srgbClr val="8A7A6A"/>
                 </a:solidFill>
@@ -4748,7 +4748,7 @@
               </a:lnSpc>
             </a:pPr>
             <a:r>
-              <a:rPr sz="1200" b="1" i="0">
+              <a:rPr sz="1100" b="1" i="0">
                 <a:solidFill>
                   <a:srgbClr val="8A7A6A"/>
                 </a:solidFill>
@@ -4787,7 +4787,7 @@
               </a:lnSpc>
             </a:pPr>
             <a:r>
-              <a:rPr sz="1439" b="1" i="0">
+              <a:rPr sz="1339" b="1" i="0">
                 <a:solidFill>
                   <a:srgbClr val="A95C66"/>
                 </a:solidFill>
@@ -4914,7 +4914,7 @@
               </a:lnSpc>
             </a:pPr>
             <a:r>
-              <a:rPr sz="1320" b="0" i="0">
+              <a:rPr sz="1220" b="0" i="0">
                 <a:solidFill>
                   <a:srgbClr val="4A403A"/>
                 </a:solidFill>
@@ -4997,7 +4997,7 @@
               </a:lnSpc>
             </a:pPr>
             <a:r>
-              <a:rPr sz="1320" b="0" i="0">
+              <a:rPr sz="1220" b="0" i="0">
                 <a:solidFill>
                   <a:srgbClr val="4A403A"/>
                 </a:solidFill>
@@ -5080,7 +5080,7 @@
               </a:lnSpc>
             </a:pPr>
             <a:r>
-              <a:rPr sz="1320" b="0" i="0">
+              <a:rPr sz="1220" b="0" i="0">
                 <a:solidFill>
                   <a:srgbClr val="4A403A"/>
                 </a:solidFill>
@@ -5163,7 +5163,7 @@
               </a:lnSpc>
             </a:pPr>
             <a:r>
-              <a:rPr sz="1320" b="0" i="0">
+              <a:rPr sz="1220" b="0" i="0">
                 <a:solidFill>
                   <a:srgbClr val="4A403A"/>
                 </a:solidFill>
@@ -5246,7 +5246,7 @@
               </a:lnSpc>
             </a:pPr>
             <a:r>
-              <a:rPr sz="1560" b="1" i="0">
+              <a:rPr sz="1460" b="1" i="0">
                 <a:solidFill>
                   <a:srgbClr val="E8434B"/>
                 </a:solidFill>
@@ -5329,7 +5329,7 @@
               </a:lnSpc>
             </a:pPr>
             <a:r>
-              <a:rPr sz="1439" b="0" i="0">
+              <a:rPr sz="1339" b="0" i="0">
                 <a:solidFill>
                   <a:srgbClr val="8A7A6A"/>
                 </a:solidFill>
@@ -5345,7 +5345,7 @@
               </a:lnSpc>
             </a:pPr>
             <a:r>
-              <a:rPr sz="1439" b="0" i="0">
+              <a:rPr sz="1339" b="0" i="0">
                 <a:solidFill>
                   <a:srgbClr val="8A7A6A"/>
                 </a:solidFill>
@@ -5428,7 +5428,7 @@
               </a:lnSpc>
             </a:pPr>
             <a:r>
-              <a:rPr sz="1560" b="1" i="0">
+              <a:rPr sz="1460" b="1" i="0">
                 <a:solidFill>
                   <a:srgbClr val="E8434B"/>
                 </a:solidFill>
@@ -5511,7 +5511,7 @@
               </a:lnSpc>
             </a:pPr>
             <a:r>
-              <a:rPr sz="1439" b="0" i="0">
+              <a:rPr sz="1339" b="0" i="0">
                 <a:solidFill>
                   <a:srgbClr val="8A7A6A"/>
                 </a:solidFill>
@@ -5594,7 +5594,7 @@
               </a:lnSpc>
             </a:pPr>
             <a:r>
-              <a:rPr sz="1320" b="1" i="0">
+              <a:rPr sz="1220" b="1" i="0">
                 <a:solidFill>
                   <a:srgbClr val="C9A96E"/>
                 </a:solidFill>
@@ -5633,7 +5633,7 @@
               </a:lnSpc>
             </a:pPr>
             <a:r>
-              <a:rPr sz="1320" b="0" i="0">
+              <a:rPr sz="1220" b="0" i="0">
                 <a:solidFill>
                   <a:srgbClr val="8A7A6A"/>
                 </a:solidFill>
@@ -5815,7 +5815,7 @@
               </a:lnSpc>
             </a:pPr>
             <a:r>
-              <a:rPr sz="1200" b="1" i="0">
+              <a:rPr sz="1100" b="1" i="0">
                 <a:solidFill>
                   <a:srgbClr val="C9A96E"/>
                 </a:solidFill>
@@ -5854,7 +5854,7 @@
               </a:lnSpc>
             </a:pPr>
             <a:r>
-              <a:rPr sz="2640" b="1" i="0">
+              <a:rPr sz="2540" b="1" i="0">
                 <a:solidFill>
                   <a:srgbClr val="4A403A"/>
                 </a:solidFill>
@@ -5893,7 +5893,7 @@
               </a:lnSpc>
             </a:pPr>
             <a:r>
-              <a:rPr sz="1080" b="0" i="0">
+              <a:rPr sz="979" b="0" i="0">
                 <a:solidFill>
                   <a:srgbClr val="8A7A6A"/>
                 </a:solidFill>
@@ -5976,7 +5976,7 @@
               </a:lnSpc>
             </a:pPr>
             <a:r>
-              <a:rPr sz="6240" b="1" i="0">
+              <a:rPr sz="6140" b="1" i="0">
                 <a:solidFill>
                   <a:srgbClr val="FFFFFF"/>
                 </a:solidFill>
@@ -6015,7 +6015,7 @@
               </a:lnSpc>
             </a:pPr>
             <a:r>
-              <a:rPr sz="2160" b="1" i="0">
+              <a:rPr sz="2059" b="1" i="0">
                 <a:solidFill>
                   <a:srgbClr val="FFFFFF"/>
                 </a:solidFill>
@@ -6054,7 +6054,7 @@
               </a:lnSpc>
             </a:pPr>
             <a:r>
-              <a:rPr sz="1439" b="1" i="0">
+              <a:rPr sz="1339" b="1" i="0">
                 <a:solidFill>
                   <a:srgbClr val="FFFFFF"/>
                 </a:solidFill>
@@ -6093,7 +6093,7 @@
               </a:lnSpc>
             </a:pPr>
             <a:r>
-              <a:rPr sz="1439" b="1" i="0">
+              <a:rPr sz="1339" b="1" i="0">
                 <a:solidFill>
                   <a:srgbClr val="A95C66"/>
                 </a:solidFill>
@@ -6176,7 +6176,7 @@
               </a:lnSpc>
             </a:pPr>
             <a:r>
-              <a:rPr sz="1200" b="0" i="0">
+              <a:rPr sz="1100" b="0" i="0">
                 <a:solidFill>
                   <a:srgbClr val="8A7A6A"/>
                 </a:solidFill>
@@ -6303,7 +6303,7 @@
               </a:lnSpc>
             </a:pPr>
             <a:r>
-              <a:rPr sz="1200" b="1" i="0">
+              <a:rPr sz="1100" b="1" i="0">
                 <a:solidFill>
                   <a:srgbClr val="8A7A6A"/>
                 </a:solidFill>
@@ -6342,7 +6342,7 @@
               </a:lnSpc>
             </a:pPr>
             <a:r>
-              <a:rPr sz="1200" b="0" i="0">
+              <a:rPr sz="1100" b="0" i="0">
                 <a:solidFill>
                   <a:srgbClr val="8A7A6A"/>
                 </a:solidFill>
@@ -6469,7 +6469,7 @@
               </a:lnSpc>
             </a:pPr>
             <a:r>
-              <a:rPr sz="1200" b="1" i="0">
+              <a:rPr sz="1100" b="1" i="0">
                 <a:solidFill>
                   <a:srgbClr val="8A7A6A"/>
                 </a:solidFill>
@@ -6508,7 +6508,7 @@
               </a:lnSpc>
             </a:pPr>
             <a:r>
-              <a:rPr sz="1200" b="0" i="0">
+              <a:rPr sz="1100" b="0" i="0">
                 <a:solidFill>
                   <a:srgbClr val="8A7A6A"/>
                 </a:solidFill>
@@ -6635,7 +6635,7 @@
               </a:lnSpc>
             </a:pPr>
             <a:r>
-              <a:rPr sz="1200" b="1" i="0">
+              <a:rPr sz="1100" b="1" i="0">
                 <a:solidFill>
                   <a:srgbClr val="8A7A6A"/>
                 </a:solidFill>
@@ -6674,7 +6674,7 @@
               </a:lnSpc>
             </a:pPr>
             <a:r>
-              <a:rPr sz="1200" b="0" i="0">
+              <a:rPr sz="1100" b="0" i="0">
                 <a:solidFill>
                   <a:srgbClr val="8A7A6A"/>
                 </a:solidFill>
@@ -6801,7 +6801,7 @@
               </a:lnSpc>
             </a:pPr>
             <a:r>
-              <a:rPr sz="1200" b="1" i="0">
+              <a:rPr sz="1100" b="1" i="0">
                 <a:solidFill>
                   <a:srgbClr val="8A7A6A"/>
                 </a:solidFill>
@@ -6840,7 +6840,7 @@
               </a:lnSpc>
             </a:pPr>
             <a:r>
-              <a:rPr sz="1200" b="0" i="0">
+              <a:rPr sz="1100" b="0" i="0">
                 <a:solidFill>
                   <a:srgbClr val="8A7A6A"/>
                 </a:solidFill>
@@ -6967,7 +6967,7 @@
               </a:lnSpc>
             </a:pPr>
             <a:r>
-              <a:rPr sz="1200" b="1" i="0">
+              <a:rPr sz="1100" b="1" i="0">
                 <a:solidFill>
                   <a:srgbClr val="8A7A6A"/>
                 </a:solidFill>
@@ -7006,7 +7006,7 @@
               </a:lnSpc>
             </a:pPr>
             <a:r>
-              <a:rPr sz="1439" b="1" i="0">
+              <a:rPr sz="1339" b="1" i="0">
                 <a:solidFill>
                   <a:srgbClr val="A95C66"/>
                 </a:solidFill>
@@ -7133,7 +7133,7 @@
               </a:lnSpc>
             </a:pPr>
             <a:r>
-              <a:rPr sz="1320" b="0" i="0">
+              <a:rPr sz="1220" b="0" i="0">
                 <a:solidFill>
                   <a:srgbClr val="4A403A"/>
                 </a:solidFill>
@@ -7216,7 +7216,7 @@
               </a:lnSpc>
             </a:pPr>
             <a:r>
-              <a:rPr sz="1320" b="0" i="0">
+              <a:rPr sz="1220" b="0" i="0">
                 <a:solidFill>
                   <a:srgbClr val="4A403A"/>
                 </a:solidFill>
@@ -7299,7 +7299,7 @@
               </a:lnSpc>
             </a:pPr>
             <a:r>
-              <a:rPr sz="1320" b="0" i="0">
+              <a:rPr sz="1220" b="0" i="0">
                 <a:solidFill>
                   <a:srgbClr val="4A403A"/>
                 </a:solidFill>
@@ -7382,7 +7382,7 @@
               </a:lnSpc>
             </a:pPr>
             <a:r>
-              <a:rPr sz="1320" b="0" i="0">
+              <a:rPr sz="1220" b="0" i="0">
                 <a:solidFill>
                   <a:srgbClr val="4A403A"/>
                 </a:solidFill>
@@ -7465,7 +7465,7 @@
               </a:lnSpc>
             </a:pPr>
             <a:r>
-              <a:rPr sz="1560" b="1" i="0">
+              <a:rPr sz="1460" b="1" i="0">
                 <a:solidFill>
                   <a:srgbClr val="E89A3A"/>
                 </a:solidFill>
@@ -7548,7 +7548,7 @@
               </a:lnSpc>
             </a:pPr>
             <a:r>
-              <a:rPr sz="1439" b="0" i="0">
+              <a:rPr sz="1339" b="0" i="0">
                 <a:solidFill>
                   <a:srgbClr val="8A7A6A"/>
                 </a:solidFill>
@@ -7564,7 +7564,7 @@
               </a:lnSpc>
             </a:pPr>
             <a:r>
-              <a:rPr sz="1439" b="0" i="0">
+              <a:rPr sz="1339" b="0" i="0">
                 <a:solidFill>
                   <a:srgbClr val="8A7A6A"/>
                 </a:solidFill>
@@ -7647,7 +7647,7 @@
               </a:lnSpc>
             </a:pPr>
             <a:r>
-              <a:rPr sz="1560" b="1" i="0">
+              <a:rPr sz="1460" b="1" i="0">
                 <a:solidFill>
                   <a:srgbClr val="E89A3A"/>
                 </a:solidFill>
@@ -7730,7 +7730,7 @@
               </a:lnSpc>
             </a:pPr>
             <a:r>
-              <a:rPr sz="1439" b="0" i="0">
+              <a:rPr sz="1339" b="0" i="0">
                 <a:solidFill>
                   <a:srgbClr val="8A7A6A"/>
                 </a:solidFill>
@@ -7813,7 +7813,7 @@
               </a:lnSpc>
             </a:pPr>
             <a:r>
-              <a:rPr sz="1320" b="1" i="0">
+              <a:rPr sz="1220" b="1" i="0">
                 <a:solidFill>
                   <a:srgbClr val="C9A96E"/>
                 </a:solidFill>
@@ -7852,7 +7852,7 @@
               </a:lnSpc>
             </a:pPr>
             <a:r>
-              <a:rPr sz="1320" b="0" i="0">
+              <a:rPr sz="1220" b="0" i="0">
                 <a:solidFill>
                   <a:srgbClr val="8A7A6A"/>
                 </a:solidFill>
@@ -8034,7 +8034,7 @@
               </a:lnSpc>
             </a:pPr>
             <a:r>
-              <a:rPr sz="1200" b="1" i="0">
+              <a:rPr sz="1100" b="1" i="0">
                 <a:solidFill>
                   <a:srgbClr val="C9A96E"/>
                 </a:solidFill>
@@ -8073,7 +8073,7 @@
               </a:lnSpc>
             </a:pPr>
             <a:r>
-              <a:rPr sz="2640" b="1" i="0">
+              <a:rPr sz="2540" b="1" i="0">
                 <a:solidFill>
                   <a:srgbClr val="4A403A"/>
                 </a:solidFill>
@@ -8112,7 +8112,7 @@
               </a:lnSpc>
             </a:pPr>
             <a:r>
-              <a:rPr sz="1080" b="0" i="0">
+              <a:rPr sz="979" b="0" i="0">
                 <a:solidFill>
                   <a:srgbClr val="8A7A6A"/>
                 </a:solidFill>
@@ -8195,7 +8195,7 @@
               </a:lnSpc>
             </a:pPr>
             <a:r>
-              <a:rPr sz="6240" b="1" i="0">
+              <a:rPr sz="6140" b="1" i="0">
                 <a:solidFill>
                   <a:srgbClr val="FFFFFF"/>
                 </a:solidFill>
@@ -8234,7 +8234,7 @@
               </a:lnSpc>
             </a:pPr>
             <a:r>
-              <a:rPr sz="2160" b="1" i="0">
+              <a:rPr sz="2059" b="1" i="0">
                 <a:solidFill>
                   <a:srgbClr val="FFFFFF"/>
                 </a:solidFill>
@@ -8273,7 +8273,7 @@
               </a:lnSpc>
             </a:pPr>
             <a:r>
-              <a:rPr sz="1439" b="1" i="0">
+              <a:rPr sz="1339" b="1" i="0">
                 <a:solidFill>
                   <a:srgbClr val="FFFFFF"/>
                 </a:solidFill>
@@ -8312,7 +8312,7 @@
               </a:lnSpc>
             </a:pPr>
             <a:r>
-              <a:rPr sz="1439" b="1" i="0">
+              <a:rPr sz="1339" b="1" i="0">
                 <a:solidFill>
                   <a:srgbClr val="A95C66"/>
                 </a:solidFill>
@@ -8395,7 +8395,7 @@
               </a:lnSpc>
             </a:pPr>
             <a:r>
-              <a:rPr sz="1200" b="0" i="0">
+              <a:rPr sz="1100" b="0" i="0">
                 <a:solidFill>
                   <a:srgbClr val="8A7A6A"/>
                 </a:solidFill>
@@ -8522,7 +8522,7 @@
               </a:lnSpc>
             </a:pPr>
             <a:r>
-              <a:rPr sz="1200" b="1" i="0">
+              <a:rPr sz="1100" b="1" i="0">
                 <a:solidFill>
                   <a:srgbClr val="8A7A6A"/>
                 </a:solidFill>
@@ -8561,7 +8561,7 @@
               </a:lnSpc>
             </a:pPr>
             <a:r>
-              <a:rPr sz="1200" b="0" i="0">
+              <a:rPr sz="1100" b="0" i="0">
                 <a:solidFill>
                   <a:srgbClr val="8A7A6A"/>
                 </a:solidFill>
@@ -8688,7 +8688,7 @@
               </a:lnSpc>
             </a:pPr>
             <a:r>
-              <a:rPr sz="1200" b="1" i="0">
+              <a:rPr sz="1100" b="1" i="0">
                 <a:solidFill>
                   <a:srgbClr val="8A7A6A"/>
                 </a:solidFill>
@@ -8727,7 +8727,7 @@
               </a:lnSpc>
             </a:pPr>
             <a:r>
-              <a:rPr sz="1200" b="0" i="0">
+              <a:rPr sz="1100" b="0" i="0">
                 <a:solidFill>
                   <a:srgbClr val="8A7A6A"/>
                 </a:solidFill>
@@ -8854,7 +8854,7 @@
               </a:lnSpc>
             </a:pPr>
             <a:r>
-              <a:rPr sz="1200" b="1" i="0">
+              <a:rPr sz="1100" b="1" i="0">
                 <a:solidFill>
                   <a:srgbClr val="8A7A6A"/>
                 </a:solidFill>
@@ -8893,7 +8893,7 @@
               </a:lnSpc>
             </a:pPr>
             <a:r>
-              <a:rPr sz="1200" b="0" i="0">
+              <a:rPr sz="1100" b="0" i="0">
                 <a:solidFill>
                   <a:srgbClr val="8A7A6A"/>
                 </a:solidFill>
@@ -9020,7 +9020,7 @@
               </a:lnSpc>
             </a:pPr>
             <a:r>
-              <a:rPr sz="1200" b="1" i="0">
+              <a:rPr sz="1100" b="1" i="0">
                 <a:solidFill>
                   <a:srgbClr val="8A7A6A"/>
                 </a:solidFill>
@@ -9059,7 +9059,7 @@
               </a:lnSpc>
             </a:pPr>
             <a:r>
-              <a:rPr sz="1200" b="0" i="0">
+              <a:rPr sz="1100" b="0" i="0">
                 <a:solidFill>
                   <a:srgbClr val="8A7A6A"/>
                 </a:solidFill>
@@ -9186,7 +9186,7 @@
               </a:lnSpc>
             </a:pPr>
             <a:r>
-              <a:rPr sz="1200" b="1" i="0">
+              <a:rPr sz="1100" b="1" i="0">
                 <a:solidFill>
                   <a:srgbClr val="8A7A6A"/>
                 </a:solidFill>
@@ -9225,7 +9225,7 @@
               </a:lnSpc>
             </a:pPr>
             <a:r>
-              <a:rPr sz="1439" b="1" i="0">
+              <a:rPr sz="1339" b="1" i="0">
                 <a:solidFill>
                   <a:srgbClr val="A95C66"/>
                 </a:solidFill>
@@ -9352,7 +9352,7 @@
               </a:lnSpc>
             </a:pPr>
             <a:r>
-              <a:rPr sz="1320" b="0" i="0">
+              <a:rPr sz="1220" b="0" i="0">
                 <a:solidFill>
                   <a:srgbClr val="4A403A"/>
                 </a:solidFill>
@@ -9435,7 +9435,7 @@
               </a:lnSpc>
             </a:pPr>
             <a:r>
-              <a:rPr sz="1320" b="0" i="0">
+              <a:rPr sz="1220" b="0" i="0">
                 <a:solidFill>
                   <a:srgbClr val="4A403A"/>
                 </a:solidFill>
@@ -9518,7 +9518,7 @@
               </a:lnSpc>
             </a:pPr>
             <a:r>
-              <a:rPr sz="1320" b="0" i="0">
+              <a:rPr sz="1220" b="0" i="0">
                 <a:solidFill>
                   <a:srgbClr val="4A403A"/>
                 </a:solidFill>
@@ -9601,7 +9601,7 @@
               </a:lnSpc>
             </a:pPr>
             <a:r>
-              <a:rPr sz="1320" b="0" i="0">
+              <a:rPr sz="1220" b="0" i="0">
                 <a:solidFill>
                   <a:srgbClr val="4A403A"/>
                 </a:solidFill>
@@ -9684,7 +9684,7 @@
               </a:lnSpc>
             </a:pPr>
             <a:r>
-              <a:rPr sz="1560" b="1" i="0">
+              <a:rPr sz="1460" b="1" i="0">
                 <a:solidFill>
                   <a:srgbClr val="E6DA55"/>
                 </a:solidFill>
@@ -9767,7 +9767,7 @@
               </a:lnSpc>
             </a:pPr>
             <a:r>
-              <a:rPr sz="1439" b="0" i="0">
+              <a:rPr sz="1339" b="0" i="0">
                 <a:solidFill>
                   <a:srgbClr val="8A7A6A"/>
                 </a:solidFill>
@@ -9783,7 +9783,7 @@
               </a:lnSpc>
             </a:pPr>
             <a:r>
-              <a:rPr sz="1439" b="0" i="0">
+              <a:rPr sz="1339" b="0" i="0">
                 <a:solidFill>
                   <a:srgbClr val="8A7A6A"/>
                 </a:solidFill>
@@ -9866,7 +9866,7 @@
               </a:lnSpc>
             </a:pPr>
             <a:r>
-              <a:rPr sz="1560" b="1" i="0">
+              <a:rPr sz="1460" b="1" i="0">
                 <a:solidFill>
                   <a:srgbClr val="E6DA55"/>
                 </a:solidFill>
@@ -9949,7 +9949,7 @@
               </a:lnSpc>
             </a:pPr>
             <a:r>
-              <a:rPr sz="1439" b="0" i="0">
+              <a:rPr sz="1339" b="0" i="0">
                 <a:solidFill>
                   <a:srgbClr val="8A7A6A"/>
                 </a:solidFill>
@@ -10032,7 +10032,7 @@
               </a:lnSpc>
             </a:pPr>
             <a:r>
-              <a:rPr sz="1320" b="1" i="0">
+              <a:rPr sz="1220" b="1" i="0">
                 <a:solidFill>
                   <a:srgbClr val="C9A96E"/>
                 </a:solidFill>
@@ -10071,7 +10071,7 @@
               </a:lnSpc>
             </a:pPr>
             <a:r>
-              <a:rPr sz="1320" b="0" i="0">
+              <a:rPr sz="1220" b="0" i="0">
                 <a:solidFill>
                   <a:srgbClr val="8A7A6A"/>
                 </a:solidFill>
@@ -10253,7 +10253,7 @@
               </a:lnSpc>
             </a:pPr>
             <a:r>
-              <a:rPr sz="1200" b="1" i="0">
+              <a:rPr sz="1100" b="1" i="0">
                 <a:solidFill>
                   <a:srgbClr val="C9A96E"/>
                 </a:solidFill>
@@ -10292,7 +10292,7 @@
               </a:lnSpc>
             </a:pPr>
             <a:r>
-              <a:rPr sz="2640" b="1" i="0">
+              <a:rPr sz="2540" b="1" i="0">
                 <a:solidFill>
                   <a:srgbClr val="4A403A"/>
                 </a:solidFill>
@@ -10331,7 +10331,7 @@
               </a:lnSpc>
             </a:pPr>
             <a:r>
-              <a:rPr sz="1080" b="0" i="0">
+              <a:rPr sz="979" b="0" i="0">
                 <a:solidFill>
                   <a:srgbClr val="8A7A6A"/>
                 </a:solidFill>
@@ -10414,7 +10414,7 @@
               </a:lnSpc>
             </a:pPr>
             <a:r>
-              <a:rPr sz="6240" b="1" i="0">
+              <a:rPr sz="6140" b="1" i="0">
                 <a:solidFill>
                   <a:srgbClr val="FFFFFF"/>
                 </a:solidFill>
@@ -10453,7 +10453,7 @@
               </a:lnSpc>
             </a:pPr>
             <a:r>
-              <a:rPr sz="2160" b="1" i="0">
+              <a:rPr sz="2059" b="1" i="0">
                 <a:solidFill>
                   <a:srgbClr val="FFFFFF"/>
                 </a:solidFill>
@@ -10492,7 +10492,7 @@
               </a:lnSpc>
             </a:pPr>
             <a:r>
-              <a:rPr sz="1439" b="1" i="0">
+              <a:rPr sz="1339" b="1" i="0">
                 <a:solidFill>
                   <a:srgbClr val="FFFFFF"/>
                 </a:solidFill>
@@ -10531,7 +10531,7 @@
               </a:lnSpc>
             </a:pPr>
             <a:r>
-              <a:rPr sz="1439" b="1" i="0">
+              <a:rPr sz="1339" b="1" i="0">
                 <a:solidFill>
                   <a:srgbClr val="A95C66"/>
                 </a:solidFill>
@@ -10614,7 +10614,7 @@
               </a:lnSpc>
             </a:pPr>
             <a:r>
-              <a:rPr sz="1200" b="0" i="0">
+              <a:rPr sz="1100" b="0" i="0">
                 <a:solidFill>
                   <a:srgbClr val="8A7A6A"/>
                 </a:solidFill>
@@ -10741,7 +10741,7 @@
               </a:lnSpc>
             </a:pPr>
             <a:r>
-              <a:rPr sz="1200" b="1" i="0">
+              <a:rPr sz="1100" b="1" i="0">
                 <a:solidFill>
                   <a:srgbClr val="8A7A6A"/>
                 </a:solidFill>
@@ -10780,7 +10780,7 @@
               </a:lnSpc>
             </a:pPr>
             <a:r>
-              <a:rPr sz="1200" b="0" i="0">
+              <a:rPr sz="1100" b="0" i="0">
                 <a:solidFill>
                   <a:srgbClr val="8A7A6A"/>
                 </a:solidFill>
@@ -10907,7 +10907,7 @@
               </a:lnSpc>
             </a:pPr>
             <a:r>
-              <a:rPr sz="1200" b="1" i="0">
+              <a:rPr sz="1100" b="1" i="0">
                 <a:solidFill>
                   <a:srgbClr val="8A7A6A"/>
                 </a:solidFill>
@@ -10946,7 +10946,7 @@
               </a:lnSpc>
             </a:pPr>
             <a:r>
-              <a:rPr sz="1200" b="0" i="0">
+              <a:rPr sz="1100" b="0" i="0">
                 <a:solidFill>
                   <a:srgbClr val="8A7A6A"/>
                 </a:solidFill>
@@ -11073,7 +11073,7 @@
               </a:lnSpc>
             </a:pPr>
             <a:r>
-              <a:rPr sz="1200" b="1" i="0">
+              <a:rPr sz="1100" b="1" i="0">
                 <a:solidFill>
                   <a:srgbClr val="8A7A6A"/>
                 </a:solidFill>
@@ -11112,7 +11112,7 @@
               </a:lnSpc>
             </a:pPr>
             <a:r>
-              <a:rPr sz="1200" b="0" i="0">
+              <a:rPr sz="1100" b="0" i="0">
                 <a:solidFill>
                   <a:srgbClr val="8A7A6A"/>
                 </a:solidFill>
@@ -11239,7 +11239,7 @@
               </a:lnSpc>
             </a:pPr>
             <a:r>
-              <a:rPr sz="1200" b="1" i="0">
+              <a:rPr sz="1100" b="1" i="0">
                 <a:solidFill>
                   <a:srgbClr val="8A7A6A"/>
                 </a:solidFill>
@@ -11278,7 +11278,7 @@
               </a:lnSpc>
             </a:pPr>
             <a:r>
-              <a:rPr sz="1200" b="0" i="0">
+              <a:rPr sz="1100" b="0" i="0">
                 <a:solidFill>
                   <a:srgbClr val="8A7A6A"/>
                 </a:solidFill>
@@ -11405,7 +11405,7 @@
               </a:lnSpc>
             </a:pPr>
             <a:r>
-              <a:rPr sz="1200" b="1" i="0">
+              <a:rPr sz="1100" b="1" i="0">
                 <a:solidFill>
                   <a:srgbClr val="8A7A6A"/>
                 </a:solidFill>
@@ -11444,7 +11444,7 @@
               </a:lnSpc>
             </a:pPr>
             <a:r>
-              <a:rPr sz="1439" b="1" i="0">
+              <a:rPr sz="1339" b="1" i="0">
                 <a:solidFill>
                   <a:srgbClr val="A95C66"/>
                 </a:solidFill>
@@ -11571,7 +11571,7 @@
               </a:lnSpc>
             </a:pPr>
             <a:r>
-              <a:rPr sz="1320" b="0" i="0">
+              <a:rPr sz="1220" b="0" i="0">
                 <a:solidFill>
                   <a:srgbClr val="4A403A"/>
                 </a:solidFill>
@@ -11654,7 +11654,7 @@
               </a:lnSpc>
             </a:pPr>
             <a:r>
-              <a:rPr sz="1320" b="0" i="0">
+              <a:rPr sz="1220" b="0" i="0">
                 <a:solidFill>
                   <a:srgbClr val="4A403A"/>
                 </a:solidFill>
@@ -11737,7 +11737,7 @@
               </a:lnSpc>
             </a:pPr>
             <a:r>
-              <a:rPr sz="1320" b="0" i="0">
+              <a:rPr sz="1220" b="0" i="0">
                 <a:solidFill>
                   <a:srgbClr val="4A403A"/>
                 </a:solidFill>
@@ -11820,7 +11820,7 @@
               </a:lnSpc>
             </a:pPr>
             <a:r>
-              <a:rPr sz="1320" b="0" i="0">
+              <a:rPr sz="1220" b="0" i="0">
                 <a:solidFill>
                   <a:srgbClr val="4A403A"/>
                 </a:solidFill>
@@ -11903,7 +11903,7 @@
               </a:lnSpc>
             </a:pPr>
             <a:r>
-              <a:rPr sz="1560" b="1" i="0">
+              <a:rPr sz="1460" b="1" i="0">
                 <a:solidFill>
                   <a:srgbClr val="5AA85A"/>
                 </a:solidFill>
@@ -11986,7 +11986,7 @@
               </a:lnSpc>
             </a:pPr>
             <a:r>
-              <a:rPr sz="1439" b="0" i="0">
+              <a:rPr sz="1339" b="0" i="0">
                 <a:solidFill>
                   <a:srgbClr val="8A7A6A"/>
                 </a:solidFill>
@@ -12002,7 +12002,7 @@
               </a:lnSpc>
             </a:pPr>
             <a:r>
-              <a:rPr sz="1439" b="0" i="0">
+              <a:rPr sz="1339" b="0" i="0">
                 <a:solidFill>
                   <a:srgbClr val="8A7A6A"/>
                 </a:solidFill>
@@ -12085,7 +12085,7 @@
               </a:lnSpc>
             </a:pPr>
             <a:r>
-              <a:rPr sz="1560" b="1" i="0">
+              <a:rPr sz="1460" b="1" i="0">
                 <a:solidFill>
                   <a:srgbClr val="5AA85A"/>
                 </a:solidFill>
@@ -12168,7 +12168,7 @@
               </a:lnSpc>
             </a:pPr>
             <a:r>
-              <a:rPr sz="1439" b="0" i="0">
+              <a:rPr sz="1339" b="0" i="0">
                 <a:solidFill>
                   <a:srgbClr val="8A7A6A"/>
                 </a:solidFill>
@@ -12251,7 +12251,7 @@
               </a:lnSpc>
             </a:pPr>
             <a:r>
-              <a:rPr sz="1320" b="1" i="0">
+              <a:rPr sz="1220" b="1" i="0">
                 <a:solidFill>
                   <a:srgbClr val="C9A96E"/>
                 </a:solidFill>
@@ -12290,7 +12290,7 @@
               </a:lnSpc>
             </a:pPr>
             <a:r>
-              <a:rPr sz="1320" b="0" i="0">
+              <a:rPr sz="1220" b="0" i="0">
                 <a:solidFill>
                   <a:srgbClr val="8A7A6A"/>
                 </a:solidFill>
@@ -12472,7 +12472,7 @@
               </a:lnSpc>
             </a:pPr>
             <a:r>
-              <a:rPr sz="1200" b="1" i="0">
+              <a:rPr sz="1100" b="1" i="0">
                 <a:solidFill>
                   <a:srgbClr val="C9A96E"/>
                 </a:solidFill>
@@ -12511,7 +12511,7 @@
               </a:lnSpc>
             </a:pPr>
             <a:r>
-              <a:rPr sz="2640" b="1" i="0">
+              <a:rPr sz="2540" b="1" i="0">
                 <a:solidFill>
                   <a:srgbClr val="4A403A"/>
                 </a:solidFill>
@@ -12550,7 +12550,7 @@
               </a:lnSpc>
             </a:pPr>
             <a:r>
-              <a:rPr sz="1080" b="0" i="0">
+              <a:rPr sz="979" b="0" i="0">
                 <a:solidFill>
                   <a:srgbClr val="8A7A6A"/>
                 </a:solidFill>
@@ -12633,7 +12633,7 @@
               </a:lnSpc>
             </a:pPr>
             <a:r>
-              <a:rPr sz="6240" b="1" i="0">
+              <a:rPr sz="6140" b="1" i="0">
                 <a:solidFill>
                   <a:srgbClr val="FFFFFF"/>
                 </a:solidFill>
@@ -12672,7 +12672,7 @@
               </a:lnSpc>
             </a:pPr>
             <a:r>
-              <a:rPr sz="2160" b="1" i="0">
+              <a:rPr sz="2059" b="1" i="0">
                 <a:solidFill>
                   <a:srgbClr val="FFFFFF"/>
                 </a:solidFill>
@@ -12711,7 +12711,7 @@
               </a:lnSpc>
             </a:pPr>
             <a:r>
-              <a:rPr sz="1439" b="1" i="0">
+              <a:rPr sz="1339" b="1" i="0">
                 <a:solidFill>
                   <a:srgbClr val="FFFFFF"/>
                 </a:solidFill>
@@ -12750,7 +12750,7 @@
               </a:lnSpc>
             </a:pPr>
             <a:r>
-              <a:rPr sz="1439" b="1" i="0">
+              <a:rPr sz="1339" b="1" i="0">
                 <a:solidFill>
                   <a:srgbClr val="A95C66"/>
                 </a:solidFill>
@@ -12833,7 +12833,7 @@
               </a:lnSpc>
             </a:pPr>
             <a:r>
-              <a:rPr sz="1200" b="0" i="0">
+              <a:rPr sz="1100" b="0" i="0">
                 <a:solidFill>
                   <a:srgbClr val="8A7A6A"/>
                 </a:solidFill>
@@ -12960,7 +12960,7 @@
               </a:lnSpc>
             </a:pPr>
             <a:r>
-              <a:rPr sz="1200" b="1" i="0">
+              <a:rPr sz="1100" b="1" i="0">
                 <a:solidFill>
                   <a:srgbClr val="8A7A6A"/>
                 </a:solidFill>
@@ -12999,7 +12999,7 @@
               </a:lnSpc>
             </a:pPr>
             <a:r>
-              <a:rPr sz="1200" b="0" i="0">
+              <a:rPr sz="1100" b="0" i="0">
                 <a:solidFill>
                   <a:srgbClr val="8A7A6A"/>
                 </a:solidFill>
@@ -13126,7 +13126,7 @@
               </a:lnSpc>
             </a:pPr>
             <a:r>
-              <a:rPr sz="1200" b="1" i="0">
+              <a:rPr sz="1100" b="1" i="0">
                 <a:solidFill>
                   <a:srgbClr val="8A7A6A"/>
                 </a:solidFill>
@@ -13165,7 +13165,7 @@
               </a:lnSpc>
             </a:pPr>
             <a:r>
-              <a:rPr sz="1200" b="0" i="0">
+              <a:rPr sz="1100" b="0" i="0">
                 <a:solidFill>
                   <a:srgbClr val="8A7A6A"/>
                 </a:solidFill>
@@ -13292,7 +13292,7 @@
               </a:lnSpc>
             </a:pPr>
             <a:r>
-              <a:rPr sz="1200" b="1" i="0">
+              <a:rPr sz="1100" b="1" i="0">
                 <a:solidFill>
                   <a:srgbClr val="8A7A6A"/>
                 </a:solidFill>
@@ -13331,7 +13331,7 @@
               </a:lnSpc>
             </a:pPr>
             <a:r>
-              <a:rPr sz="1200" b="0" i="0">
+              <a:rPr sz="1100" b="0" i="0">
                 <a:solidFill>
                   <a:srgbClr val="8A7A6A"/>
                 </a:solidFill>
@@ -13458,7 +13458,7 @@
               </a:lnSpc>
             </a:pPr>
             <a:r>
-              <a:rPr sz="1200" b="1" i="0">
+              <a:rPr sz="1100" b="1" i="0">
                 <a:solidFill>
                   <a:srgbClr val="8A7A6A"/>
                 </a:solidFill>
@@ -13497,7 +13497,7 @@
               </a:lnSpc>
             </a:pPr>
             <a:r>
-              <a:rPr sz="1200" b="0" i="0">
+              <a:rPr sz="1100" b="0" i="0">
                 <a:solidFill>
                   <a:srgbClr val="8A7A6A"/>
                 </a:solidFill>
@@ -13624,7 +13624,7 @@
               </a:lnSpc>
             </a:pPr>
             <a:r>
-              <a:rPr sz="1200" b="1" i="0">
+              <a:rPr sz="1100" b="1" i="0">
                 <a:solidFill>
                   <a:srgbClr val="8A7A6A"/>
                 </a:solidFill>
@@ -13663,7 +13663,7 @@
               </a:lnSpc>
             </a:pPr>
             <a:r>
-              <a:rPr sz="1439" b="1" i="0">
+              <a:rPr sz="1339" b="1" i="0">
                 <a:solidFill>
                   <a:srgbClr val="A95C66"/>
                 </a:solidFill>
@@ -13790,7 +13790,7 @@
               </a:lnSpc>
             </a:pPr>
             <a:r>
-              <a:rPr sz="1320" b="0" i="0">
+              <a:rPr sz="1220" b="0" i="0">
                 <a:solidFill>
                   <a:srgbClr val="4A403A"/>
                 </a:solidFill>
@@ -13873,7 +13873,7 @@
               </a:lnSpc>
             </a:pPr>
             <a:r>
-              <a:rPr sz="1320" b="0" i="0">
+              <a:rPr sz="1220" b="0" i="0">
                 <a:solidFill>
                   <a:srgbClr val="4A403A"/>
                 </a:solidFill>
@@ -13956,7 +13956,7 @@
               </a:lnSpc>
             </a:pPr>
             <a:r>
-              <a:rPr sz="1320" b="0" i="0">
+              <a:rPr sz="1220" b="0" i="0">
                 <a:solidFill>
                   <a:srgbClr val="4A403A"/>
                 </a:solidFill>
@@ -14039,7 +14039,7 @@
               </a:lnSpc>
             </a:pPr>
             <a:r>
-              <a:rPr sz="1320" b="0" i="0">
+              <a:rPr sz="1220" b="0" i="0">
                 <a:solidFill>
                   <a:srgbClr val="4A403A"/>
                 </a:solidFill>
@@ -14122,7 +14122,7 @@
               </a:lnSpc>
             </a:pPr>
             <a:r>
-              <a:rPr sz="1560" b="1" i="0">
+              <a:rPr sz="1460" b="1" i="0">
                 <a:solidFill>
                   <a:srgbClr val="4A7AC8"/>
                 </a:solidFill>
@@ -14205,7 +14205,7 @@
               </a:lnSpc>
             </a:pPr>
             <a:r>
-              <a:rPr sz="1439" b="0" i="0">
+              <a:rPr sz="1339" b="0" i="0">
                 <a:solidFill>
                   <a:srgbClr val="8A7A6A"/>
                 </a:solidFill>
@@ -14221,7 +14221,7 @@
               </a:lnSpc>
             </a:pPr>
             <a:r>
-              <a:rPr sz="1439" b="0" i="0">
+              <a:rPr sz="1339" b="0" i="0">
                 <a:solidFill>
                   <a:srgbClr val="8A7A6A"/>
                 </a:solidFill>
@@ -14304,7 +14304,7 @@
               </a:lnSpc>
             </a:pPr>
             <a:r>
-              <a:rPr sz="1560" b="1" i="0">
+              <a:rPr sz="1460" b="1" i="0">
                 <a:solidFill>
                   <a:srgbClr val="4A7AC8"/>
                 </a:solidFill>
@@ -14387,7 +14387,7 @@
               </a:lnSpc>
             </a:pPr>
             <a:r>
-              <a:rPr sz="1439" b="0" i="0">
+              <a:rPr sz="1339" b="0" i="0">
                 <a:solidFill>
                   <a:srgbClr val="8A7A6A"/>
                 </a:solidFill>
@@ -14470,7 +14470,7 @@
               </a:lnSpc>
             </a:pPr>
             <a:r>
-              <a:rPr sz="1320" b="1" i="0">
+              <a:rPr sz="1220" b="1" i="0">
                 <a:solidFill>
                   <a:srgbClr val="C9A96E"/>
                 </a:solidFill>
@@ -14509,7 +14509,7 @@
               </a:lnSpc>
             </a:pPr>
             <a:r>
-              <a:rPr sz="1320" b="0" i="0">
+              <a:rPr sz="1220" b="0" i="0">
                 <a:solidFill>
                   <a:srgbClr val="8A7A6A"/>
                 </a:solidFill>
@@ -14691,7 +14691,7 @@
               </a:lnSpc>
             </a:pPr>
             <a:r>
-              <a:rPr sz="1200" b="1" i="0">
+              <a:rPr sz="1100" b="1" i="0">
                 <a:solidFill>
                   <a:srgbClr val="C9A96E"/>
                 </a:solidFill>
@@ -14730,7 +14730,7 @@
               </a:lnSpc>
             </a:pPr>
             <a:r>
-              <a:rPr sz="2640" b="1" i="0">
+              <a:rPr sz="2540" b="1" i="0">
                 <a:solidFill>
                   <a:srgbClr val="4A403A"/>
                 </a:solidFill>
@@ -14769,7 +14769,7 @@
               </a:lnSpc>
             </a:pPr>
             <a:r>
-              <a:rPr sz="1080" b="0" i="0">
+              <a:rPr sz="979" b="0" i="0">
                 <a:solidFill>
                   <a:srgbClr val="8A7A6A"/>
                 </a:solidFill>
@@ -14852,7 +14852,7 @@
               </a:lnSpc>
             </a:pPr>
             <a:r>
-              <a:rPr sz="6240" b="1" i="0">
+              <a:rPr sz="6140" b="1" i="0">
                 <a:solidFill>
                   <a:srgbClr val="FFFFFF"/>
                 </a:solidFill>
@@ -14891,7 +14891,7 @@
               </a:lnSpc>
             </a:pPr>
             <a:r>
-              <a:rPr sz="2160" b="1" i="0">
+              <a:rPr sz="2059" b="1" i="0">
                 <a:solidFill>
                   <a:srgbClr val="FFFFFF"/>
                 </a:solidFill>
@@ -14930,7 +14930,7 @@
               </a:lnSpc>
             </a:pPr>
             <a:r>
-              <a:rPr sz="1439" b="1" i="0">
+              <a:rPr sz="1339" b="1" i="0">
                 <a:solidFill>
                   <a:srgbClr val="FFFFFF"/>
                 </a:solidFill>
@@ -14969,7 +14969,7 @@
               </a:lnSpc>
             </a:pPr>
             <a:r>
-              <a:rPr sz="1439" b="1" i="0">
+              <a:rPr sz="1339" b="1" i="0">
                 <a:solidFill>
                   <a:srgbClr val="A95C66"/>
                 </a:solidFill>
@@ -15052,7 +15052,7 @@
               </a:lnSpc>
             </a:pPr>
             <a:r>
-              <a:rPr sz="1200" b="0" i="0">
+              <a:rPr sz="1100" b="0" i="0">
                 <a:solidFill>
                   <a:srgbClr val="8A7A6A"/>
                 </a:solidFill>
@@ -15179,7 +15179,7 @@
               </a:lnSpc>
             </a:pPr>
             <a:r>
-              <a:rPr sz="1200" b="1" i="0">
+              <a:rPr sz="1100" b="1" i="0">
                 <a:solidFill>
                   <a:srgbClr val="8A7A6A"/>
                 </a:solidFill>
@@ -15218,7 +15218,7 @@
               </a:lnSpc>
             </a:pPr>
             <a:r>
-              <a:rPr sz="1200" b="0" i="0">
+              <a:rPr sz="1100" b="0" i="0">
                 <a:solidFill>
                   <a:srgbClr val="8A7A6A"/>
                 </a:solidFill>
@@ -15345,7 +15345,7 @@
               </a:lnSpc>
             </a:pPr>
             <a:r>
-              <a:rPr sz="1200" b="1" i="0">
+              <a:rPr sz="1100" b="1" i="0">
                 <a:solidFill>
                   <a:srgbClr val="8A7A6A"/>
                 </a:solidFill>
@@ -15384,7 +15384,7 @@
               </a:lnSpc>
             </a:pPr>
             <a:r>
-              <a:rPr sz="1200" b="0" i="0">
+              <a:rPr sz="1100" b="0" i="0">
                 <a:solidFill>
                   <a:srgbClr val="8A7A6A"/>
                 </a:solidFill>
@@ -15511,7 +15511,7 @@
               </a:lnSpc>
             </a:pPr>
             <a:r>
-              <a:rPr sz="1200" b="1" i="0">
+              <a:rPr sz="1100" b="1" i="0">
                 <a:solidFill>
                   <a:srgbClr val="8A7A6A"/>
                 </a:solidFill>
@@ -15550,7 +15550,7 @@
               </a:lnSpc>
             </a:pPr>
             <a:r>
-              <a:rPr sz="1200" b="0" i="0">
+              <a:rPr sz="1100" b="0" i="0">
                 <a:solidFill>
                   <a:srgbClr val="8A7A6A"/>
                 </a:solidFill>
@@ -15677,7 +15677,7 @@
               </a:lnSpc>
             </a:pPr>
             <a:r>
-              <a:rPr sz="1200" b="1" i="0">
+              <a:rPr sz="1100" b="1" i="0">
                 <a:solidFill>
                   <a:srgbClr val="8A7A6A"/>
                 </a:solidFill>
@@ -15716,7 +15716,7 @@
               </a:lnSpc>
             </a:pPr>
             <a:r>
-              <a:rPr sz="1200" b="0" i="0">
+              <a:rPr sz="1100" b="0" i="0">
                 <a:solidFill>
                   <a:srgbClr val="8A7A6A"/>
                 </a:solidFill>
@@ -15843,7 +15843,7 @@
               </a:lnSpc>
             </a:pPr>
             <a:r>
-              <a:rPr sz="1200" b="1" i="0">
+              <a:rPr sz="1100" b="1" i="0">
                 <a:solidFill>
                   <a:srgbClr val="8A7A6A"/>
                 </a:solidFill>
@@ -15882,7 +15882,7 @@
               </a:lnSpc>
             </a:pPr>
             <a:r>
-              <a:rPr sz="1439" b="1" i="0">
+              <a:rPr sz="1339" b="1" i="0">
                 <a:solidFill>
                   <a:srgbClr val="A95C66"/>
                 </a:solidFill>
@@ -16009,7 +16009,7 @@
               </a:lnSpc>
             </a:pPr>
             <a:r>
-              <a:rPr sz="1320" b="0" i="0">
+              <a:rPr sz="1220" b="0" i="0">
                 <a:solidFill>
                   <a:srgbClr val="4A403A"/>
                 </a:solidFill>
@@ -16092,7 +16092,7 @@
               </a:lnSpc>
             </a:pPr>
             <a:r>
-              <a:rPr sz="1320" b="0" i="0">
+              <a:rPr sz="1220" b="0" i="0">
                 <a:solidFill>
                   <a:srgbClr val="4A403A"/>
                 </a:solidFill>
@@ -16175,7 +16175,7 @@
               </a:lnSpc>
             </a:pPr>
             <a:r>
-              <a:rPr sz="1320" b="0" i="0">
+              <a:rPr sz="1220" b="0" i="0">
                 <a:solidFill>
                   <a:srgbClr val="4A403A"/>
                 </a:solidFill>
@@ -16258,7 +16258,7 @@
               </a:lnSpc>
             </a:pPr>
             <a:r>
-              <a:rPr sz="1320" b="0" i="0">
+              <a:rPr sz="1220" b="0" i="0">
                 <a:solidFill>
                   <a:srgbClr val="4A403A"/>
                 </a:solidFill>
@@ -16341,7 +16341,7 @@
               </a:lnSpc>
             </a:pPr>
             <a:r>
-              <a:rPr sz="1560" b="1" i="0">
+              <a:rPr sz="1460" b="1" i="0">
                 <a:solidFill>
                   <a:srgbClr val="9A5AB8"/>
                 </a:solidFill>
@@ -16424,7 +16424,7 @@
               </a:lnSpc>
             </a:pPr>
             <a:r>
-              <a:rPr sz="1439" b="0" i="0">
+              <a:rPr sz="1339" b="0" i="0">
                 <a:solidFill>
                   <a:srgbClr val="8A7A6A"/>
                 </a:solidFill>
@@ -16440,7 +16440,7 @@
               </a:lnSpc>
             </a:pPr>
             <a:r>
-              <a:rPr sz="1439" b="0" i="0">
+              <a:rPr sz="1339" b="0" i="0">
                 <a:solidFill>
                   <a:srgbClr val="8A7A6A"/>
                 </a:solidFill>
@@ -16523,7 +16523,7 @@
               </a:lnSpc>
             </a:pPr>
             <a:r>
-              <a:rPr sz="1560" b="1" i="0">
+              <a:rPr sz="1460" b="1" i="0">
                 <a:solidFill>
                   <a:srgbClr val="9A5AB8"/>
                 </a:solidFill>
@@ -16606,7 +16606,7 @@
               </a:lnSpc>
             </a:pPr>
             <a:r>
-              <a:rPr sz="1439" b="0" i="0">
+              <a:rPr sz="1339" b="0" i="0">
                 <a:solidFill>
                   <a:srgbClr val="8A7A6A"/>
                 </a:solidFill>
@@ -16689,7 +16689,7 @@
               </a:lnSpc>
             </a:pPr>
             <a:r>
-              <a:rPr sz="1320" b="1" i="0">
+              <a:rPr sz="1220" b="1" i="0">
                 <a:solidFill>
                   <a:srgbClr val="C9A96E"/>
                 </a:solidFill>
@@ -16728,7 +16728,7 @@
               </a:lnSpc>
             </a:pPr>
             <a:r>
-              <a:rPr sz="1320" b="0" i="0">
+              <a:rPr sz="1220" b="0" i="0">
                 <a:solidFill>
                   <a:srgbClr val="8A7A6A"/>
                 </a:solidFill>
@@ -16910,7 +16910,7 @@
               </a:lnSpc>
             </a:pPr>
             <a:r>
-              <a:rPr sz="1200" b="1" i="0">
+              <a:rPr sz="1100" b="1" i="0">
                 <a:solidFill>
                   <a:srgbClr val="C9A96E"/>
                 </a:solidFill>
@@ -16949,7 +16949,7 @@
               </a:lnSpc>
             </a:pPr>
             <a:r>
-              <a:rPr sz="2640" b="1" i="0">
+              <a:rPr sz="2540" b="1" i="0">
                 <a:solidFill>
                   <a:srgbClr val="4A403A"/>
                 </a:solidFill>
@@ -16988,7 +16988,7 @@
               </a:lnSpc>
             </a:pPr>
             <a:r>
-              <a:rPr sz="1080" b="0" i="0">
+              <a:rPr sz="979" b="0" i="0">
                 <a:solidFill>
                   <a:srgbClr val="8A7A6A"/>
                 </a:solidFill>
@@ -17071,7 +17071,7 @@
               </a:lnSpc>
             </a:pPr>
             <a:r>
-              <a:rPr sz="6240" b="1" i="0">
+              <a:rPr sz="6140" b="1" i="0">
                 <a:solidFill>
                   <a:srgbClr val="FFFFFF"/>
                 </a:solidFill>
@@ -17110,7 +17110,7 @@
               </a:lnSpc>
             </a:pPr>
             <a:r>
-              <a:rPr sz="2160" b="1" i="0">
+              <a:rPr sz="2059" b="1" i="0">
                 <a:solidFill>
                   <a:srgbClr val="FFFFFF"/>
                 </a:solidFill>
@@ -17149,7 +17149,7 @@
               </a:lnSpc>
             </a:pPr>
             <a:r>
-              <a:rPr sz="1439" b="1" i="0">
+              <a:rPr sz="1339" b="1" i="0">
                 <a:solidFill>
                   <a:srgbClr val="FFFFFF"/>
                 </a:solidFill>
@@ -17188,7 +17188,7 @@
               </a:lnSpc>
             </a:pPr>
             <a:r>
-              <a:rPr sz="1439" b="1" i="0">
+              <a:rPr sz="1339" b="1" i="0">
                 <a:solidFill>
                   <a:srgbClr val="A95C66"/>
                 </a:solidFill>
@@ -17271,7 +17271,7 @@
               </a:lnSpc>
             </a:pPr>
             <a:r>
-              <a:rPr sz="1200" b="0" i="0">
+              <a:rPr sz="1100" b="0" i="0">
                 <a:solidFill>
                   <a:srgbClr val="8A7A6A"/>
                 </a:solidFill>
@@ -17398,7 +17398,7 @@
               </a:lnSpc>
             </a:pPr>
             <a:r>
-              <a:rPr sz="1200" b="1" i="0">
+              <a:rPr sz="1100" b="1" i="0">
                 <a:solidFill>
                   <a:srgbClr val="8A7A6A"/>
                 </a:solidFill>
@@ -17437,7 +17437,7 @@
               </a:lnSpc>
             </a:pPr>
             <a:r>
-              <a:rPr sz="1200" b="0" i="0">
+              <a:rPr sz="1100" b="0" i="0">
                 <a:solidFill>
                   <a:srgbClr val="8A7A6A"/>
                 </a:solidFill>
@@ -17564,7 +17564,7 @@
               </a:lnSpc>
             </a:pPr>
             <a:r>
-              <a:rPr sz="1200" b="1" i="0">
+              <a:rPr sz="1100" b="1" i="0">
                 <a:solidFill>
                   <a:srgbClr val="8A7A6A"/>
                 </a:solidFill>
@@ -17603,7 +17603,7 @@
               </a:lnSpc>
             </a:pPr>
             <a:r>
-              <a:rPr sz="1200" b="0" i="0">
+              <a:rPr sz="1100" b="0" i="0">
                 <a:solidFill>
                   <a:srgbClr val="8A7A6A"/>
                 </a:solidFill>
@@ -17730,7 +17730,7 @@
               </a:lnSpc>
             </a:pPr>
             <a:r>
-              <a:rPr sz="1200" b="1" i="0">
+              <a:rPr sz="1100" b="1" i="0">
                 <a:solidFill>
                   <a:srgbClr val="8A7A6A"/>
                 </a:solidFill>
@@ -17769,7 +17769,7 @@
               </a:lnSpc>
             </a:pPr>
             <a:r>
-              <a:rPr sz="1200" b="0" i="0">
+              <a:rPr sz="1100" b="0" i="0">
                 <a:solidFill>
                   <a:srgbClr val="8A7A6A"/>
                 </a:solidFill>
@@ -17896,7 +17896,7 @@
               </a:lnSpc>
             </a:pPr>
             <a:r>
-              <a:rPr sz="1200" b="1" i="0">
+              <a:rPr sz="1100" b="1" i="0">
                 <a:solidFill>
                   <a:srgbClr val="8A7A6A"/>
                 </a:solidFill>
@@ -17935,7 +17935,7 @@
               </a:lnSpc>
             </a:pPr>
             <a:r>
-              <a:rPr sz="1200" b="0" i="0">
+              <a:rPr sz="1100" b="0" i="0">
                 <a:solidFill>
                   <a:srgbClr val="8A7A6A"/>
                 </a:solidFill>
@@ -18062,7 +18062,7 @@
               </a:lnSpc>
             </a:pPr>
             <a:r>
-              <a:rPr sz="1200" b="1" i="0">
+              <a:rPr sz="1100" b="1" i="0">
                 <a:solidFill>
                   <a:srgbClr val="8A7A6A"/>
                 </a:solidFill>
@@ -18101,7 +18101,7 @@
               </a:lnSpc>
             </a:pPr>
             <a:r>
-              <a:rPr sz="1439" b="1" i="0">
+              <a:rPr sz="1339" b="1" i="0">
                 <a:solidFill>
                   <a:srgbClr val="A95C66"/>
                 </a:solidFill>
@@ -18228,7 +18228,7 @@
               </a:lnSpc>
             </a:pPr>
             <a:r>
-              <a:rPr sz="1320" b="0" i="0">
+              <a:rPr sz="1220" b="0" i="0">
                 <a:solidFill>
                   <a:srgbClr val="4A403A"/>
                 </a:solidFill>
@@ -18311,7 +18311,7 @@
               </a:lnSpc>
             </a:pPr>
             <a:r>
-              <a:rPr sz="1320" b="0" i="0">
+              <a:rPr sz="1220" b="0" i="0">
                 <a:solidFill>
                   <a:srgbClr val="4A403A"/>
                 </a:solidFill>
@@ -18394,7 +18394,7 @@
               </a:lnSpc>
             </a:pPr>
             <a:r>
-              <a:rPr sz="1320" b="0" i="0">
+              <a:rPr sz="1220" b="0" i="0">
                 <a:solidFill>
                   <a:srgbClr val="4A403A"/>
                 </a:solidFill>
@@ -18477,7 +18477,7 @@
               </a:lnSpc>
             </a:pPr>
             <a:r>
-              <a:rPr sz="1320" b="0" i="0">
+              <a:rPr sz="1220" b="0" i="0">
                 <a:solidFill>
                   <a:srgbClr val="4A403A"/>
                 </a:solidFill>
@@ -18560,7 +18560,7 @@
               </a:lnSpc>
             </a:pPr>
             <a:r>
-              <a:rPr sz="1560" b="1" i="0">
+              <a:rPr sz="1460" b="1" i="0">
                 <a:solidFill>
                   <a:srgbClr val="E6A9C0"/>
                 </a:solidFill>
@@ -18643,7 +18643,7 @@
               </a:lnSpc>
             </a:pPr>
             <a:r>
-              <a:rPr sz="1439" b="0" i="0">
+              <a:rPr sz="1339" b="0" i="0">
                 <a:solidFill>
                   <a:srgbClr val="8A7A6A"/>
                 </a:solidFill>
@@ -18659,7 +18659,7 @@
               </a:lnSpc>
             </a:pPr>
             <a:r>
-              <a:rPr sz="1439" b="0" i="0">
+              <a:rPr sz="1339" b="0" i="0">
                 <a:solidFill>
                   <a:srgbClr val="8A7A6A"/>
                 </a:solidFill>
@@ -18742,7 +18742,7 @@
               </a:lnSpc>
             </a:pPr>
             <a:r>
-              <a:rPr sz="1560" b="1" i="0">
+              <a:rPr sz="1460" b="1" i="0">
                 <a:solidFill>
                   <a:srgbClr val="E6A9C0"/>
                 </a:solidFill>
@@ -18825,7 +18825,7 @@
               </a:lnSpc>
             </a:pPr>
             <a:r>
-              <a:rPr sz="1439" b="0" i="0">
+              <a:rPr sz="1339" b="0" i="0">
                 <a:solidFill>
                   <a:srgbClr val="8A7A6A"/>
                 </a:solidFill>
@@ -18908,7 +18908,7 @@
               </a:lnSpc>
             </a:pPr>
             <a:r>
-              <a:rPr sz="1320" b="1" i="0">
+              <a:rPr sz="1220" b="1" i="0">
                 <a:solidFill>
                   <a:srgbClr val="C9A96E"/>
                 </a:solidFill>
@@ -18947,7 +18947,7 @@
               </a:lnSpc>
             </a:pPr>
             <a:r>
-              <a:rPr sz="1320" b="0" i="0">
+              <a:rPr sz="1220" b="0" i="0">
                 <a:solidFill>
                   <a:srgbClr val="8A7A6A"/>
                 </a:solidFill>
@@ -19129,7 +19129,7 @@
               </a:lnSpc>
             </a:pPr>
             <a:r>
-              <a:rPr sz="1200" b="1" i="0">
+              <a:rPr sz="1100" b="1" i="0">
                 <a:solidFill>
                   <a:srgbClr val="C9A96E"/>
                 </a:solidFill>
@@ -19168,7 +19168,7 @@
               </a:lnSpc>
             </a:pPr>
             <a:r>
-              <a:rPr sz="2640" b="1" i="0">
+              <a:rPr sz="2540" b="1" i="0">
                 <a:solidFill>
                   <a:srgbClr val="4A403A"/>
                 </a:solidFill>
@@ -19207,7 +19207,7 @@
               </a:lnSpc>
             </a:pPr>
             <a:r>
-              <a:rPr sz="1080" b="0" i="0">
+              <a:rPr sz="979" b="0" i="0">
                 <a:solidFill>
                   <a:srgbClr val="8A7A6A"/>
                 </a:solidFill>
@@ -19290,7 +19290,7 @@
               </a:lnSpc>
             </a:pPr>
             <a:r>
-              <a:rPr sz="6240" b="1" i="0">
+              <a:rPr sz="6140" b="1" i="0">
                 <a:solidFill>
                   <a:srgbClr val="FFFFFF"/>
                 </a:solidFill>
@@ -19329,7 +19329,7 @@
               </a:lnSpc>
             </a:pPr>
             <a:r>
-              <a:rPr sz="2160" b="1" i="0">
+              <a:rPr sz="2059" b="1" i="0">
                 <a:solidFill>
                   <a:srgbClr val="FFFFFF"/>
                 </a:solidFill>
@@ -19368,7 +19368,7 @@
               </a:lnSpc>
             </a:pPr>
             <a:r>
-              <a:rPr sz="1439" b="1" i="0">
+              <a:rPr sz="1339" b="1" i="0">
                 <a:solidFill>
                   <a:srgbClr val="FFFFFF"/>
                 </a:solidFill>
@@ -19407,7 +19407,7 @@
               </a:lnSpc>
             </a:pPr>
             <a:r>
-              <a:rPr sz="1439" b="1" i="0">
+              <a:rPr sz="1339" b="1" i="0">
                 <a:solidFill>
                   <a:srgbClr val="A95C66"/>
                 </a:solidFill>
@@ -19490,7 +19490,7 @@
               </a:lnSpc>
             </a:pPr>
             <a:r>
-              <a:rPr sz="1200" b="0" i="0">
+              <a:rPr sz="1100" b="0" i="0">
                 <a:solidFill>
                   <a:srgbClr val="8A7A6A"/>
                 </a:solidFill>
@@ -19617,7 +19617,7 @@
               </a:lnSpc>
             </a:pPr>
             <a:r>
-              <a:rPr sz="1200" b="1" i="0">
+              <a:rPr sz="1100" b="1" i="0">
                 <a:solidFill>
                   <a:srgbClr val="8A7A6A"/>
                 </a:solidFill>
@@ -19656,7 +19656,7 @@
               </a:lnSpc>
             </a:pPr>
             <a:r>
-              <a:rPr sz="1200" b="0" i="0">
+              <a:rPr sz="1100" b="0" i="0">
                 <a:solidFill>
                   <a:srgbClr val="8A7A6A"/>
                 </a:solidFill>
@@ -19783,7 +19783,7 @@
               </a:lnSpc>
             </a:pPr>
             <a:r>
-              <a:rPr sz="1200" b="1" i="0">
+              <a:rPr sz="1100" b="1" i="0">
                 <a:solidFill>
                   <a:srgbClr val="8A7A6A"/>
                 </a:solidFill>
@@ -19822,7 +19822,7 @@
               </a:lnSpc>
             </a:pPr>
             <a:r>
-              <a:rPr sz="1200" b="0" i="0">
+              <a:rPr sz="1100" b="0" i="0">
                 <a:solidFill>
                   <a:srgbClr val="8A7A6A"/>
                 </a:solidFill>
@@ -19949,7 +19949,7 @@
               </a:lnSpc>
             </a:pPr>
             <a:r>
-              <a:rPr sz="1200" b="1" i="0">
+              <a:rPr sz="1100" b="1" i="0">
                 <a:solidFill>
                   <a:srgbClr val="8A7A6A"/>
                 </a:solidFill>
@@ -19988,7 +19988,7 @@
               </a:lnSpc>
             </a:pPr>
             <a:r>
-              <a:rPr sz="1200" b="0" i="0">
+              <a:rPr sz="1100" b="0" i="0">
                 <a:solidFill>
                   <a:srgbClr val="8A7A6A"/>
                 </a:solidFill>
@@ -20115,7 +20115,7 @@
               </a:lnSpc>
             </a:pPr>
             <a:r>
-              <a:rPr sz="1200" b="1" i="0">
+              <a:rPr sz="1100" b="1" i="0">
                 <a:solidFill>
                   <a:srgbClr val="8A7A6A"/>
                 </a:solidFill>
@@ -20154,7 +20154,7 @@
               </a:lnSpc>
             </a:pPr>
             <a:r>
-              <a:rPr sz="1200" b="0" i="0">
+              <a:rPr sz="1100" b="0" i="0">
                 <a:solidFill>
                   <a:srgbClr val="8A7A6A"/>
                 </a:solidFill>
@@ -20281,7 +20281,7 @@
               </a:lnSpc>
             </a:pPr>
             <a:r>
-              <a:rPr sz="1200" b="1" i="0">
+              <a:rPr sz="1100" b="1" i="0">
                 <a:solidFill>
                   <a:srgbClr val="8A7A6A"/>
                 </a:solidFill>
@@ -20320,7 +20320,7 @@
               </a:lnSpc>
             </a:pPr>
             <a:r>
-              <a:rPr sz="1439" b="1" i="0">
+              <a:rPr sz="1339" b="1" i="0">
                 <a:solidFill>
                   <a:srgbClr val="A95C66"/>
                 </a:solidFill>
@@ -20447,7 +20447,7 @@
               </a:lnSpc>
             </a:pPr>
             <a:r>
-              <a:rPr sz="1320" b="0" i="0">
+              <a:rPr sz="1220" b="0" i="0">
                 <a:solidFill>
                   <a:srgbClr val="4A403A"/>
                 </a:solidFill>
@@ -20530,7 +20530,7 @@
               </a:lnSpc>
             </a:pPr>
             <a:r>
-              <a:rPr sz="1320" b="0" i="0">
+              <a:rPr sz="1220" b="0" i="0">
                 <a:solidFill>
                   <a:srgbClr val="4A403A"/>
                 </a:solidFill>
@@ -20613,7 +20613,7 @@
               </a:lnSpc>
             </a:pPr>
             <a:r>
-              <a:rPr sz="1320" b="0" i="0">
+              <a:rPr sz="1220" b="0" i="0">
                 <a:solidFill>
                   <a:srgbClr val="4A403A"/>
                 </a:solidFill>
@@ -20696,7 +20696,7 @@
               </a:lnSpc>
             </a:pPr>
             <a:r>
-              <a:rPr sz="1320" b="0" i="0">
+              <a:rPr sz="1220" b="0" i="0">
                 <a:solidFill>
                   <a:srgbClr val="4A403A"/>
                 </a:solidFill>
@@ -20779,7 +20779,7 @@
               </a:lnSpc>
             </a:pPr>
             <a:r>
-              <a:rPr sz="1560" b="1" i="0">
+              <a:rPr sz="1460" b="1" i="0">
                 <a:solidFill>
                   <a:srgbClr val="8A7A6A"/>
                 </a:solidFill>
@@ -20862,7 +20862,7 @@
               </a:lnSpc>
             </a:pPr>
             <a:r>
-              <a:rPr sz="1439" b="0" i="0">
+              <a:rPr sz="1339" b="0" i="0">
                 <a:solidFill>
                   <a:srgbClr val="8A7A6A"/>
                 </a:solidFill>
@@ -20878,7 +20878,7 @@
               </a:lnSpc>
             </a:pPr>
             <a:r>
-              <a:rPr sz="1439" b="0" i="0">
+              <a:rPr sz="1339" b="0" i="0">
                 <a:solidFill>
                   <a:srgbClr val="8A7A6A"/>
                 </a:solidFill>
@@ -20961,7 +20961,7 @@
               </a:lnSpc>
             </a:pPr>
             <a:r>
-              <a:rPr sz="1560" b="1" i="0">
+              <a:rPr sz="1460" b="1" i="0">
                 <a:solidFill>
                   <a:srgbClr val="8A7A6A"/>
                 </a:solidFill>
@@ -21044,7 +21044,7 @@
               </a:lnSpc>
             </a:pPr>
             <a:r>
-              <a:rPr sz="1439" b="0" i="0">
+              <a:rPr sz="1339" b="0" i="0">
                 <a:solidFill>
                   <a:srgbClr val="8A7A6A"/>
                 </a:solidFill>
@@ -21127,7 +21127,7 @@
               </a:lnSpc>
             </a:pPr>
             <a:r>
-              <a:rPr sz="1320" b="1" i="0">
+              <a:rPr sz="1220" b="1" i="0">
                 <a:solidFill>
                   <a:srgbClr val="C9A96E"/>
                 </a:solidFill>
@@ -21166,7 +21166,7 @@
               </a:lnSpc>
             </a:pPr>
             <a:r>
-              <a:rPr sz="1320" b="0" i="0">
+              <a:rPr sz="1220" b="0" i="0">
                 <a:solidFill>
                   <a:srgbClr val="8A7A6A"/>
                 </a:solidFill>
@@ -21348,7 +21348,7 @@
               </a:lnSpc>
             </a:pPr>
             <a:r>
-              <a:rPr sz="1200" b="1" i="0">
+              <a:rPr sz="1100" b="1" i="0">
                 <a:solidFill>
                   <a:srgbClr val="C9A96E"/>
                 </a:solidFill>
@@ -21387,7 +21387,7 @@
               </a:lnSpc>
             </a:pPr>
             <a:r>
-              <a:rPr sz="2640" b="1" i="0">
+              <a:rPr sz="2540" b="1" i="0">
                 <a:solidFill>
                   <a:srgbClr val="4A403A"/>
                 </a:solidFill>
@@ -21426,7 +21426,7 @@
               </a:lnSpc>
             </a:pPr>
             <a:r>
-              <a:rPr sz="1080" b="0" i="0">
+              <a:rPr sz="979" b="0" i="0">
                 <a:solidFill>
                   <a:srgbClr val="8A7A6A"/>
                 </a:solidFill>
@@ -21465,7 +21465,7 @@
               </a:lnSpc>
             </a:pPr>
             <a:r>
-              <a:rPr sz="1500" b="0" i="0">
+              <a:rPr sz="1400" b="0" i="0">
                 <a:solidFill>
                   <a:srgbClr val="8A7A6A"/>
                 </a:solidFill>
@@ -21548,7 +21548,7 @@
               </a:lnSpc>
             </a:pPr>
             <a:r>
-              <a:rPr sz="1560" b="1" i="0">
+              <a:rPr sz="1460" b="1" i="0">
                 <a:solidFill>
                   <a:srgbClr val="A95C66"/>
                 </a:solidFill>
@@ -21587,7 +21587,7 @@
               </a:lnSpc>
             </a:pPr>
             <a:r>
-              <a:rPr sz="1380" b="0" i="0">
+              <a:rPr sz="1280" b="0" i="0">
                 <a:solidFill>
                   <a:srgbClr val="8A7A6A"/>
                 </a:solidFill>
@@ -21670,7 +21670,7 @@
               </a:lnSpc>
             </a:pPr>
             <a:r>
-              <a:rPr sz="1560" b="1" i="0">
+              <a:rPr sz="1460" b="1" i="0">
                 <a:solidFill>
                   <a:srgbClr val="A95C66"/>
                 </a:solidFill>
@@ -21709,7 +21709,7 @@
               </a:lnSpc>
             </a:pPr>
             <a:r>
-              <a:rPr sz="1380" b="0" i="0">
+              <a:rPr sz="1280" b="0" i="0">
                 <a:solidFill>
                   <a:srgbClr val="8A7A6A"/>
                 </a:solidFill>
@@ -21792,7 +21792,7 @@
               </a:lnSpc>
             </a:pPr>
             <a:r>
-              <a:rPr sz="1560" b="1" i="0">
+              <a:rPr sz="1460" b="1" i="0">
                 <a:solidFill>
                   <a:srgbClr val="A95C66"/>
                 </a:solidFill>
@@ -21831,7 +21831,7 @@
               </a:lnSpc>
             </a:pPr>
             <a:r>
-              <a:rPr sz="1380" b="0" i="0">
+              <a:rPr sz="1280" b="0" i="0">
                 <a:solidFill>
                   <a:srgbClr val="8A7A6A"/>
                 </a:solidFill>
@@ -21870,7 +21870,7 @@
               </a:lnSpc>
             </a:pPr>
             <a:r>
-              <a:rPr sz="1920" b="1" i="0">
+              <a:rPr sz="1820" b="1" i="0">
                 <a:solidFill>
                   <a:srgbClr val="A95C66"/>
                 </a:solidFill>
@@ -22043,7 +22043,7 @@
               </a:lnSpc>
             </a:pPr>
             <a:r>
-              <a:rPr sz="1620" b="1" i="0">
+              <a:rPr sz="1520" b="1" i="0">
                 <a:solidFill>
                   <a:srgbClr val="A95C66"/>
                 </a:solidFill>
@@ -22082,7 +22082,7 @@
               </a:lnSpc>
             </a:pPr>
             <a:r>
-              <a:rPr sz="1500" b="0" i="0">
+              <a:rPr sz="1400" b="0" i="0">
                 <a:solidFill>
                   <a:srgbClr val="8A7A6A"/>
                 </a:solidFill>
@@ -22211,7 +22211,7 @@
               </a:lnSpc>
             </a:pPr>
             <a:r>
-              <a:rPr sz="1620" b="1" i="0">
+              <a:rPr sz="1520" b="1" i="0">
                 <a:solidFill>
                   <a:srgbClr val="A95C66"/>
                 </a:solidFill>
@@ -22250,7 +22250,7 @@
               </a:lnSpc>
             </a:pPr>
             <a:r>
-              <a:rPr sz="1500" b="0" i="0">
+              <a:rPr sz="1400" b="0" i="0">
                 <a:solidFill>
                   <a:srgbClr val="8A7A6A"/>
                 </a:solidFill>
@@ -22379,7 +22379,7 @@
               </a:lnSpc>
             </a:pPr>
             <a:r>
-              <a:rPr sz="1620" b="1" i="0">
+              <a:rPr sz="1520" b="1" i="0">
                 <a:solidFill>
                   <a:srgbClr val="A95C66"/>
                 </a:solidFill>
@@ -22418,7 +22418,7 @@
               </a:lnSpc>
             </a:pPr>
             <a:r>
-              <a:rPr sz="1500" b="0" i="0">
+              <a:rPr sz="1400" b="0" i="0">
                 <a:solidFill>
                   <a:srgbClr val="8A7A6A"/>
                 </a:solidFill>
@@ -22547,7 +22547,7 @@
               </a:lnSpc>
             </a:pPr>
             <a:r>
-              <a:rPr sz="1620" b="1" i="0">
+              <a:rPr sz="1520" b="1" i="0">
                 <a:solidFill>
                   <a:srgbClr val="A95C66"/>
                 </a:solidFill>
@@ -22586,7 +22586,7 @@
               </a:lnSpc>
             </a:pPr>
             <a:r>
-              <a:rPr sz="1500" b="0" i="0">
+              <a:rPr sz="1400" b="0" i="0">
                 <a:solidFill>
                   <a:srgbClr val="8A7A6A"/>
                 </a:solidFill>
@@ -22768,7 +22768,7 @@
               </a:lnSpc>
             </a:pPr>
             <a:r>
-              <a:rPr sz="1200" b="1" i="0">
+              <a:rPr sz="1100" b="1" i="0">
                 <a:solidFill>
                   <a:srgbClr val="C9A96E"/>
                 </a:solidFill>
@@ -22807,7 +22807,7 @@
               </a:lnSpc>
             </a:pPr>
             <a:r>
-              <a:rPr sz="2640" b="1" i="0">
+              <a:rPr sz="2540" b="1" i="0">
                 <a:solidFill>
                   <a:srgbClr val="4A403A"/>
                 </a:solidFill>
@@ -22846,7 +22846,7 @@
               </a:lnSpc>
             </a:pPr>
             <a:r>
-              <a:rPr sz="1080" b="0" i="0">
+              <a:rPr sz="979" b="0" i="0">
                 <a:solidFill>
                   <a:srgbClr val="8A7A6A"/>
                 </a:solidFill>
@@ -22885,7 +22885,7 @@
               </a:lnSpc>
             </a:pPr>
             <a:r>
-              <a:rPr sz="1439" b="0" i="0">
+              <a:rPr sz="1339" b="0" i="0">
                 <a:solidFill>
                   <a:srgbClr val="8A7A6A"/>
                 </a:solidFill>
@@ -22952,7 +22952,7 @@
               </a:lnSpc>
             </a:pPr>
             <a:r>
-              <a:rPr sz="1560" b="1" i="0">
+              <a:rPr sz="1460" b="1" i="0">
                 <a:solidFill>
                   <a:srgbClr val="A95C66"/>
                 </a:solidFill>
@@ -22991,7 +22991,7 @@
               </a:lnSpc>
             </a:pPr>
             <a:r>
-              <a:rPr sz="1140" b="0" i="0">
+              <a:rPr sz="1040" b="0" i="0">
                 <a:solidFill>
                   <a:srgbClr val="8A7A6A"/>
                 </a:solidFill>
@@ -23058,7 +23058,7 @@
               </a:lnSpc>
             </a:pPr>
             <a:r>
-              <a:rPr sz="1560" b="1" i="0">
+              <a:rPr sz="1460" b="1" i="0">
                 <a:solidFill>
                   <a:srgbClr val="A95C66"/>
                 </a:solidFill>
@@ -23097,7 +23097,7 @@
               </a:lnSpc>
             </a:pPr>
             <a:r>
-              <a:rPr sz="1140" b="0" i="0">
+              <a:rPr sz="1040" b="0" i="0">
                 <a:solidFill>
                   <a:srgbClr val="8A7A6A"/>
                 </a:solidFill>
@@ -23164,7 +23164,7 @@
               </a:lnSpc>
             </a:pPr>
             <a:r>
-              <a:rPr sz="1560" b="1" i="0">
+              <a:rPr sz="1460" b="1" i="0">
                 <a:solidFill>
                   <a:srgbClr val="A95C66"/>
                 </a:solidFill>
@@ -23203,7 +23203,7 @@
               </a:lnSpc>
             </a:pPr>
             <a:r>
-              <a:rPr sz="1140" b="0" i="0">
+              <a:rPr sz="1040" b="0" i="0">
                 <a:solidFill>
                   <a:srgbClr val="8A7A6A"/>
                 </a:solidFill>
@@ -23270,7 +23270,7 @@
               </a:lnSpc>
             </a:pPr>
             <a:r>
-              <a:rPr sz="1560" b="1" i="0">
+              <a:rPr sz="1460" b="1" i="0">
                 <a:solidFill>
                   <a:srgbClr val="A95C66"/>
                 </a:solidFill>
@@ -23309,7 +23309,7 @@
               </a:lnSpc>
             </a:pPr>
             <a:r>
-              <a:rPr sz="1140" b="0" i="0">
+              <a:rPr sz="1040" b="0" i="0">
                 <a:solidFill>
                   <a:srgbClr val="8A7A6A"/>
                 </a:solidFill>
@@ -23348,7 +23348,7 @@
               </a:lnSpc>
             </a:pPr>
             <a:r>
-              <a:rPr sz="1500" b="0" i="0">
+              <a:rPr sz="1400" b="0" i="0">
                 <a:solidFill>
                   <a:srgbClr val="4A403A"/>
                 </a:solidFill>
@@ -23364,7 +23364,7 @@
               </a:lnSpc>
             </a:pPr>
             <a:r>
-              <a:rPr sz="1500" b="0" i="0">
+              <a:rPr sz="1400" b="0" i="0">
                 <a:solidFill>
                   <a:srgbClr val="4A403A"/>
                 </a:solidFill>
@@ -23380,7 +23380,7 @@
               </a:lnSpc>
             </a:pPr>
             <a:r>
-              <a:rPr sz="1500" b="0" i="0">
+              <a:rPr sz="1400" b="0" i="0">
                 <a:solidFill>
                   <a:srgbClr val="4A403A"/>
                 </a:solidFill>
@@ -23562,7 +23562,7 @@
               </a:lnSpc>
             </a:pPr>
             <a:r>
-              <a:rPr sz="1200" b="1" i="0">
+              <a:rPr sz="1100" b="1" i="0">
                 <a:solidFill>
                   <a:srgbClr val="C9A96E"/>
                 </a:solidFill>
@@ -23601,7 +23601,7 @@
               </a:lnSpc>
             </a:pPr>
             <a:r>
-              <a:rPr sz="2640" b="1" i="0">
+              <a:rPr sz="2540" b="1" i="0">
                 <a:solidFill>
                   <a:srgbClr val="4A403A"/>
                 </a:solidFill>
@@ -23640,7 +23640,7 @@
               </a:lnSpc>
             </a:pPr>
             <a:r>
-              <a:rPr sz="1080" b="0" i="0">
+              <a:rPr sz="979" b="0" i="0">
                 <a:solidFill>
                   <a:srgbClr val="8A7A6A"/>
                 </a:solidFill>
@@ -23813,7 +23813,7 @@
               </a:lnSpc>
             </a:pPr>
             <a:r>
-              <a:rPr sz="1560" b="1" i="0">
+              <a:rPr sz="1460" b="1" i="0">
                 <a:solidFill>
                   <a:srgbClr val="A95C66"/>
                 </a:solidFill>
@@ -23852,7 +23852,7 @@
               </a:lnSpc>
             </a:pPr>
             <a:r>
-              <a:rPr sz="1620" b="1" i="0">
+              <a:rPr sz="1520" b="1" i="0">
                 <a:solidFill>
                   <a:srgbClr val="A95C66"/>
                 </a:solidFill>
@@ -23891,7 +23891,7 @@
               </a:lnSpc>
             </a:pPr>
             <a:r>
-              <a:rPr sz="1439" b="0" i="0">
+              <a:rPr sz="1339" b="0" i="0">
                 <a:solidFill>
                   <a:srgbClr val="8A7A6A"/>
                 </a:solidFill>
@@ -24064,7 +24064,7 @@
               </a:lnSpc>
             </a:pPr>
             <a:r>
-              <a:rPr sz="1560" b="1" i="0">
+              <a:rPr sz="1460" b="1" i="0">
                 <a:solidFill>
                   <a:srgbClr val="A95C66"/>
                 </a:solidFill>
@@ -24103,7 +24103,7 @@
               </a:lnSpc>
             </a:pPr>
             <a:r>
-              <a:rPr sz="1620" b="1" i="0">
+              <a:rPr sz="1520" b="1" i="0">
                 <a:solidFill>
                   <a:srgbClr val="A95C66"/>
                 </a:solidFill>
@@ -24142,7 +24142,7 @@
               </a:lnSpc>
             </a:pPr>
             <a:r>
-              <a:rPr sz="1439" b="0" i="0">
+              <a:rPr sz="1339" b="0" i="0">
                 <a:solidFill>
                   <a:srgbClr val="8A7A6A"/>
                 </a:solidFill>
@@ -24315,7 +24315,7 @@
               </a:lnSpc>
             </a:pPr>
             <a:r>
-              <a:rPr sz="1560" b="1" i="0">
+              <a:rPr sz="1460" b="1" i="0">
                 <a:solidFill>
                   <a:srgbClr val="A95C66"/>
                 </a:solidFill>
@@ -24354,7 +24354,7 @@
               </a:lnSpc>
             </a:pPr>
             <a:r>
-              <a:rPr sz="1620" b="1" i="0">
+              <a:rPr sz="1520" b="1" i="0">
                 <a:solidFill>
                   <a:srgbClr val="A95C66"/>
                 </a:solidFill>
@@ -24393,7 +24393,7 @@
               </a:lnSpc>
             </a:pPr>
             <a:r>
-              <a:rPr sz="1439" b="0" i="0">
+              <a:rPr sz="1339" b="0" i="0">
                 <a:solidFill>
                   <a:srgbClr val="8A7A6A"/>
                 </a:solidFill>
@@ -24566,7 +24566,7 @@
               </a:lnSpc>
             </a:pPr>
             <a:r>
-              <a:rPr sz="1560" b="1" i="0">
+              <a:rPr sz="1460" b="1" i="0">
                 <a:solidFill>
                   <a:srgbClr val="A95C66"/>
                 </a:solidFill>
@@ -24605,7 +24605,7 @@
               </a:lnSpc>
             </a:pPr>
             <a:r>
-              <a:rPr sz="1620" b="1" i="0">
+              <a:rPr sz="1520" b="1" i="0">
                 <a:solidFill>
                   <a:srgbClr val="A95C66"/>
                 </a:solidFill>
@@ -24644,7 +24644,7 @@
               </a:lnSpc>
             </a:pPr>
             <a:r>
-              <a:rPr sz="1439" b="0" i="0">
+              <a:rPr sz="1339" b="0" i="0">
                 <a:solidFill>
                   <a:srgbClr val="8A7A6A"/>
                 </a:solidFill>
@@ -24817,7 +24817,7 @@
               </a:lnSpc>
             </a:pPr>
             <a:r>
-              <a:rPr sz="1560" b="1" i="0">
+              <a:rPr sz="1460" b="1" i="0">
                 <a:solidFill>
                   <a:srgbClr val="A95C66"/>
                 </a:solidFill>
@@ -24856,7 +24856,7 @@
               </a:lnSpc>
             </a:pPr>
             <a:r>
-              <a:rPr sz="1620" b="1" i="0">
+              <a:rPr sz="1520" b="1" i="0">
                 <a:solidFill>
                   <a:srgbClr val="A95C66"/>
                 </a:solidFill>
@@ -24895,7 +24895,7 @@
               </a:lnSpc>
             </a:pPr>
             <a:r>
-              <a:rPr sz="1439" b="0" i="0">
+              <a:rPr sz="1339" b="0" i="0">
                 <a:solidFill>
                   <a:srgbClr val="8A7A6A"/>
                 </a:solidFill>
@@ -25068,7 +25068,7 @@
               </a:lnSpc>
             </a:pPr>
             <a:r>
-              <a:rPr sz="1560" b="1" i="0">
+              <a:rPr sz="1460" b="1" i="0">
                 <a:solidFill>
                   <a:srgbClr val="A95C66"/>
                 </a:solidFill>
@@ -25107,7 +25107,7 @@
               </a:lnSpc>
             </a:pPr>
             <a:r>
-              <a:rPr sz="1620" b="1" i="0">
+              <a:rPr sz="1520" b="1" i="0">
                 <a:solidFill>
                   <a:srgbClr val="A95C66"/>
                 </a:solidFill>
@@ -25146,7 +25146,7 @@
               </a:lnSpc>
             </a:pPr>
             <a:r>
-              <a:rPr sz="1439" b="0" i="0">
+              <a:rPr sz="1339" b="0" i="0">
                 <a:solidFill>
                   <a:srgbClr val="8A7A6A"/>
                 </a:solidFill>
@@ -25328,7 +25328,7 @@
               </a:lnSpc>
             </a:pPr>
             <a:r>
-              <a:rPr sz="1200" b="1" i="0">
+              <a:rPr sz="1100" b="1" i="0">
                 <a:solidFill>
                   <a:srgbClr val="C9A96E"/>
                 </a:solidFill>
@@ -25367,7 +25367,7 @@
               </a:lnSpc>
             </a:pPr>
             <a:r>
-              <a:rPr sz="2640" b="1" i="0">
+              <a:rPr sz="2540" b="1" i="0">
                 <a:solidFill>
                   <a:srgbClr val="4A403A"/>
                 </a:solidFill>
@@ -25406,7 +25406,7 @@
               </a:lnSpc>
             </a:pPr>
             <a:r>
-              <a:rPr sz="1080" b="0" i="0">
+              <a:rPr sz="979" b="0" i="0">
                 <a:solidFill>
                   <a:srgbClr val="8A7A6A"/>
                 </a:solidFill>
@@ -25445,7 +25445,7 @@
               </a:lnSpc>
             </a:pPr>
             <a:r>
-              <a:rPr sz="1439" b="0" i="0">
+              <a:rPr sz="1339" b="0" i="0">
                 <a:solidFill>
                   <a:srgbClr val="8A7A6A"/>
                 </a:solidFill>
@@ -25558,7 +25558,7 @@
               </a:lnSpc>
             </a:pPr>
             <a:r>
-              <a:rPr sz="1620" b="1" i="0">
+              <a:rPr sz="1520" b="1" i="0">
                 <a:solidFill>
                   <a:srgbClr val="A95C66"/>
                 </a:solidFill>
@@ -25597,7 +25597,7 @@
               </a:lnSpc>
             </a:pPr>
             <a:r>
-              <a:rPr sz="1380" b="0" i="0">
+              <a:rPr sz="1280" b="0" i="0">
                 <a:solidFill>
                   <a:srgbClr val="8A7A6A"/>
                 </a:solidFill>
@@ -25710,7 +25710,7 @@
               </a:lnSpc>
             </a:pPr>
             <a:r>
-              <a:rPr sz="1620" b="1" i="0">
+              <a:rPr sz="1520" b="1" i="0">
                 <a:solidFill>
                   <a:srgbClr val="A95C66"/>
                 </a:solidFill>
@@ -25749,7 +25749,7 @@
               </a:lnSpc>
             </a:pPr>
             <a:r>
-              <a:rPr sz="1380" b="0" i="0">
+              <a:rPr sz="1280" b="0" i="0">
                 <a:solidFill>
                   <a:srgbClr val="8A7A6A"/>
                 </a:solidFill>
@@ -25862,7 +25862,7 @@
               </a:lnSpc>
             </a:pPr>
             <a:r>
-              <a:rPr sz="1620" b="1" i="0">
+              <a:rPr sz="1520" b="1" i="0">
                 <a:solidFill>
                   <a:srgbClr val="A95C66"/>
                 </a:solidFill>
@@ -25901,7 +25901,7 @@
               </a:lnSpc>
             </a:pPr>
             <a:r>
-              <a:rPr sz="1380" b="0" i="0">
+              <a:rPr sz="1280" b="0" i="0">
                 <a:solidFill>
                   <a:srgbClr val="8A7A6A"/>
                 </a:solidFill>
@@ -26014,7 +26014,7 @@
               </a:lnSpc>
             </a:pPr>
             <a:r>
-              <a:rPr sz="1620" b="1" i="0">
+              <a:rPr sz="1520" b="1" i="0">
                 <a:solidFill>
                   <a:srgbClr val="A95C66"/>
                 </a:solidFill>
@@ -26053,7 +26053,7 @@
               </a:lnSpc>
             </a:pPr>
             <a:r>
-              <a:rPr sz="1380" b="0" i="0">
+              <a:rPr sz="1280" b="0" i="0">
                 <a:solidFill>
                   <a:srgbClr val="8A7A6A"/>
                 </a:solidFill>
@@ -26166,7 +26166,7 @@
               </a:lnSpc>
             </a:pPr>
             <a:r>
-              <a:rPr sz="1620" b="1" i="0">
+              <a:rPr sz="1520" b="1" i="0">
                 <a:solidFill>
                   <a:srgbClr val="A95C66"/>
                 </a:solidFill>
@@ -26205,7 +26205,7 @@
               </a:lnSpc>
             </a:pPr>
             <a:r>
-              <a:rPr sz="1380" b="0" i="0">
+              <a:rPr sz="1280" b="0" i="0">
                 <a:solidFill>
                   <a:srgbClr val="8A7A6A"/>
                 </a:solidFill>
@@ -26318,7 +26318,7 @@
               </a:lnSpc>
             </a:pPr>
             <a:r>
-              <a:rPr sz="1620" b="1" i="0">
+              <a:rPr sz="1520" b="1" i="0">
                 <a:solidFill>
                   <a:srgbClr val="A95C66"/>
                 </a:solidFill>
@@ -26357,7 +26357,7 @@
               </a:lnSpc>
             </a:pPr>
             <a:r>
-              <a:rPr sz="1380" b="0" i="0">
+              <a:rPr sz="1280" b="0" i="0">
                 <a:solidFill>
                   <a:srgbClr val="8A7A6A"/>
                 </a:solidFill>
@@ -26539,7 +26539,7 @@
               </a:lnSpc>
             </a:pPr>
             <a:r>
-              <a:rPr sz="1200" b="1" i="0">
+              <a:rPr sz="1100" b="1" i="0">
                 <a:solidFill>
                   <a:srgbClr val="C9A96E"/>
                 </a:solidFill>
@@ -26578,7 +26578,7 @@
               </a:lnSpc>
             </a:pPr>
             <a:r>
-              <a:rPr sz="2640" b="1" i="0">
+              <a:rPr sz="2540" b="1" i="0">
                 <a:solidFill>
                   <a:srgbClr val="4A403A"/>
                 </a:solidFill>
@@ -26617,7 +26617,7 @@
               </a:lnSpc>
             </a:pPr>
             <a:r>
-              <a:rPr sz="1080" b="0" i="0">
+              <a:rPr sz="979" b="0" i="0">
                 <a:solidFill>
                   <a:srgbClr val="8A7A6A"/>
                 </a:solidFill>
@@ -26746,7 +26746,7 @@
               </a:lnSpc>
             </a:pPr>
             <a:r>
-              <a:rPr sz="2400" b="1" i="0">
+              <a:rPr sz="2300" b="1" i="0">
                 <a:solidFill>
                   <a:srgbClr val="FFFFFF"/>
                 </a:solidFill>
@@ -26785,7 +26785,7 @@
               </a:lnSpc>
             </a:pPr>
             <a:r>
-              <a:rPr sz="1739" b="1" i="0">
+              <a:rPr sz="1639" b="1" i="0">
                 <a:solidFill>
                   <a:srgbClr val="A95C66"/>
                 </a:solidFill>
@@ -26824,7 +26824,7 @@
               </a:lnSpc>
             </a:pPr>
             <a:r>
-              <a:rPr sz="1500" b="0" i="0">
+              <a:rPr sz="1400" b="0" i="0">
                 <a:solidFill>
                   <a:srgbClr val="8A7A6A"/>
                 </a:solidFill>
@@ -26953,7 +26953,7 @@
               </a:lnSpc>
             </a:pPr>
             <a:r>
-              <a:rPr sz="2400" b="1" i="0">
+              <a:rPr sz="2300" b="1" i="0">
                 <a:solidFill>
                   <a:srgbClr val="FFFFFF"/>
                 </a:solidFill>
@@ -26992,7 +26992,7 @@
               </a:lnSpc>
             </a:pPr>
             <a:r>
-              <a:rPr sz="1739" b="1" i="0">
+              <a:rPr sz="1639" b="1" i="0">
                 <a:solidFill>
                   <a:srgbClr val="A95C66"/>
                 </a:solidFill>
@@ -27031,7 +27031,7 @@
               </a:lnSpc>
             </a:pPr>
             <a:r>
-              <a:rPr sz="1500" b="0" i="0">
+              <a:rPr sz="1400" b="0" i="0">
                 <a:solidFill>
                   <a:srgbClr val="8A7A6A"/>
                 </a:solidFill>
@@ -27160,7 +27160,7 @@
               </a:lnSpc>
             </a:pPr>
             <a:r>
-              <a:rPr sz="2400" b="1" i="0">
+              <a:rPr sz="2300" b="1" i="0">
                 <a:solidFill>
                   <a:srgbClr val="FFFFFF"/>
                 </a:solidFill>
@@ -27199,7 +27199,7 @@
               </a:lnSpc>
             </a:pPr>
             <a:r>
-              <a:rPr sz="1739" b="1" i="0">
+              <a:rPr sz="1639" b="1" i="0">
                 <a:solidFill>
                   <a:srgbClr val="A95C66"/>
                 </a:solidFill>
@@ -27238,7 +27238,7 @@
               </a:lnSpc>
             </a:pPr>
             <a:r>
-              <a:rPr sz="1500" b="0" i="0">
+              <a:rPr sz="1400" b="0" i="0">
                 <a:solidFill>
                   <a:srgbClr val="8A7A6A"/>
                 </a:solidFill>
@@ -27367,7 +27367,7 @@
               </a:lnSpc>
             </a:pPr>
             <a:r>
-              <a:rPr sz="2400" b="1" i="0">
+              <a:rPr sz="2300" b="1" i="0">
                 <a:solidFill>
                   <a:srgbClr val="FFFFFF"/>
                 </a:solidFill>
@@ -27406,7 +27406,7 @@
               </a:lnSpc>
             </a:pPr>
             <a:r>
-              <a:rPr sz="1739" b="1" i="0">
+              <a:rPr sz="1639" b="1" i="0">
                 <a:solidFill>
                   <a:srgbClr val="A95C66"/>
                 </a:solidFill>
@@ -27445,7 +27445,7 @@
               </a:lnSpc>
             </a:pPr>
             <a:r>
-              <a:rPr sz="1500" b="0" i="0">
+              <a:rPr sz="1400" b="0" i="0">
                 <a:solidFill>
                   <a:srgbClr val="8A7A6A"/>
                 </a:solidFill>
@@ -27574,7 +27574,7 @@
               </a:lnSpc>
             </a:pPr>
             <a:r>
-              <a:rPr sz="2400" b="1" i="0">
+              <a:rPr sz="2300" b="1" i="0">
                 <a:solidFill>
                   <a:srgbClr val="FFFFFF"/>
                 </a:solidFill>
@@ -27613,7 +27613,7 @@
               </a:lnSpc>
             </a:pPr>
             <a:r>
-              <a:rPr sz="1739" b="1" i="0">
+              <a:rPr sz="1639" b="1" i="0">
                 <a:solidFill>
                   <a:srgbClr val="A95C66"/>
                 </a:solidFill>
@@ -27652,7 +27652,7 @@
               </a:lnSpc>
             </a:pPr>
             <a:r>
-              <a:rPr sz="1500" b="0" i="0">
+              <a:rPr sz="1400" b="0" i="0">
                 <a:solidFill>
                   <a:srgbClr val="8A7A6A"/>
                 </a:solidFill>
@@ -27781,7 +27781,7 @@
               </a:lnSpc>
             </a:pPr>
             <a:r>
-              <a:rPr sz="2400" b="1" i="0">
+              <a:rPr sz="2300" b="1" i="0">
                 <a:solidFill>
                   <a:srgbClr val="FFFFFF"/>
                 </a:solidFill>
@@ -27820,7 +27820,7 @@
               </a:lnSpc>
             </a:pPr>
             <a:r>
-              <a:rPr sz="1739" b="1" i="0">
+              <a:rPr sz="1639" b="1" i="0">
                 <a:solidFill>
                   <a:srgbClr val="A95C66"/>
                 </a:solidFill>
@@ -27859,7 +27859,7 @@
               </a:lnSpc>
             </a:pPr>
             <a:r>
-              <a:rPr sz="1500" b="0" i="0">
+              <a:rPr sz="1400" b="0" i="0">
                 <a:solidFill>
                   <a:srgbClr val="8A7A6A"/>
                 </a:solidFill>
@@ -28131,7 +28131,7 @@
               </a:lnSpc>
             </a:pPr>
             <a:r>
-              <a:rPr sz="1200" b="1" i="0">
+              <a:rPr sz="1100" b="1" i="0">
                 <a:solidFill>
                   <a:srgbClr val="C9A96E"/>
                 </a:solidFill>
@@ -28170,7 +28170,7 @@
               </a:lnSpc>
             </a:pPr>
             <a:r>
-              <a:rPr sz="2640" b="1" i="0">
+              <a:rPr sz="2540" b="1" i="0">
                 <a:solidFill>
                   <a:srgbClr val="4A403A"/>
                 </a:solidFill>
@@ -28209,7 +28209,7 @@
               </a:lnSpc>
             </a:pPr>
             <a:r>
-              <a:rPr sz="1080" b="0" i="0">
+              <a:rPr sz="979" b="0" i="0">
                 <a:solidFill>
                   <a:srgbClr val="8A7A6A"/>
                 </a:solidFill>
@@ -28248,7 +28248,7 @@
               </a:lnSpc>
             </a:pPr>
             <a:r>
-              <a:rPr sz="1500" b="0" i="0">
+              <a:rPr sz="1400" b="0" i="0">
                 <a:solidFill>
                   <a:srgbClr val="8A7A6A"/>
                 </a:solidFill>
@@ -28333,7 +28333,7 @@
               </a:lnSpc>
             </a:pPr>
             <a:r>
-              <a:rPr sz="4079" b="1" i="0">
+              <a:rPr sz="3979" b="1" i="0">
                 <a:solidFill>
                   <a:srgbClr val="C97B84"/>
                 </a:solidFill>
@@ -28372,7 +28372,7 @@
               </a:lnSpc>
             </a:pPr>
             <a:r>
-              <a:rPr sz="1560" b="1" i="0">
+              <a:rPr sz="1460" b="1" i="0">
                 <a:solidFill>
                   <a:srgbClr val="C9A96E"/>
                 </a:solidFill>
@@ -28411,7 +28411,7 @@
               </a:lnSpc>
             </a:pPr>
             <a:r>
-              <a:rPr sz="1200" b="0" i="0">
+              <a:rPr sz="1100" b="0" i="0">
                 <a:solidFill>
                   <a:srgbClr val="8A7A6A"/>
                 </a:solidFill>
@@ -28496,7 +28496,7 @@
               </a:lnSpc>
             </a:pPr>
             <a:r>
-              <a:rPr sz="4079" b="1" i="0">
+              <a:rPr sz="3979" b="1" i="0">
                 <a:solidFill>
                   <a:srgbClr val="C97B84"/>
                 </a:solidFill>
@@ -28535,7 +28535,7 @@
               </a:lnSpc>
             </a:pPr>
             <a:r>
-              <a:rPr sz="1560" b="1" i="0">
+              <a:rPr sz="1460" b="1" i="0">
                 <a:solidFill>
                   <a:srgbClr val="C9A96E"/>
                 </a:solidFill>
@@ -28574,7 +28574,7 @@
               </a:lnSpc>
             </a:pPr>
             <a:r>
-              <a:rPr sz="1200" b="0" i="0">
+              <a:rPr sz="1100" b="0" i="0">
                 <a:solidFill>
                   <a:srgbClr val="8A7A6A"/>
                 </a:solidFill>
@@ -28659,7 +28659,7 @@
               </a:lnSpc>
             </a:pPr>
             <a:r>
-              <a:rPr sz="4079" b="1" i="0">
+              <a:rPr sz="3979" b="1" i="0">
                 <a:solidFill>
                   <a:srgbClr val="C97B84"/>
                 </a:solidFill>
@@ -28698,7 +28698,7 @@
               </a:lnSpc>
             </a:pPr>
             <a:r>
-              <a:rPr sz="1560" b="1" i="0">
+              <a:rPr sz="1460" b="1" i="0">
                 <a:solidFill>
                   <a:srgbClr val="C9A96E"/>
                 </a:solidFill>
@@ -28737,7 +28737,7 @@
               </a:lnSpc>
             </a:pPr>
             <a:r>
-              <a:rPr sz="1200" b="0" i="0">
+              <a:rPr sz="1100" b="0" i="0">
                 <a:solidFill>
                   <a:srgbClr val="8A7A6A"/>
                 </a:solidFill>
@@ -28822,7 +28822,7 @@
               </a:lnSpc>
             </a:pPr>
             <a:r>
-              <a:rPr sz="4079" b="1" i="0">
+              <a:rPr sz="3979" b="1" i="0">
                 <a:solidFill>
                   <a:srgbClr val="C97B84"/>
                 </a:solidFill>
@@ -28861,7 +28861,7 @@
               </a:lnSpc>
             </a:pPr>
             <a:r>
-              <a:rPr sz="1560" b="1" i="0">
+              <a:rPr sz="1460" b="1" i="0">
                 <a:solidFill>
                   <a:srgbClr val="C9A96E"/>
                 </a:solidFill>
@@ -28900,7 +28900,7 @@
               </a:lnSpc>
             </a:pPr>
             <a:r>
-              <a:rPr sz="1200" b="0" i="0">
+              <a:rPr sz="1100" b="0" i="0">
                 <a:solidFill>
                   <a:srgbClr val="8A7A6A"/>
                 </a:solidFill>
@@ -28939,7 +28939,7 @@
               </a:lnSpc>
             </a:pPr>
             <a:r>
-              <a:rPr sz="1920" b="1" i="0">
+              <a:rPr sz="1820" b="1" i="0">
                 <a:solidFill>
                   <a:srgbClr val="A95C66"/>
                 </a:solidFill>
@@ -29066,7 +29066,7 @@
               </a:lnSpc>
             </a:pPr>
             <a:r>
-              <a:rPr sz="2400" b="1" i="0">
+              <a:rPr sz="2300" b="1" i="0">
                 <a:solidFill>
                   <a:srgbClr val="FFFFFF"/>
                 </a:solidFill>
@@ -29105,7 +29105,7 @@
               </a:lnSpc>
             </a:pPr>
             <a:r>
-              <a:rPr sz="1800" b="1" i="0">
+              <a:rPr sz="1700" b="1" i="0">
                 <a:solidFill>
                   <a:srgbClr val="A95C66"/>
                 </a:solidFill>
@@ -29144,7 +29144,7 @@
               </a:lnSpc>
             </a:pPr>
             <a:r>
-              <a:rPr sz="1500" b="0" i="0">
+              <a:rPr sz="1400" b="0" i="0">
                 <a:solidFill>
                   <a:srgbClr val="8A7A6A"/>
                 </a:solidFill>
@@ -29227,7 +29227,7 @@
               </a:lnSpc>
             </a:pPr>
             <a:r>
-              <a:rPr sz="2400" b="1" i="0">
+              <a:rPr sz="2300" b="1" i="0">
                 <a:solidFill>
                   <a:srgbClr val="FFFFFF"/>
                 </a:solidFill>
@@ -29266,7 +29266,7 @@
               </a:lnSpc>
             </a:pPr>
             <a:r>
-              <a:rPr sz="1800" b="1" i="0">
+              <a:rPr sz="1700" b="1" i="0">
                 <a:solidFill>
                   <a:srgbClr val="A95C66"/>
                 </a:solidFill>
@@ -29305,7 +29305,7 @@
               </a:lnSpc>
             </a:pPr>
             <a:r>
-              <a:rPr sz="1500" b="0" i="0">
+              <a:rPr sz="1400" b="0" i="0">
                 <a:solidFill>
                   <a:srgbClr val="8A7A6A"/>
                 </a:solidFill>
@@ -29388,7 +29388,7 @@
               </a:lnSpc>
             </a:pPr>
             <a:r>
-              <a:rPr sz="2400" b="1" i="0">
+              <a:rPr sz="2300" b="1" i="0">
                 <a:solidFill>
                   <a:srgbClr val="FFFFFF"/>
                 </a:solidFill>
@@ -29427,7 +29427,7 @@
               </a:lnSpc>
             </a:pPr>
             <a:r>
-              <a:rPr sz="1800" b="1" i="0">
+              <a:rPr sz="1700" b="1" i="0">
                 <a:solidFill>
                   <a:srgbClr val="A95C66"/>
                 </a:solidFill>
@@ -29466,7 +29466,7 @@
               </a:lnSpc>
             </a:pPr>
             <a:r>
-              <a:rPr sz="1500" b="0" i="0">
+              <a:rPr sz="1400" b="0" i="0">
                 <a:solidFill>
                   <a:srgbClr val="8A7A6A"/>
                 </a:solidFill>
@@ -29648,7 +29648,7 @@
               </a:lnSpc>
             </a:pPr>
             <a:r>
-              <a:rPr sz="1200" b="1" i="0">
+              <a:rPr sz="1100" b="1" i="0">
                 <a:solidFill>
                   <a:srgbClr val="C9A96E"/>
                 </a:solidFill>
@@ -29687,7 +29687,7 @@
               </a:lnSpc>
             </a:pPr>
             <a:r>
-              <a:rPr sz="1920" b="1" i="0">
+              <a:rPr sz="1820" b="1" i="0">
                 <a:solidFill>
                   <a:srgbClr val="4A403A"/>
                 </a:solidFill>
@@ -29726,7 +29726,7 @@
               </a:lnSpc>
             </a:pPr>
             <a:r>
-              <a:rPr sz="1080" b="0" i="0">
+              <a:rPr sz="979" b="0" i="0">
                 <a:solidFill>
                   <a:srgbClr val="8A7A6A"/>
                 </a:solidFill>
@@ -29765,7 +29765,7 @@
               </a:lnSpc>
             </a:pPr>
             <a:r>
-              <a:rPr sz="1920" b="1" i="0">
+              <a:rPr sz="1820" b="1" i="0">
                 <a:solidFill>
                   <a:srgbClr val="A95C66"/>
                 </a:solidFill>
@@ -29982,7 +29982,7 @@
               </a:lnSpc>
             </a:pPr>
             <a:r>
-              <a:rPr sz="2400" b="1" i="0">
+              <a:rPr sz="2300" b="1" i="0">
                 <a:solidFill>
                   <a:srgbClr val="FFFFFF"/>
                 </a:solidFill>
@@ -30021,7 +30021,7 @@
               </a:lnSpc>
             </a:pPr>
             <a:r>
-              <a:rPr sz="1739" b="1" i="0">
+              <a:rPr sz="1639" b="1" i="0">
                 <a:solidFill>
                   <a:srgbClr val="A95C66"/>
                 </a:solidFill>
@@ -30060,7 +30060,7 @@
               </a:lnSpc>
             </a:pPr>
             <a:r>
-              <a:rPr sz="1380" b="0" i="0">
+              <a:rPr sz="1280" b="0" i="0">
                 <a:solidFill>
                   <a:srgbClr val="8A7A6A"/>
                 </a:solidFill>
@@ -30233,7 +30233,7 @@
               </a:lnSpc>
             </a:pPr>
             <a:r>
-              <a:rPr sz="2400" b="1" i="0">
+              <a:rPr sz="2300" b="1" i="0">
                 <a:solidFill>
                   <a:srgbClr val="FFFFFF"/>
                 </a:solidFill>
@@ -30272,7 +30272,7 @@
               </a:lnSpc>
             </a:pPr>
             <a:r>
-              <a:rPr sz="1739" b="1" i="0">
+              <a:rPr sz="1639" b="1" i="0">
                 <a:solidFill>
                   <a:srgbClr val="A95C66"/>
                 </a:solidFill>
@@ -30311,7 +30311,7 @@
               </a:lnSpc>
             </a:pPr>
             <a:r>
-              <a:rPr sz="1380" b="0" i="0">
+              <a:rPr sz="1280" b="0" i="0">
                 <a:solidFill>
                   <a:srgbClr val="8A7A6A"/>
                 </a:solidFill>
@@ -30484,7 +30484,7 @@
               </a:lnSpc>
             </a:pPr>
             <a:r>
-              <a:rPr sz="2400" b="1" i="0">
+              <a:rPr sz="2300" b="1" i="0">
                 <a:solidFill>
                   <a:srgbClr val="FFFFFF"/>
                 </a:solidFill>
@@ -30523,7 +30523,7 @@
               </a:lnSpc>
             </a:pPr>
             <a:r>
-              <a:rPr sz="1739" b="1" i="0">
+              <a:rPr sz="1639" b="1" i="0">
                 <a:solidFill>
                   <a:srgbClr val="A95C66"/>
                 </a:solidFill>
@@ -30562,7 +30562,7 @@
               </a:lnSpc>
             </a:pPr>
             <a:r>
-              <a:rPr sz="1380" b="0" i="0">
+              <a:rPr sz="1280" b="0" i="0">
                 <a:solidFill>
                   <a:srgbClr val="8A7A6A"/>
                 </a:solidFill>
@@ -30735,7 +30735,7 @@
               </a:lnSpc>
             </a:pPr>
             <a:r>
-              <a:rPr sz="2400" b="1" i="0">
+              <a:rPr sz="2300" b="1" i="0">
                 <a:solidFill>
                   <a:srgbClr val="FFFFFF"/>
                 </a:solidFill>
@@ -30774,7 +30774,7 @@
               </a:lnSpc>
             </a:pPr>
             <a:r>
-              <a:rPr sz="1739" b="1" i="0">
+              <a:rPr sz="1639" b="1" i="0">
                 <a:solidFill>
                   <a:srgbClr val="A95C66"/>
                 </a:solidFill>
@@ -30813,7 +30813,7 @@
               </a:lnSpc>
             </a:pPr>
             <a:r>
-              <a:rPr sz="1380" b="0" i="0">
+              <a:rPr sz="1280" b="0" i="0">
                 <a:solidFill>
                   <a:srgbClr val="8A7A6A"/>
                 </a:solidFill>
@@ -30995,7 +30995,7 @@
               </a:lnSpc>
             </a:pPr>
             <a:r>
-              <a:rPr sz="1200" b="1" i="0">
+              <a:rPr sz="1100" b="1" i="0">
                 <a:solidFill>
                   <a:srgbClr val="C9A96E"/>
                 </a:solidFill>
@@ -31034,7 +31034,7 @@
               </a:lnSpc>
             </a:pPr>
             <a:r>
-              <a:rPr sz="2640" b="1" i="0">
+              <a:rPr sz="2540" b="1" i="0">
                 <a:solidFill>
                   <a:srgbClr val="4A403A"/>
                 </a:solidFill>
@@ -31073,7 +31073,7 @@
               </a:lnSpc>
             </a:pPr>
             <a:r>
-              <a:rPr sz="1080" b="0" i="0">
+              <a:rPr sz="979" b="0" i="0">
                 <a:solidFill>
                   <a:srgbClr val="8A7A6A"/>
                 </a:solidFill>
@@ -31112,7 +31112,7 @@
               </a:lnSpc>
             </a:pPr>
             <a:r>
-              <a:rPr sz="1500" b="0" i="0">
+              <a:rPr sz="1400" b="0" i="0">
                 <a:solidFill>
                   <a:srgbClr val="8A7A6A"/>
                 </a:solidFill>
@@ -31329,7 +31329,7 @@
               </a:lnSpc>
             </a:pPr>
             <a:r>
-              <a:rPr sz="1680" b="1" i="0">
+              <a:rPr sz="1580" b="1" i="0">
                 <a:solidFill>
                   <a:srgbClr val="FFFFFF"/>
                 </a:solidFill>
@@ -31368,7 +31368,7 @@
               </a:lnSpc>
             </a:pPr>
             <a:r>
-              <a:rPr sz="1620" b="1" i="0">
+              <a:rPr sz="1520" b="1" i="0">
                 <a:solidFill>
                   <a:srgbClr val="A95C66"/>
                 </a:solidFill>
@@ -31407,7 +31407,7 @@
               </a:lnSpc>
             </a:pPr>
             <a:r>
-              <a:rPr sz="1380" b="0" i="0">
+              <a:rPr sz="1280" b="0" i="0">
                 <a:solidFill>
                   <a:srgbClr val="8A7A6A"/>
                 </a:solidFill>
@@ -31624,7 +31624,7 @@
               </a:lnSpc>
             </a:pPr>
             <a:r>
-              <a:rPr sz="1680" b="1" i="0">
+              <a:rPr sz="1580" b="1" i="0">
                 <a:solidFill>
                   <a:srgbClr val="FFFFFF"/>
                 </a:solidFill>
@@ -31663,7 +31663,7 @@
               </a:lnSpc>
             </a:pPr>
             <a:r>
-              <a:rPr sz="1620" b="1" i="0">
+              <a:rPr sz="1520" b="1" i="0">
                 <a:solidFill>
                   <a:srgbClr val="A95C66"/>
                 </a:solidFill>
@@ -31702,7 +31702,7 @@
               </a:lnSpc>
             </a:pPr>
             <a:r>
-              <a:rPr sz="1380" b="0" i="0">
+              <a:rPr sz="1280" b="0" i="0">
                 <a:solidFill>
                   <a:srgbClr val="8A7A6A"/>
                 </a:solidFill>
@@ -31919,7 +31919,7 @@
               </a:lnSpc>
             </a:pPr>
             <a:r>
-              <a:rPr sz="1680" b="1" i="0">
+              <a:rPr sz="1580" b="1" i="0">
                 <a:solidFill>
                   <a:srgbClr val="FFFFFF"/>
                 </a:solidFill>
@@ -31958,7 +31958,7 @@
               </a:lnSpc>
             </a:pPr>
             <a:r>
-              <a:rPr sz="1620" b="1" i="0">
+              <a:rPr sz="1520" b="1" i="0">
                 <a:solidFill>
                   <a:srgbClr val="A95C66"/>
                 </a:solidFill>
@@ -31997,7 +31997,7 @@
               </a:lnSpc>
             </a:pPr>
             <a:r>
-              <a:rPr sz="1380" b="0" i="0">
+              <a:rPr sz="1280" b="0" i="0">
                 <a:solidFill>
                   <a:srgbClr val="8A7A6A"/>
                 </a:solidFill>
@@ -32214,7 +32214,7 @@
               </a:lnSpc>
             </a:pPr>
             <a:r>
-              <a:rPr sz="1680" b="1" i="0">
+              <a:rPr sz="1580" b="1" i="0">
                 <a:solidFill>
                   <a:srgbClr val="FFFFFF"/>
                 </a:solidFill>
@@ -32253,7 +32253,7 @@
               </a:lnSpc>
             </a:pPr>
             <a:r>
-              <a:rPr sz="1620" b="1" i="0">
+              <a:rPr sz="1520" b="1" i="0">
                 <a:solidFill>
                   <a:srgbClr val="A95C66"/>
                 </a:solidFill>
@@ -32292,7 +32292,7 @@
               </a:lnSpc>
             </a:pPr>
             <a:r>
-              <a:rPr sz="1380" b="0" i="0">
+              <a:rPr sz="1280" b="0" i="0">
                 <a:solidFill>
                   <a:srgbClr val="8A7A6A"/>
                 </a:solidFill>
@@ -32509,7 +32509,7 @@
               </a:lnSpc>
             </a:pPr>
             <a:r>
-              <a:rPr sz="1680" b="1" i="0">
+              <a:rPr sz="1580" b="1" i="0">
                 <a:solidFill>
                   <a:srgbClr val="FFFFFF"/>
                 </a:solidFill>
@@ -32548,7 +32548,7 @@
               </a:lnSpc>
             </a:pPr>
             <a:r>
-              <a:rPr sz="1620" b="1" i="0">
+              <a:rPr sz="1520" b="1" i="0">
                 <a:solidFill>
                   <a:srgbClr val="A95C66"/>
                 </a:solidFill>
@@ -32587,7 +32587,7 @@
               </a:lnSpc>
             </a:pPr>
             <a:r>
-              <a:rPr sz="1380" b="0" i="0">
+              <a:rPr sz="1280" b="0" i="0">
                 <a:solidFill>
                   <a:srgbClr val="8A7A6A"/>
                 </a:solidFill>
@@ -32769,7 +32769,7 @@
               </a:lnSpc>
             </a:pPr>
             <a:r>
-              <a:rPr sz="1200" b="1" i="0">
+              <a:rPr sz="1100" b="1" i="0">
                 <a:solidFill>
                   <a:srgbClr val="C9A96E"/>
                 </a:solidFill>
@@ -32808,7 +32808,7 @@
               </a:lnSpc>
             </a:pPr>
             <a:r>
-              <a:rPr sz="2640" b="1" i="0">
+              <a:rPr sz="2540" b="1" i="0">
                 <a:solidFill>
                   <a:srgbClr val="4A403A"/>
                 </a:solidFill>
@@ -32847,7 +32847,7 @@
               </a:lnSpc>
             </a:pPr>
             <a:r>
-              <a:rPr sz="1080" b="0" i="0">
+              <a:rPr sz="979" b="0" i="0">
                 <a:solidFill>
                   <a:srgbClr val="8A7A6A"/>
                 </a:solidFill>
@@ -33064,7 +33064,7 @@
               </a:lnSpc>
             </a:pPr>
             <a:r>
-              <a:rPr sz="1680" b="1" i="0">
+              <a:rPr sz="1580" b="1" i="0">
                 <a:solidFill>
                   <a:srgbClr val="FFFFFF"/>
                 </a:solidFill>
@@ -33103,7 +33103,7 @@
               </a:lnSpc>
             </a:pPr>
             <a:r>
-              <a:rPr sz="1739" b="1" i="0">
+              <a:rPr sz="1639" b="1" i="0">
                 <a:solidFill>
                   <a:srgbClr val="A95C66"/>
                 </a:solidFill>
@@ -33186,7 +33186,7 @@
               </a:lnSpc>
             </a:pPr>
             <a:r>
-              <a:rPr sz="1439" b="0" i="0">
+              <a:rPr sz="1339" b="0" i="0">
                 <a:solidFill>
                   <a:srgbClr val="8A7A6A"/>
                 </a:solidFill>
@@ -33225,7 +33225,7 @@
               </a:lnSpc>
             </a:pPr>
             <a:r>
-              <a:rPr sz="1140" b="1" i="0">
+              <a:rPr sz="1040" b="1" i="0">
                 <a:solidFill>
                   <a:srgbClr val="C9A96E"/>
                 </a:solidFill>
@@ -33308,7 +33308,7 @@
               </a:lnSpc>
             </a:pPr>
             <a:r>
-              <a:rPr sz="1380" b="0" i="0">
+              <a:rPr sz="1280" b="0" i="0">
                 <a:solidFill>
                   <a:srgbClr val="4A403A"/>
                 </a:solidFill>
@@ -33324,7 +33324,7 @@
               </a:lnSpc>
             </a:pPr>
             <a:r>
-              <a:rPr sz="1380" b="0" i="0">
+              <a:rPr sz="1280" b="0" i="0">
                 <a:solidFill>
                   <a:srgbClr val="4A403A"/>
                 </a:solidFill>
@@ -33340,7 +33340,7 @@
               </a:lnSpc>
             </a:pPr>
             <a:r>
-              <a:rPr sz="1380" b="0" i="0">
+              <a:rPr sz="1280" b="0" i="0">
                 <a:solidFill>
                   <a:srgbClr val="4A403A"/>
                 </a:solidFill>
@@ -33356,7 +33356,7 @@
               </a:lnSpc>
             </a:pPr>
             <a:r>
-              <a:rPr sz="1380" b="0" i="0">
+              <a:rPr sz="1280" b="0" i="0">
                 <a:solidFill>
                   <a:srgbClr val="4A403A"/>
                 </a:solidFill>
@@ -33372,7 +33372,7 @@
               </a:lnSpc>
             </a:pPr>
             <a:r>
-              <a:rPr sz="1380" b="0" i="0">
+              <a:rPr sz="1280" b="0" i="0">
                 <a:solidFill>
                   <a:srgbClr val="4A403A"/>
                 </a:solidFill>
@@ -33411,7 +33411,7 @@
               </a:lnSpc>
             </a:pPr>
             <a:r>
-              <a:rPr sz="1140" b="1" i="0">
+              <a:rPr sz="1040" b="1" i="0">
                 <a:solidFill>
                   <a:srgbClr val="C9A96E"/>
                 </a:solidFill>
@@ -33494,7 +33494,7 @@
               </a:lnSpc>
             </a:pPr>
             <a:r>
-              <a:rPr sz="1320" b="0" i="0">
+              <a:rPr sz="1220" b="0" i="0">
                 <a:solidFill>
                   <a:srgbClr val="A95C66"/>
                 </a:solidFill>
@@ -33711,7 +33711,7 @@
               </a:lnSpc>
             </a:pPr>
             <a:r>
-              <a:rPr sz="1680" b="1" i="0">
+              <a:rPr sz="1580" b="1" i="0">
                 <a:solidFill>
                   <a:srgbClr val="FFFFFF"/>
                 </a:solidFill>
@@ -33750,7 +33750,7 @@
               </a:lnSpc>
             </a:pPr>
             <a:r>
-              <a:rPr sz="1739" b="1" i="0">
+              <a:rPr sz="1639" b="1" i="0">
                 <a:solidFill>
                   <a:srgbClr val="A95C66"/>
                 </a:solidFill>
@@ -33833,7 +33833,7 @@
               </a:lnSpc>
             </a:pPr>
             <a:r>
-              <a:rPr sz="1439" b="0" i="0">
+              <a:rPr sz="1339" b="0" i="0">
                 <a:solidFill>
                   <a:srgbClr val="8A7A6A"/>
                 </a:solidFill>
@@ -33872,7 +33872,7 @@
               </a:lnSpc>
             </a:pPr>
             <a:r>
-              <a:rPr sz="1140" b="1" i="0">
+              <a:rPr sz="1040" b="1" i="0">
                 <a:solidFill>
                   <a:srgbClr val="C9A96E"/>
                 </a:solidFill>
@@ -33955,7 +33955,7 @@
               </a:lnSpc>
             </a:pPr>
             <a:r>
-              <a:rPr sz="1380" b="0" i="0">
+              <a:rPr sz="1280" b="0" i="0">
                 <a:solidFill>
                   <a:srgbClr val="4A403A"/>
                 </a:solidFill>
@@ -33971,7 +33971,7 @@
               </a:lnSpc>
             </a:pPr>
             <a:r>
-              <a:rPr sz="1380" b="0" i="0">
+              <a:rPr sz="1280" b="0" i="0">
                 <a:solidFill>
                   <a:srgbClr val="4A403A"/>
                 </a:solidFill>
@@ -33987,7 +33987,7 @@
               </a:lnSpc>
             </a:pPr>
             <a:r>
-              <a:rPr sz="1380" b="0" i="0">
+              <a:rPr sz="1280" b="0" i="0">
                 <a:solidFill>
                   <a:srgbClr val="4A403A"/>
                 </a:solidFill>
@@ -34003,7 +34003,7 @@
               </a:lnSpc>
             </a:pPr>
             <a:r>
-              <a:rPr sz="1380" b="0" i="0">
+              <a:rPr sz="1280" b="0" i="0">
                 <a:solidFill>
                   <a:srgbClr val="4A403A"/>
                 </a:solidFill>
@@ -34019,7 +34019,7 @@
               </a:lnSpc>
             </a:pPr>
             <a:r>
-              <a:rPr sz="1380" b="0" i="0">
+              <a:rPr sz="1280" b="0" i="0">
                 <a:solidFill>
                   <a:srgbClr val="4A403A"/>
                 </a:solidFill>
@@ -34058,7 +34058,7 @@
               </a:lnSpc>
             </a:pPr>
             <a:r>
-              <a:rPr sz="1140" b="1" i="0">
+              <a:rPr sz="1040" b="1" i="0">
                 <a:solidFill>
                   <a:srgbClr val="C9A96E"/>
                 </a:solidFill>
@@ -34141,7 +34141,7 @@
               </a:lnSpc>
             </a:pPr>
             <a:r>
-              <a:rPr sz="1320" b="0" i="0">
+              <a:rPr sz="1220" b="0" i="0">
                 <a:solidFill>
                   <a:srgbClr val="A95C66"/>
                 </a:solidFill>
@@ -34323,7 +34323,7 @@
               </a:lnSpc>
             </a:pPr>
             <a:r>
-              <a:rPr sz="1200" b="1" i="0">
+              <a:rPr sz="1100" b="1" i="0">
                 <a:solidFill>
                   <a:srgbClr val="C9A96E"/>
                 </a:solidFill>
@@ -34362,7 +34362,7 @@
               </a:lnSpc>
             </a:pPr>
             <a:r>
-              <a:rPr sz="2640" b="1" i="0">
+              <a:rPr sz="2540" b="1" i="0">
                 <a:solidFill>
                   <a:srgbClr val="4A403A"/>
                 </a:solidFill>
@@ -34401,7 +34401,7 @@
               </a:lnSpc>
             </a:pPr>
             <a:r>
-              <a:rPr sz="1080" b="0" i="0">
+              <a:rPr sz="979" b="0" i="0">
                 <a:solidFill>
                   <a:srgbClr val="8A7A6A"/>
                 </a:solidFill>
@@ -34618,7 +34618,7 @@
               </a:lnSpc>
             </a:pPr>
             <a:r>
-              <a:rPr sz="1680" b="1" i="0">
+              <a:rPr sz="1580" b="1" i="0">
                 <a:solidFill>
                   <a:srgbClr val="FFFFFF"/>
                 </a:solidFill>
@@ -34657,7 +34657,7 @@
               </a:lnSpc>
             </a:pPr>
             <a:r>
-              <a:rPr sz="1739" b="1" i="0">
+              <a:rPr sz="1639" b="1" i="0">
                 <a:solidFill>
                   <a:srgbClr val="A95C66"/>
                 </a:solidFill>
@@ -34740,7 +34740,7 @@
               </a:lnSpc>
             </a:pPr>
             <a:r>
-              <a:rPr sz="1439" b="0" i="0">
+              <a:rPr sz="1339" b="0" i="0">
                 <a:solidFill>
                   <a:srgbClr val="8A7A6A"/>
                 </a:solidFill>
@@ -34779,7 +34779,7 @@
               </a:lnSpc>
             </a:pPr>
             <a:r>
-              <a:rPr sz="1140" b="1" i="0">
+              <a:rPr sz="1040" b="1" i="0">
                 <a:solidFill>
                   <a:srgbClr val="C9A96E"/>
                 </a:solidFill>
@@ -34862,7 +34862,7 @@
               </a:lnSpc>
             </a:pPr>
             <a:r>
-              <a:rPr sz="1380" b="0" i="0">
+              <a:rPr sz="1280" b="0" i="0">
                 <a:solidFill>
                   <a:srgbClr val="4A403A"/>
                 </a:solidFill>
@@ -34878,7 +34878,7 @@
               </a:lnSpc>
             </a:pPr>
             <a:r>
-              <a:rPr sz="1380" b="0" i="0">
+              <a:rPr sz="1280" b="0" i="0">
                 <a:solidFill>
                   <a:srgbClr val="4A403A"/>
                 </a:solidFill>
@@ -34894,7 +34894,7 @@
               </a:lnSpc>
             </a:pPr>
             <a:r>
-              <a:rPr sz="1380" b="0" i="0">
+              <a:rPr sz="1280" b="0" i="0">
                 <a:solidFill>
                   <a:srgbClr val="4A403A"/>
                 </a:solidFill>
@@ -34910,7 +34910,7 @@
               </a:lnSpc>
             </a:pPr>
             <a:r>
-              <a:rPr sz="1380" b="0" i="0">
+              <a:rPr sz="1280" b="0" i="0">
                 <a:solidFill>
                   <a:srgbClr val="4A403A"/>
                 </a:solidFill>
@@ -34926,7 +34926,7 @@
               </a:lnSpc>
             </a:pPr>
             <a:r>
-              <a:rPr sz="1380" b="0" i="0">
+              <a:rPr sz="1280" b="0" i="0">
                 <a:solidFill>
                   <a:srgbClr val="4A403A"/>
                 </a:solidFill>
@@ -34965,7 +34965,7 @@
               </a:lnSpc>
             </a:pPr>
             <a:r>
-              <a:rPr sz="1140" b="1" i="0">
+              <a:rPr sz="1040" b="1" i="0">
                 <a:solidFill>
                   <a:srgbClr val="C9A96E"/>
                 </a:solidFill>
@@ -35048,7 +35048,7 @@
               </a:lnSpc>
             </a:pPr>
             <a:r>
-              <a:rPr sz="1320" b="0" i="0">
+              <a:rPr sz="1220" b="0" i="0">
                 <a:solidFill>
                   <a:srgbClr val="A95C66"/>
                 </a:solidFill>
@@ -35265,7 +35265,7 @@
               </a:lnSpc>
             </a:pPr>
             <a:r>
-              <a:rPr sz="1680" b="1" i="0">
+              <a:rPr sz="1580" b="1" i="0">
                 <a:solidFill>
                   <a:srgbClr val="FFFFFF"/>
                 </a:solidFill>
@@ -35304,7 +35304,7 @@
               </a:lnSpc>
             </a:pPr>
             <a:r>
-              <a:rPr sz="1739" b="1" i="0">
+              <a:rPr sz="1639" b="1" i="0">
                 <a:solidFill>
                   <a:srgbClr val="A95C66"/>
                 </a:solidFill>
@@ -35387,7 +35387,7 @@
               </a:lnSpc>
             </a:pPr>
             <a:r>
-              <a:rPr sz="1439" b="0" i="0">
+              <a:rPr sz="1339" b="0" i="0">
                 <a:solidFill>
                   <a:srgbClr val="8A7A6A"/>
                 </a:solidFill>
@@ -35426,7 +35426,7 @@
               </a:lnSpc>
             </a:pPr>
             <a:r>
-              <a:rPr sz="1140" b="1" i="0">
+              <a:rPr sz="1040" b="1" i="0">
                 <a:solidFill>
                   <a:srgbClr val="C9A96E"/>
                 </a:solidFill>
@@ -35509,7 +35509,7 @@
               </a:lnSpc>
             </a:pPr>
             <a:r>
-              <a:rPr sz="1380" b="0" i="0">
+              <a:rPr sz="1280" b="0" i="0">
                 <a:solidFill>
                   <a:srgbClr val="4A403A"/>
                 </a:solidFill>
@@ -35525,7 +35525,7 @@
               </a:lnSpc>
             </a:pPr>
             <a:r>
-              <a:rPr sz="1380" b="0" i="0">
+              <a:rPr sz="1280" b="0" i="0">
                 <a:solidFill>
                   <a:srgbClr val="4A403A"/>
                 </a:solidFill>
@@ -35541,7 +35541,7 @@
               </a:lnSpc>
             </a:pPr>
             <a:r>
-              <a:rPr sz="1380" b="0" i="0">
+              <a:rPr sz="1280" b="0" i="0">
                 <a:solidFill>
                   <a:srgbClr val="4A403A"/>
                 </a:solidFill>
@@ -35557,7 +35557,7 @@
               </a:lnSpc>
             </a:pPr>
             <a:r>
-              <a:rPr sz="1380" b="0" i="0">
+              <a:rPr sz="1280" b="0" i="0">
                 <a:solidFill>
                   <a:srgbClr val="4A403A"/>
                 </a:solidFill>
@@ -35573,7 +35573,7 @@
               </a:lnSpc>
             </a:pPr>
             <a:r>
-              <a:rPr sz="1380" b="0" i="0">
+              <a:rPr sz="1280" b="0" i="0">
                 <a:solidFill>
                   <a:srgbClr val="4A403A"/>
                 </a:solidFill>
@@ -35612,7 +35612,7 @@
               </a:lnSpc>
             </a:pPr>
             <a:r>
-              <a:rPr sz="1140" b="1" i="0">
+              <a:rPr sz="1040" b="1" i="0">
                 <a:solidFill>
                   <a:srgbClr val="C9A96E"/>
                 </a:solidFill>
@@ -35695,7 +35695,7 @@
               </a:lnSpc>
             </a:pPr>
             <a:r>
-              <a:rPr sz="1320" b="0" i="0">
+              <a:rPr sz="1220" b="0" i="0">
                 <a:solidFill>
                   <a:srgbClr val="A95C66"/>
                 </a:solidFill>
@@ -35877,7 +35877,7 @@
               </a:lnSpc>
             </a:pPr>
             <a:r>
-              <a:rPr sz="1200" b="1" i="0">
+              <a:rPr sz="1100" b="1" i="0">
                 <a:solidFill>
                   <a:srgbClr val="C9A96E"/>
                 </a:solidFill>
@@ -35916,7 +35916,7 @@
               </a:lnSpc>
             </a:pPr>
             <a:r>
-              <a:rPr sz="2640" b="1" i="0">
+              <a:rPr sz="2540" b="1" i="0">
                 <a:solidFill>
                   <a:srgbClr val="4A403A"/>
                 </a:solidFill>
@@ -35955,7 +35955,7 @@
               </a:lnSpc>
             </a:pPr>
             <a:r>
-              <a:rPr sz="1080" b="0" i="0">
+              <a:rPr sz="979" b="0" i="0">
                 <a:solidFill>
                   <a:srgbClr val="8A7A6A"/>
                 </a:solidFill>
@@ -36172,7 +36172,7 @@
               </a:lnSpc>
             </a:pPr>
             <a:r>
-              <a:rPr sz="1680" b="1" i="0">
+              <a:rPr sz="1580" b="1" i="0">
                 <a:solidFill>
                   <a:srgbClr val="FFFFFF"/>
                 </a:solidFill>
@@ -36211,7 +36211,7 @@
               </a:lnSpc>
             </a:pPr>
             <a:r>
-              <a:rPr sz="1739" b="1" i="0">
+              <a:rPr sz="1639" b="1" i="0">
                 <a:solidFill>
                   <a:srgbClr val="A95C66"/>
                 </a:solidFill>
@@ -36294,7 +36294,7 @@
               </a:lnSpc>
             </a:pPr>
             <a:r>
-              <a:rPr sz="1439" b="0" i="0">
+              <a:rPr sz="1339" b="0" i="0">
                 <a:solidFill>
                   <a:srgbClr val="8A7A6A"/>
                 </a:solidFill>
@@ -36333,7 +36333,7 @@
               </a:lnSpc>
             </a:pPr>
             <a:r>
-              <a:rPr sz="1140" b="1" i="0">
+              <a:rPr sz="1040" b="1" i="0">
                 <a:solidFill>
                   <a:srgbClr val="C9A96E"/>
                 </a:solidFill>
@@ -36416,7 +36416,7 @@
               </a:lnSpc>
             </a:pPr>
             <a:r>
-              <a:rPr sz="1380" b="0" i="0">
+              <a:rPr sz="1280" b="0" i="0">
                 <a:solidFill>
                   <a:srgbClr val="4A403A"/>
                 </a:solidFill>
@@ -36432,7 +36432,7 @@
               </a:lnSpc>
             </a:pPr>
             <a:r>
-              <a:rPr sz="1380" b="0" i="0">
+              <a:rPr sz="1280" b="0" i="0">
                 <a:solidFill>
                   <a:srgbClr val="4A403A"/>
                 </a:solidFill>
@@ -36448,7 +36448,7 @@
               </a:lnSpc>
             </a:pPr>
             <a:r>
-              <a:rPr sz="1380" b="0" i="0">
+              <a:rPr sz="1280" b="0" i="0">
                 <a:solidFill>
                   <a:srgbClr val="4A403A"/>
                 </a:solidFill>
@@ -36464,7 +36464,7 @@
               </a:lnSpc>
             </a:pPr>
             <a:r>
-              <a:rPr sz="1380" b="0" i="0">
+              <a:rPr sz="1280" b="0" i="0">
                 <a:solidFill>
                   <a:srgbClr val="4A403A"/>
                 </a:solidFill>
@@ -36480,7 +36480,7 @@
               </a:lnSpc>
             </a:pPr>
             <a:r>
-              <a:rPr sz="1380" b="0" i="0">
+              <a:rPr sz="1280" b="0" i="0">
                 <a:solidFill>
                   <a:srgbClr val="4A403A"/>
                 </a:solidFill>
@@ -36519,7 +36519,7 @@
               </a:lnSpc>
             </a:pPr>
             <a:r>
-              <a:rPr sz="1140" b="1" i="0">
+              <a:rPr sz="1040" b="1" i="0">
                 <a:solidFill>
                   <a:srgbClr val="C9A96E"/>
                 </a:solidFill>
@@ -36602,7 +36602,7 @@
               </a:lnSpc>
             </a:pPr>
             <a:r>
-              <a:rPr sz="1320" b="0" i="0">
+              <a:rPr sz="1220" b="0" i="0">
                 <a:solidFill>
                   <a:srgbClr val="A95C66"/>
                 </a:solidFill>
@@ -36819,7 +36819,7 @@
               </a:lnSpc>
             </a:pPr>
             <a:r>
-              <a:rPr sz="1680" b="1" i="0">
+              <a:rPr sz="1580" b="1" i="0">
                 <a:solidFill>
                   <a:srgbClr val="FFFFFF"/>
                 </a:solidFill>
@@ -36858,7 +36858,7 @@
               </a:lnSpc>
             </a:pPr>
             <a:r>
-              <a:rPr sz="1739" b="1" i="0">
+              <a:rPr sz="1639" b="1" i="0">
                 <a:solidFill>
                   <a:srgbClr val="A95C66"/>
                 </a:solidFill>
@@ -36941,7 +36941,7 @@
               </a:lnSpc>
             </a:pPr>
             <a:r>
-              <a:rPr sz="1439" b="0" i="0">
+              <a:rPr sz="1339" b="0" i="0">
                 <a:solidFill>
                   <a:srgbClr val="8A7A6A"/>
                 </a:solidFill>
@@ -36980,7 +36980,7 @@
               </a:lnSpc>
             </a:pPr>
             <a:r>
-              <a:rPr sz="1140" b="1" i="0">
+              <a:rPr sz="1040" b="1" i="0">
                 <a:solidFill>
                   <a:srgbClr val="C9A96E"/>
                 </a:solidFill>
@@ -37063,7 +37063,7 @@
               </a:lnSpc>
             </a:pPr>
             <a:r>
-              <a:rPr sz="1380" b="0" i="0">
+              <a:rPr sz="1280" b="0" i="0">
                 <a:solidFill>
                   <a:srgbClr val="4A403A"/>
                 </a:solidFill>
@@ -37079,7 +37079,7 @@
               </a:lnSpc>
             </a:pPr>
             <a:r>
-              <a:rPr sz="1380" b="0" i="0">
+              <a:rPr sz="1280" b="0" i="0">
                 <a:solidFill>
                   <a:srgbClr val="4A403A"/>
                 </a:solidFill>
@@ -37095,7 +37095,7 @@
               </a:lnSpc>
             </a:pPr>
             <a:r>
-              <a:rPr sz="1380" b="0" i="0">
+              <a:rPr sz="1280" b="0" i="0">
                 <a:solidFill>
                   <a:srgbClr val="4A403A"/>
                 </a:solidFill>
@@ -37111,7 +37111,7 @@
               </a:lnSpc>
             </a:pPr>
             <a:r>
-              <a:rPr sz="1380" b="0" i="0">
+              <a:rPr sz="1280" b="0" i="0">
                 <a:solidFill>
                   <a:srgbClr val="4A403A"/>
                 </a:solidFill>
@@ -37127,7 +37127,7 @@
               </a:lnSpc>
             </a:pPr>
             <a:r>
-              <a:rPr sz="1380" b="0" i="0">
+              <a:rPr sz="1280" b="0" i="0">
                 <a:solidFill>
                   <a:srgbClr val="4A403A"/>
                 </a:solidFill>
@@ -37166,7 +37166,7 @@
               </a:lnSpc>
             </a:pPr>
             <a:r>
-              <a:rPr sz="1140" b="1" i="0">
+              <a:rPr sz="1040" b="1" i="0">
                 <a:solidFill>
                   <a:srgbClr val="C9A96E"/>
                 </a:solidFill>
@@ -37249,7 +37249,7 @@
               </a:lnSpc>
             </a:pPr>
             <a:r>
-              <a:rPr sz="1320" b="0" i="0">
+              <a:rPr sz="1220" b="0" i="0">
                 <a:solidFill>
                   <a:srgbClr val="A95C66"/>
                 </a:solidFill>
@@ -37431,7 +37431,7 @@
               </a:lnSpc>
             </a:pPr>
             <a:r>
-              <a:rPr sz="1200" b="1" i="0">
+              <a:rPr sz="1100" b="1" i="0">
                 <a:solidFill>
                   <a:srgbClr val="C9A96E"/>
                 </a:solidFill>
@@ -37470,7 +37470,7 @@
               </a:lnSpc>
             </a:pPr>
             <a:r>
-              <a:rPr sz="2640" b="1" i="0">
+              <a:rPr sz="2540" b="1" i="0">
                 <a:solidFill>
                   <a:srgbClr val="4A403A"/>
                 </a:solidFill>
@@ -37509,7 +37509,7 @@
               </a:lnSpc>
             </a:pPr>
             <a:r>
-              <a:rPr sz="1080" b="0" i="0">
+              <a:rPr sz="979" b="0" i="0">
                 <a:solidFill>
                   <a:srgbClr val="8A7A6A"/>
                 </a:solidFill>
@@ -37726,7 +37726,7 @@
               </a:lnSpc>
             </a:pPr>
             <a:r>
-              <a:rPr sz="1680" b="1" i="0">
+              <a:rPr sz="1580" b="1" i="0">
                 <a:solidFill>
                   <a:srgbClr val="FFFFFF"/>
                 </a:solidFill>
@@ -37765,7 +37765,7 @@
               </a:lnSpc>
             </a:pPr>
             <a:r>
-              <a:rPr sz="1739" b="1" i="0">
+              <a:rPr sz="1639" b="1" i="0">
                 <a:solidFill>
                   <a:srgbClr val="A95C66"/>
                 </a:solidFill>
@@ -37848,7 +37848,7 @@
               </a:lnSpc>
             </a:pPr>
             <a:r>
-              <a:rPr sz="1439" b="0" i="0">
+              <a:rPr sz="1339" b="0" i="0">
                 <a:solidFill>
                   <a:srgbClr val="8A7A6A"/>
                 </a:solidFill>
@@ -37887,7 +37887,7 @@
               </a:lnSpc>
             </a:pPr>
             <a:r>
-              <a:rPr sz="1140" b="1" i="0">
+              <a:rPr sz="1040" b="1" i="0">
                 <a:solidFill>
                   <a:srgbClr val="C9A96E"/>
                 </a:solidFill>
@@ -37970,7 +37970,7 @@
               </a:lnSpc>
             </a:pPr>
             <a:r>
-              <a:rPr sz="1380" b="0" i="0">
+              <a:rPr sz="1280" b="0" i="0">
                 <a:solidFill>
                   <a:srgbClr val="4A403A"/>
                 </a:solidFill>
@@ -37986,7 +37986,7 @@
               </a:lnSpc>
             </a:pPr>
             <a:r>
-              <a:rPr sz="1380" b="0" i="0">
+              <a:rPr sz="1280" b="0" i="0">
                 <a:solidFill>
                   <a:srgbClr val="4A403A"/>
                 </a:solidFill>
@@ -38002,7 +38002,7 @@
               </a:lnSpc>
             </a:pPr>
             <a:r>
-              <a:rPr sz="1380" b="0" i="0">
+              <a:rPr sz="1280" b="0" i="0">
                 <a:solidFill>
                   <a:srgbClr val="4A403A"/>
                 </a:solidFill>
@@ -38018,7 +38018,7 @@
               </a:lnSpc>
             </a:pPr>
             <a:r>
-              <a:rPr sz="1380" b="0" i="0">
+              <a:rPr sz="1280" b="0" i="0">
                 <a:solidFill>
                   <a:srgbClr val="4A403A"/>
                 </a:solidFill>
@@ -38034,7 +38034,7 @@
               </a:lnSpc>
             </a:pPr>
             <a:r>
-              <a:rPr sz="1380" b="0" i="0">
+              <a:rPr sz="1280" b="0" i="0">
                 <a:solidFill>
                   <a:srgbClr val="4A403A"/>
                 </a:solidFill>
@@ -38073,7 +38073,7 @@
               </a:lnSpc>
             </a:pPr>
             <a:r>
-              <a:rPr sz="1140" b="1" i="0">
+              <a:rPr sz="1040" b="1" i="0">
                 <a:solidFill>
                   <a:srgbClr val="C9A96E"/>
                 </a:solidFill>
@@ -38156,7 +38156,7 @@
               </a:lnSpc>
             </a:pPr>
             <a:r>
-              <a:rPr sz="1320" b="0" i="0">
+              <a:rPr sz="1220" b="0" i="0">
                 <a:solidFill>
                   <a:srgbClr val="A95C66"/>
                 </a:solidFill>
@@ -38373,7 +38373,7 @@
               </a:lnSpc>
             </a:pPr>
             <a:r>
-              <a:rPr sz="1680" b="1" i="0">
+              <a:rPr sz="1580" b="1" i="0">
                 <a:solidFill>
                   <a:srgbClr val="FFFFFF"/>
                 </a:solidFill>
@@ -38412,7 +38412,7 @@
               </a:lnSpc>
             </a:pPr>
             <a:r>
-              <a:rPr sz="1739" b="1" i="0">
+              <a:rPr sz="1639" b="1" i="0">
                 <a:solidFill>
                   <a:srgbClr val="A95C66"/>
                 </a:solidFill>
@@ -38495,7 +38495,7 @@
               </a:lnSpc>
             </a:pPr>
             <a:r>
-              <a:rPr sz="1439" b="0" i="0">
+              <a:rPr sz="1339" b="0" i="0">
                 <a:solidFill>
                   <a:srgbClr val="8A7A6A"/>
                 </a:solidFill>
@@ -38534,7 +38534,7 @@
               </a:lnSpc>
             </a:pPr>
             <a:r>
-              <a:rPr sz="1140" b="1" i="0">
+              <a:rPr sz="1040" b="1" i="0">
                 <a:solidFill>
                   <a:srgbClr val="C9A96E"/>
                 </a:solidFill>
@@ -38617,7 +38617,7 @@
               </a:lnSpc>
             </a:pPr>
             <a:r>
-              <a:rPr sz="1380" b="0" i="0">
+              <a:rPr sz="1280" b="0" i="0">
                 <a:solidFill>
                   <a:srgbClr val="4A403A"/>
                 </a:solidFill>
@@ -38633,7 +38633,7 @@
               </a:lnSpc>
             </a:pPr>
             <a:r>
-              <a:rPr sz="1380" b="0" i="0">
+              <a:rPr sz="1280" b="0" i="0">
                 <a:solidFill>
                   <a:srgbClr val="4A403A"/>
                 </a:solidFill>
@@ -38649,7 +38649,7 @@
               </a:lnSpc>
             </a:pPr>
             <a:r>
-              <a:rPr sz="1380" b="0" i="0">
+              <a:rPr sz="1280" b="0" i="0">
                 <a:solidFill>
                   <a:srgbClr val="4A403A"/>
                 </a:solidFill>
@@ -38665,7 +38665,7 @@
               </a:lnSpc>
             </a:pPr>
             <a:r>
-              <a:rPr sz="1380" b="0" i="0">
+              <a:rPr sz="1280" b="0" i="0">
                 <a:solidFill>
                   <a:srgbClr val="4A403A"/>
                 </a:solidFill>
@@ -38681,7 +38681,7 @@
               </a:lnSpc>
             </a:pPr>
             <a:r>
-              <a:rPr sz="1380" b="0" i="0">
+              <a:rPr sz="1280" b="0" i="0">
                 <a:solidFill>
                   <a:srgbClr val="4A403A"/>
                 </a:solidFill>
@@ -38720,7 +38720,7 @@
               </a:lnSpc>
             </a:pPr>
             <a:r>
-              <a:rPr sz="1140" b="1" i="0">
+              <a:rPr sz="1040" b="1" i="0">
                 <a:solidFill>
                   <a:srgbClr val="C9A96E"/>
                 </a:solidFill>
@@ -38803,7 +38803,7 @@
               </a:lnSpc>
             </a:pPr>
             <a:r>
-              <a:rPr sz="1320" b="0" i="0">
+              <a:rPr sz="1220" b="0" i="0">
                 <a:solidFill>
                   <a:srgbClr val="A95C66"/>
                 </a:solidFill>
@@ -38985,7 +38985,7 @@
               </a:lnSpc>
             </a:pPr>
             <a:r>
-              <a:rPr sz="1200" b="1" i="0">
+              <a:rPr sz="1100" b="1" i="0">
                 <a:solidFill>
                   <a:srgbClr val="C9A96E"/>
                 </a:solidFill>
@@ -39024,7 +39024,7 @@
               </a:lnSpc>
             </a:pPr>
             <a:r>
-              <a:rPr sz="2640" b="1" i="0">
+              <a:rPr sz="2540" b="1" i="0">
                 <a:solidFill>
                   <a:srgbClr val="4A403A"/>
                 </a:solidFill>
@@ -39063,7 +39063,7 @@
               </a:lnSpc>
             </a:pPr>
             <a:r>
-              <a:rPr sz="1080" b="0" i="0">
+              <a:rPr sz="979" b="0" i="0">
                 <a:solidFill>
                   <a:srgbClr val="8A7A6A"/>
                 </a:solidFill>
@@ -39280,7 +39280,7 @@
               </a:lnSpc>
             </a:pPr>
             <a:r>
-              <a:rPr sz="1680" b="1" i="0">
+              <a:rPr sz="1580" b="1" i="0">
                 <a:solidFill>
                   <a:srgbClr val="FFFFFF"/>
                 </a:solidFill>
@@ -39319,7 +39319,7 @@
               </a:lnSpc>
             </a:pPr>
             <a:r>
-              <a:rPr sz="1739" b="1" i="0">
+              <a:rPr sz="1639" b="1" i="0">
                 <a:solidFill>
                   <a:srgbClr val="A95C66"/>
                 </a:solidFill>
@@ -39402,7 +39402,7 @@
               </a:lnSpc>
             </a:pPr>
             <a:r>
-              <a:rPr sz="1439" b="0" i="0">
+              <a:rPr sz="1339" b="0" i="0">
                 <a:solidFill>
                   <a:srgbClr val="8A7A6A"/>
                 </a:solidFill>
@@ -39441,7 +39441,7 @@
               </a:lnSpc>
             </a:pPr>
             <a:r>
-              <a:rPr sz="1140" b="1" i="0">
+              <a:rPr sz="1040" b="1" i="0">
                 <a:solidFill>
                   <a:srgbClr val="C9A96E"/>
                 </a:solidFill>
@@ -39524,7 +39524,7 @@
               </a:lnSpc>
             </a:pPr>
             <a:r>
-              <a:rPr sz="1380" b="0" i="0">
+              <a:rPr sz="1280" b="0" i="0">
                 <a:solidFill>
                   <a:srgbClr val="4A403A"/>
                 </a:solidFill>
@@ -39540,7 +39540,7 @@
               </a:lnSpc>
             </a:pPr>
             <a:r>
-              <a:rPr sz="1380" b="0" i="0">
+              <a:rPr sz="1280" b="0" i="0">
                 <a:solidFill>
                   <a:srgbClr val="4A403A"/>
                 </a:solidFill>
@@ -39556,7 +39556,7 @@
               </a:lnSpc>
             </a:pPr>
             <a:r>
-              <a:rPr sz="1380" b="0" i="0">
+              <a:rPr sz="1280" b="0" i="0">
                 <a:solidFill>
                   <a:srgbClr val="4A403A"/>
                 </a:solidFill>
@@ -39572,7 +39572,7 @@
               </a:lnSpc>
             </a:pPr>
             <a:r>
-              <a:rPr sz="1380" b="0" i="0">
+              <a:rPr sz="1280" b="0" i="0">
                 <a:solidFill>
                   <a:srgbClr val="4A403A"/>
                 </a:solidFill>
@@ -39588,7 +39588,7 @@
               </a:lnSpc>
             </a:pPr>
             <a:r>
-              <a:rPr sz="1380" b="0" i="0">
+              <a:rPr sz="1280" b="0" i="0">
                 <a:solidFill>
                   <a:srgbClr val="4A403A"/>
                 </a:solidFill>
@@ -39627,7 +39627,7 @@
               </a:lnSpc>
             </a:pPr>
             <a:r>
-              <a:rPr sz="1140" b="1" i="0">
+              <a:rPr sz="1040" b="1" i="0">
                 <a:solidFill>
                   <a:srgbClr val="C9A96E"/>
                 </a:solidFill>
@@ -39710,7 +39710,7 @@
               </a:lnSpc>
             </a:pPr>
             <a:r>
-              <a:rPr sz="1320" b="0" i="0">
+              <a:rPr sz="1220" b="0" i="0">
                 <a:solidFill>
                   <a:srgbClr val="A95C66"/>
                 </a:solidFill>
@@ -39927,7 +39927,7 @@
               </a:lnSpc>
             </a:pPr>
             <a:r>
-              <a:rPr sz="1680" b="1" i="0">
+              <a:rPr sz="1580" b="1" i="0">
                 <a:solidFill>
                   <a:srgbClr val="FFFFFF"/>
                 </a:solidFill>
@@ -39966,7 +39966,7 @@
               </a:lnSpc>
             </a:pPr>
             <a:r>
-              <a:rPr sz="1739" b="1" i="0">
+              <a:rPr sz="1639" b="1" i="0">
                 <a:solidFill>
                   <a:srgbClr val="A95C66"/>
                 </a:solidFill>
@@ -40049,7 +40049,7 @@
               </a:lnSpc>
             </a:pPr>
             <a:r>
-              <a:rPr sz="1439" b="0" i="0">
+              <a:rPr sz="1339" b="0" i="0">
                 <a:solidFill>
                   <a:srgbClr val="8A7A6A"/>
                 </a:solidFill>
@@ -40088,7 +40088,7 @@
               </a:lnSpc>
             </a:pPr>
             <a:r>
-              <a:rPr sz="1140" b="1" i="0">
+              <a:rPr sz="1040" b="1" i="0">
                 <a:solidFill>
                   <a:srgbClr val="C9A96E"/>
                 </a:solidFill>
@@ -40171,7 +40171,7 @@
               </a:lnSpc>
             </a:pPr>
             <a:r>
-              <a:rPr sz="1380" b="0" i="0">
+              <a:rPr sz="1280" b="0" i="0">
                 <a:solidFill>
                   <a:srgbClr val="4A403A"/>
                 </a:solidFill>
@@ -40187,7 +40187,7 @@
               </a:lnSpc>
             </a:pPr>
             <a:r>
-              <a:rPr sz="1380" b="0" i="0">
+              <a:rPr sz="1280" b="0" i="0">
                 <a:solidFill>
                   <a:srgbClr val="4A403A"/>
                 </a:solidFill>
@@ -40203,7 +40203,7 @@
               </a:lnSpc>
             </a:pPr>
             <a:r>
-              <a:rPr sz="1380" b="0" i="0">
+              <a:rPr sz="1280" b="0" i="0">
                 <a:solidFill>
                   <a:srgbClr val="4A403A"/>
                 </a:solidFill>
@@ -40219,7 +40219,7 @@
               </a:lnSpc>
             </a:pPr>
             <a:r>
-              <a:rPr sz="1380" b="0" i="0">
+              <a:rPr sz="1280" b="0" i="0">
                 <a:solidFill>
                   <a:srgbClr val="4A403A"/>
                 </a:solidFill>
@@ -40235,7 +40235,7 @@
               </a:lnSpc>
             </a:pPr>
             <a:r>
-              <a:rPr sz="1380" b="0" i="0">
+              <a:rPr sz="1280" b="0" i="0">
                 <a:solidFill>
                   <a:srgbClr val="4A403A"/>
                 </a:solidFill>
@@ -40274,7 +40274,7 @@
               </a:lnSpc>
             </a:pPr>
             <a:r>
-              <a:rPr sz="1140" b="1" i="0">
+              <a:rPr sz="1040" b="1" i="0">
                 <a:solidFill>
                   <a:srgbClr val="C9A96E"/>
                 </a:solidFill>
@@ -40357,7 +40357,7 @@
               </a:lnSpc>
             </a:pPr>
             <a:r>
-              <a:rPr sz="1320" b="0" i="0">
+              <a:rPr sz="1220" b="0" i="0">
                 <a:solidFill>
                   <a:srgbClr val="A95C66"/>
                 </a:solidFill>
@@ -40539,7 +40539,7 @@
               </a:lnSpc>
             </a:pPr>
             <a:r>
-              <a:rPr sz="1200" b="1" i="0">
+              <a:rPr sz="1100" b="1" i="0">
                 <a:solidFill>
                   <a:srgbClr val="C9A96E"/>
                 </a:solidFill>
@@ -40578,7 +40578,7 @@
               </a:lnSpc>
             </a:pPr>
             <a:r>
-              <a:rPr sz="2640" b="1" i="0">
+              <a:rPr sz="2540" b="1" i="0">
                 <a:solidFill>
                   <a:srgbClr val="4A403A"/>
                 </a:solidFill>
@@ -40617,7 +40617,7 @@
               </a:lnSpc>
             </a:pPr>
             <a:r>
-              <a:rPr sz="1080" b="0" i="0">
+              <a:rPr sz="979" b="0" i="0">
                 <a:solidFill>
                   <a:srgbClr val="8A7A6A"/>
                 </a:solidFill>
@@ -40746,7 +40746,7 @@
               </a:lnSpc>
             </a:pPr>
             <a:r>
-              <a:rPr sz="1680" b="1" i="0">
+              <a:rPr sz="1580" b="1" i="0">
                 <a:solidFill>
                   <a:srgbClr val="A95C66"/>
                 </a:solidFill>
@@ -40785,7 +40785,7 @@
               </a:lnSpc>
             </a:pPr>
             <a:r>
-              <a:rPr sz="1500" b="0" i="0">
+              <a:rPr sz="1400" b="0" i="0">
                 <a:solidFill>
                   <a:srgbClr val="8A7A6A"/>
                 </a:solidFill>
@@ -40914,7 +40914,7 @@
               </a:lnSpc>
             </a:pPr>
             <a:r>
-              <a:rPr sz="1680" b="1" i="0">
+              <a:rPr sz="1580" b="1" i="0">
                 <a:solidFill>
                   <a:srgbClr val="A95C66"/>
                 </a:solidFill>
@@ -40953,7 +40953,7 @@
               </a:lnSpc>
             </a:pPr>
             <a:r>
-              <a:rPr sz="1500" b="0" i="0">
+              <a:rPr sz="1400" b="0" i="0">
                 <a:solidFill>
                   <a:srgbClr val="8A7A6A"/>
                 </a:solidFill>
@@ -41082,7 +41082,7 @@
               </a:lnSpc>
             </a:pPr>
             <a:r>
-              <a:rPr sz="1680" b="1" i="0">
+              <a:rPr sz="1580" b="1" i="0">
                 <a:solidFill>
                   <a:srgbClr val="A95C66"/>
                 </a:solidFill>
@@ -41121,7 +41121,7 @@
               </a:lnSpc>
             </a:pPr>
             <a:r>
-              <a:rPr sz="1500" b="0" i="0">
+              <a:rPr sz="1400" b="0" i="0">
                 <a:solidFill>
                   <a:srgbClr val="8A7A6A"/>
                 </a:solidFill>
@@ -41250,7 +41250,7 @@
               </a:lnSpc>
             </a:pPr>
             <a:r>
-              <a:rPr sz="1680" b="1" i="0">
+              <a:rPr sz="1580" b="1" i="0">
                 <a:solidFill>
                   <a:srgbClr val="A95C66"/>
                 </a:solidFill>
@@ -41289,7 +41289,7 @@
               </a:lnSpc>
             </a:pPr>
             <a:r>
-              <a:rPr sz="1500" b="0" i="0">
+              <a:rPr sz="1400" b="0" i="0">
                 <a:solidFill>
                   <a:srgbClr val="8A7A6A"/>
                 </a:solidFill>
@@ -41418,7 +41418,7 @@
               </a:lnSpc>
             </a:pPr>
             <a:r>
-              <a:rPr sz="1680" b="1" i="0">
+              <a:rPr sz="1580" b="1" i="0">
                 <a:solidFill>
                   <a:srgbClr val="A95C66"/>
                 </a:solidFill>
@@ -41457,7 +41457,7 @@
               </a:lnSpc>
             </a:pPr>
             <a:r>
-              <a:rPr sz="1500" b="0" i="0">
+              <a:rPr sz="1400" b="0" i="0">
                 <a:solidFill>
                   <a:srgbClr val="8A7A6A"/>
                 </a:solidFill>
@@ -41639,7 +41639,7 @@
               </a:lnSpc>
             </a:pPr>
             <a:r>
-              <a:rPr sz="1200" b="1" i="0">
+              <a:rPr sz="1100" b="1" i="0">
                 <a:solidFill>
                   <a:srgbClr val="C9A96E"/>
                 </a:solidFill>
@@ -41678,7 +41678,7 @@
               </a:lnSpc>
             </a:pPr>
             <a:r>
-              <a:rPr sz="2640" b="1" i="0">
+              <a:rPr sz="2540" b="1" i="0">
                 <a:solidFill>
                   <a:srgbClr val="4A403A"/>
                 </a:solidFill>
@@ -41717,7 +41717,7 @@
               </a:lnSpc>
             </a:pPr>
             <a:r>
-              <a:rPr sz="1080" b="0" i="0">
+              <a:rPr sz="979" b="0" i="0">
                 <a:solidFill>
                   <a:srgbClr val="8A7A6A"/>
                 </a:solidFill>
@@ -41756,7 +41756,7 @@
               </a:lnSpc>
             </a:pPr>
             <a:r>
-              <a:rPr sz="1920" b="1" i="0">
+              <a:rPr sz="1820" b="1" i="0">
                 <a:solidFill>
                   <a:srgbClr val="A95C66"/>
                 </a:solidFill>
@@ -41929,7 +41929,7 @@
               </a:lnSpc>
             </a:pPr>
             <a:r>
-              <a:rPr sz="2039" b="1" i="0">
+              <a:rPr sz="1939" b="1" i="0">
                 <a:solidFill>
                   <a:srgbClr val="FFFFFF"/>
                 </a:solidFill>
@@ -41968,7 +41968,7 @@
               </a:lnSpc>
             </a:pPr>
             <a:r>
-              <a:rPr sz="1800" b="1" i="0">
+              <a:rPr sz="1700" b="1" i="0">
                 <a:solidFill>
                   <a:srgbClr val="A95C66"/>
                 </a:solidFill>
@@ -42007,7 +42007,7 @@
               </a:lnSpc>
             </a:pPr>
             <a:r>
-              <a:rPr sz="1380" b="0" i="0">
+              <a:rPr sz="1280" b="0" i="0">
                 <a:solidFill>
                   <a:srgbClr val="8A7A6A"/>
                 </a:solidFill>
@@ -42136,7 +42136,7 @@
               </a:lnSpc>
             </a:pPr>
             <a:r>
-              <a:rPr sz="2039" b="1" i="0">
+              <a:rPr sz="1939" b="1" i="0">
                 <a:solidFill>
                   <a:srgbClr val="FFFFFF"/>
                 </a:solidFill>
@@ -42175,7 +42175,7 @@
               </a:lnSpc>
             </a:pPr>
             <a:r>
-              <a:rPr sz="1800" b="1" i="0">
+              <a:rPr sz="1700" b="1" i="0">
                 <a:solidFill>
                   <a:srgbClr val="A95C66"/>
                 </a:solidFill>
@@ -42214,7 +42214,7 @@
               </a:lnSpc>
             </a:pPr>
             <a:r>
-              <a:rPr sz="1380" b="0" i="0">
+              <a:rPr sz="1280" b="0" i="0">
                 <a:solidFill>
                   <a:srgbClr val="8A7A6A"/>
                 </a:solidFill>
@@ -42343,7 +42343,7 @@
               </a:lnSpc>
             </a:pPr>
             <a:r>
-              <a:rPr sz="2039" b="1" i="0">
+              <a:rPr sz="1939" b="1" i="0">
                 <a:solidFill>
                   <a:srgbClr val="FFFFFF"/>
                 </a:solidFill>
@@ -42382,7 +42382,7 @@
               </a:lnSpc>
             </a:pPr>
             <a:r>
-              <a:rPr sz="1800" b="1" i="0">
+              <a:rPr sz="1700" b="1" i="0">
                 <a:solidFill>
                   <a:srgbClr val="A95C66"/>
                 </a:solidFill>
@@ -42421,7 +42421,7 @@
               </a:lnSpc>
             </a:pPr>
             <a:r>
-              <a:rPr sz="1380" b="0" i="0">
+              <a:rPr sz="1280" b="0" i="0">
                 <a:solidFill>
                   <a:srgbClr val="8A7A6A"/>
                 </a:solidFill>
@@ -42504,7 +42504,7 @@
               </a:lnSpc>
             </a:pPr>
             <a:r>
-              <a:rPr sz="1439" b="0" i="0">
+              <a:rPr sz="1339" b="0" i="0">
                 <a:solidFill>
                   <a:srgbClr val="4A403A"/>
                 </a:solidFill>
@@ -42520,7 +42520,7 @@
               </a:lnSpc>
             </a:pPr>
             <a:r>
-              <a:rPr sz="1439" b="0" i="0">
+              <a:rPr sz="1339" b="0" i="0">
                 <a:solidFill>
                   <a:srgbClr val="4A403A"/>
                 </a:solidFill>
@@ -42536,7 +42536,7 @@
               </a:lnSpc>
             </a:pPr>
             <a:r>
-              <a:rPr sz="1439" b="0" i="0">
+              <a:rPr sz="1339" b="0" i="0">
                 <a:solidFill>
                   <a:srgbClr val="4A403A"/>
                 </a:solidFill>
@@ -42552,7 +42552,7 @@
               </a:lnSpc>
             </a:pPr>
             <a:r>
-              <a:rPr sz="1439" b="0" i="0">
+              <a:rPr sz="1339" b="0" i="0">
                 <a:solidFill>
                   <a:srgbClr val="4A403A"/>
                 </a:solidFill>
@@ -42591,7 +42591,7 @@
               </a:lnSpc>
             </a:pPr>
             <a:r>
-              <a:rPr sz="1920" b="1" i="0">
+              <a:rPr sz="1820" b="1" i="0">
                 <a:solidFill>
                   <a:srgbClr val="A95C66"/>
                 </a:solidFill>
@@ -42764,7 +42764,7 @@
               </a:lnSpc>
             </a:pPr>
             <a:r>
-              <a:rPr sz="1380" b="0" i="0">
+              <a:rPr sz="1280" b="0" i="0">
                 <a:solidFill>
                   <a:srgbClr val="4A403A"/>
                 </a:solidFill>
@@ -42893,7 +42893,7 @@
               </a:lnSpc>
             </a:pPr>
             <a:r>
-              <a:rPr sz="1380" b="0" i="0">
+              <a:rPr sz="1280" b="0" i="0">
                 <a:solidFill>
                   <a:srgbClr val="4A403A"/>
                 </a:solidFill>
@@ -43022,7 +43022,7 @@
               </a:lnSpc>
             </a:pPr>
             <a:r>
-              <a:rPr sz="1380" b="0" i="0">
+              <a:rPr sz="1280" b="0" i="0">
                 <a:solidFill>
                   <a:srgbClr val="4A403A"/>
                 </a:solidFill>
@@ -43151,7 +43151,7 @@
               </a:lnSpc>
             </a:pPr>
             <a:r>
-              <a:rPr sz="1380" b="0" i="0">
+              <a:rPr sz="1280" b="0" i="0">
                 <a:solidFill>
                   <a:srgbClr val="4A403A"/>
                 </a:solidFill>
@@ -43280,7 +43280,7 @@
               </a:lnSpc>
             </a:pPr>
             <a:r>
-              <a:rPr sz="1380" b="0" i="0">
+              <a:rPr sz="1280" b="0" i="0">
                 <a:solidFill>
                   <a:srgbClr val="4A403A"/>
                 </a:solidFill>
@@ -43409,7 +43409,7 @@
               </a:lnSpc>
             </a:pPr>
             <a:r>
-              <a:rPr sz="1380" b="0" i="0">
+              <a:rPr sz="1280" b="0" i="0">
                 <a:solidFill>
                   <a:srgbClr val="4A403A"/>
                 </a:solidFill>
@@ -43538,7 +43538,7 @@
               </a:lnSpc>
             </a:pPr>
             <a:r>
-              <a:rPr sz="1380" b="0" i="0">
+              <a:rPr sz="1280" b="0" i="0">
                 <a:solidFill>
                   <a:srgbClr val="4A403A"/>
                 </a:solidFill>
@@ -43667,7 +43667,7 @@
               </a:lnSpc>
             </a:pPr>
             <a:r>
-              <a:rPr sz="1380" b="0" i="0">
+              <a:rPr sz="1280" b="0" i="0">
                 <a:solidFill>
                   <a:srgbClr val="4A403A"/>
                 </a:solidFill>
@@ -43849,7 +43849,7 @@
               </a:lnSpc>
             </a:pPr>
             <a:r>
-              <a:rPr sz="1200" b="1" i="0">
+              <a:rPr sz="1100" b="1" i="0">
                 <a:solidFill>
                   <a:srgbClr val="C9A96E"/>
                 </a:solidFill>
@@ -43888,7 +43888,7 @@
               </a:lnSpc>
             </a:pPr>
             <a:r>
-              <a:rPr sz="2640" b="1" i="0">
+              <a:rPr sz="2540" b="1" i="0">
                 <a:solidFill>
                   <a:srgbClr val="4A403A"/>
                 </a:solidFill>
@@ -43927,7 +43927,7 @@
               </a:lnSpc>
             </a:pPr>
             <a:r>
-              <a:rPr sz="1080" b="0" i="0">
+              <a:rPr sz="979" b="0" i="0">
                 <a:solidFill>
                   <a:srgbClr val="8A7A6A"/>
                 </a:solidFill>
@@ -43966,7 +43966,7 @@
               </a:lnSpc>
             </a:pPr>
             <a:r>
-              <a:rPr sz="1439" b="0" i="0">
+              <a:rPr sz="1339" b="0" i="0">
                 <a:solidFill>
                   <a:srgbClr val="8A7A6A"/>
                 </a:solidFill>
@@ -44051,7 +44051,7 @@
               </a:lnSpc>
             </a:pPr>
             <a:r>
-              <a:rPr sz="1680" b="1" i="0">
+              <a:rPr sz="1580" b="1" i="0">
                 <a:solidFill>
                   <a:srgbClr val="A95C66"/>
                 </a:solidFill>
@@ -44090,7 +44090,7 @@
               </a:lnSpc>
             </a:pPr>
             <a:r>
-              <a:rPr sz="1260" b="1" i="0">
+              <a:rPr sz="1160" b="1" i="0">
                 <a:solidFill>
                   <a:srgbClr val="C9A96E"/>
                 </a:solidFill>
@@ -44393,7 +44393,7 @@
               </a:lnSpc>
             </a:pPr>
             <a:r>
-              <a:rPr sz="1439" b="0" i="0">
+              <a:rPr sz="1339" b="0" i="0">
                 <a:solidFill>
                   <a:srgbClr val="8A7A6A"/>
                 </a:solidFill>
@@ -44409,7 +44409,7 @@
               </a:lnSpc>
             </a:pPr>
             <a:r>
-              <a:rPr sz="1439" b="0" i="0">
+              <a:rPr sz="1339" b="0" i="0">
                 <a:solidFill>
                   <a:srgbClr val="8A7A6A"/>
                 </a:solidFill>
@@ -44425,7 +44425,7 @@
               </a:lnSpc>
             </a:pPr>
             <a:r>
-              <a:rPr sz="1439" b="0" i="0">
+              <a:rPr sz="1339" b="0" i="0">
                 <a:solidFill>
                   <a:srgbClr val="8A7A6A"/>
                 </a:solidFill>
@@ -44510,7 +44510,7 @@
               </a:lnSpc>
             </a:pPr>
             <a:r>
-              <a:rPr sz="1680" b="1" i="0">
+              <a:rPr sz="1580" b="1" i="0">
                 <a:solidFill>
                   <a:srgbClr val="A95C66"/>
                 </a:solidFill>
@@ -44549,7 +44549,7 @@
               </a:lnSpc>
             </a:pPr>
             <a:r>
-              <a:rPr sz="1260" b="1" i="0">
+              <a:rPr sz="1160" b="1" i="0">
                 <a:solidFill>
                   <a:srgbClr val="C9A96E"/>
                 </a:solidFill>
@@ -44864,7 +44864,7 @@
               </a:lnSpc>
             </a:pPr>
             <a:r>
-              <a:rPr sz="1439" b="0" i="0">
+              <a:rPr sz="1339" b="0" i="0">
                 <a:solidFill>
                   <a:srgbClr val="8A7A6A"/>
                 </a:solidFill>
@@ -44880,7 +44880,7 @@
               </a:lnSpc>
             </a:pPr>
             <a:r>
-              <a:rPr sz="1439" b="0" i="0">
+              <a:rPr sz="1339" b="0" i="0">
                 <a:solidFill>
                   <a:srgbClr val="8A7A6A"/>
                 </a:solidFill>
@@ -44896,7 +44896,7 @@
               </a:lnSpc>
             </a:pPr>
             <a:r>
-              <a:rPr sz="1439" b="0" i="0">
+              <a:rPr sz="1339" b="0" i="0">
                 <a:solidFill>
                   <a:srgbClr val="8A7A6A"/>
                 </a:solidFill>
@@ -44981,7 +44981,7 @@
               </a:lnSpc>
             </a:pPr>
             <a:r>
-              <a:rPr sz="1680" b="1" i="0">
+              <a:rPr sz="1580" b="1" i="0">
                 <a:solidFill>
                   <a:srgbClr val="A95C66"/>
                 </a:solidFill>
@@ -45020,7 +45020,7 @@
               </a:lnSpc>
             </a:pPr>
             <a:r>
-              <a:rPr sz="1260" b="1" i="0">
+              <a:rPr sz="1160" b="1" i="0">
                 <a:solidFill>
                   <a:srgbClr val="C9A96E"/>
                 </a:solidFill>
@@ -45059,7 +45059,7 @@
               </a:lnSpc>
             </a:pPr>
             <a:r>
-              <a:rPr sz="1019" b="1" i="0">
+              <a:rPr sz="919" b="1" i="0">
                 <a:solidFill>
                   <a:srgbClr val="A95C66"/>
                 </a:solidFill>
@@ -45362,7 +45362,7 @@
               </a:lnSpc>
             </a:pPr>
             <a:r>
-              <a:rPr sz="1019" b="1" i="0">
+              <a:rPr sz="919" b="1" i="0">
                 <a:solidFill>
                   <a:srgbClr val="8A7A6A"/>
                 </a:solidFill>
@@ -45665,7 +45665,7 @@
               </a:lnSpc>
             </a:pPr>
             <a:r>
-              <a:rPr sz="1439" b="0" i="0">
+              <a:rPr sz="1339" b="0" i="0">
                 <a:solidFill>
                   <a:srgbClr val="8A7A6A"/>
                 </a:solidFill>
@@ -45681,7 +45681,7 @@
               </a:lnSpc>
             </a:pPr>
             <a:r>
-              <a:rPr sz="1439" b="0" i="0">
+              <a:rPr sz="1339" b="0" i="0">
                 <a:solidFill>
                   <a:srgbClr val="8A7A6A"/>
                 </a:solidFill>
@@ -45697,7 +45697,7 @@
               </a:lnSpc>
             </a:pPr>
             <a:r>
-              <a:rPr sz="1439" b="0" i="0">
+              <a:rPr sz="1339" b="0" i="0">
                 <a:solidFill>
                   <a:srgbClr val="8A7A6A"/>
                 </a:solidFill>
@@ -45879,7 +45879,7 @@
               </a:lnSpc>
             </a:pPr>
             <a:r>
-              <a:rPr sz="1200" b="1" i="0">
+              <a:rPr sz="1100" b="1" i="0">
                 <a:solidFill>
                   <a:srgbClr val="C9A96E"/>
                 </a:solidFill>
@@ -45918,7 +45918,7 @@
               </a:lnSpc>
             </a:pPr>
             <a:r>
-              <a:rPr sz="2640" b="1" i="0">
+              <a:rPr sz="2540" b="1" i="0">
                 <a:solidFill>
                   <a:srgbClr val="4A403A"/>
                 </a:solidFill>
@@ -45957,7 +45957,7 @@
               </a:lnSpc>
             </a:pPr>
             <a:r>
-              <a:rPr sz="1080" b="0" i="0">
+              <a:rPr sz="979" b="0" i="0">
                 <a:solidFill>
                   <a:srgbClr val="8A7A6A"/>
                 </a:solidFill>
@@ -46040,7 +46040,7 @@
               </a:lnSpc>
             </a:pPr>
             <a:r>
-              <a:rPr sz="1739" b="1" i="0">
+              <a:rPr sz="1639" b="1" i="0">
                 <a:solidFill>
                   <a:srgbClr val="A95C66"/>
                 </a:solidFill>
@@ -46079,7 +46079,7 @@
               </a:lnSpc>
             </a:pPr>
             <a:r>
-              <a:rPr sz="1500" b="0" i="0">
+              <a:rPr sz="1400" b="0" i="0">
                 <a:solidFill>
                   <a:srgbClr val="8A7A6A"/>
                 </a:solidFill>
@@ -46162,7 +46162,7 @@
               </a:lnSpc>
             </a:pPr>
             <a:r>
-              <a:rPr sz="1739" b="1" i="0">
+              <a:rPr sz="1639" b="1" i="0">
                 <a:solidFill>
                   <a:srgbClr val="A95C66"/>
                 </a:solidFill>
@@ -46201,7 +46201,7 @@
               </a:lnSpc>
             </a:pPr>
             <a:r>
-              <a:rPr sz="1500" b="0" i="0">
+              <a:rPr sz="1400" b="0" i="0">
                 <a:solidFill>
                   <a:srgbClr val="8A7A6A"/>
                 </a:solidFill>
@@ -46284,7 +46284,7 @@
               </a:lnSpc>
             </a:pPr>
             <a:r>
-              <a:rPr sz="1739" b="1" i="0">
+              <a:rPr sz="1639" b="1" i="0">
                 <a:solidFill>
                   <a:srgbClr val="A95C66"/>
                 </a:solidFill>
@@ -46323,7 +46323,7 @@
               </a:lnSpc>
             </a:pPr>
             <a:r>
-              <a:rPr sz="1500" b="0" i="0">
+              <a:rPr sz="1400" b="0" i="0">
                 <a:solidFill>
                   <a:srgbClr val="8A7A6A"/>
                 </a:solidFill>
@@ -46406,7 +46406,7 @@
               </a:lnSpc>
             </a:pPr>
             <a:r>
-              <a:rPr sz="1739" b="1" i="0">
+              <a:rPr sz="1639" b="1" i="0">
                 <a:solidFill>
                   <a:srgbClr val="A95C66"/>
                 </a:solidFill>
@@ -46445,7 +46445,7 @@
               </a:lnSpc>
             </a:pPr>
             <a:r>
-              <a:rPr sz="1500" b="0" i="0">
+              <a:rPr sz="1400" b="0" i="0">
                 <a:solidFill>
                   <a:srgbClr val="8A7A6A"/>
                 </a:solidFill>
@@ -46484,7 +46484,7 @@
               </a:lnSpc>
             </a:pPr>
             <a:r>
-              <a:rPr sz="1680" b="1" i="0">
+              <a:rPr sz="1580" b="1" i="0">
                 <a:solidFill>
                   <a:srgbClr val="A95C66"/>
                 </a:solidFill>
@@ -46569,7 +46569,7 @@
               </a:lnSpc>
             </a:pPr>
             <a:r>
-              <a:rPr sz="1080" b="0" i="0">
+              <a:rPr sz="979" b="0" i="0">
                 <a:solidFill>
                   <a:srgbClr val="8A7A6A"/>
                 </a:solidFill>
@@ -46654,7 +46654,7 @@
               </a:lnSpc>
             </a:pPr>
             <a:r>
-              <a:rPr sz="1080" b="0" i="0">
+              <a:rPr sz="979" b="0" i="0">
                 <a:solidFill>
                   <a:srgbClr val="8A7A6A"/>
                 </a:solidFill>
@@ -46739,7 +46739,7 @@
               </a:lnSpc>
             </a:pPr>
             <a:r>
-              <a:rPr sz="1080" b="0" i="0">
+              <a:rPr sz="979" b="0" i="0">
                 <a:solidFill>
                   <a:srgbClr val="8A7A6A"/>
                 </a:solidFill>
@@ -46824,7 +46824,7 @@
               </a:lnSpc>
             </a:pPr>
             <a:r>
-              <a:rPr sz="1080" b="0" i="0">
+              <a:rPr sz="979" b="0" i="0">
                 <a:solidFill>
                   <a:srgbClr val="8A7A6A"/>
                 </a:solidFill>
@@ -46909,7 +46909,7 @@
               </a:lnSpc>
             </a:pPr>
             <a:r>
-              <a:rPr sz="1080" b="0" i="0">
+              <a:rPr sz="979" b="0" i="0">
                 <a:solidFill>
                   <a:srgbClr val="8A7A6A"/>
                 </a:solidFill>
@@ -46994,7 +46994,7 @@
               </a:lnSpc>
             </a:pPr>
             <a:r>
-              <a:rPr sz="1080" b="0" i="0">
+              <a:rPr sz="979" b="0" i="0">
                 <a:solidFill>
                   <a:srgbClr val="8A7A6A"/>
                 </a:solidFill>
@@ -47079,7 +47079,7 @@
               </a:lnSpc>
             </a:pPr>
             <a:r>
-              <a:rPr sz="1080" b="0" i="0">
+              <a:rPr sz="979" b="0" i="0">
                 <a:solidFill>
                   <a:srgbClr val="8A7A6A"/>
                 </a:solidFill>
@@ -47164,7 +47164,7 @@
               </a:lnSpc>
             </a:pPr>
             <a:r>
-              <a:rPr sz="1080" b="0" i="0">
+              <a:rPr sz="979" b="0" i="0">
                 <a:solidFill>
                   <a:srgbClr val="8A7A6A"/>
                 </a:solidFill>
@@ -47249,7 +47249,7 @@
               </a:lnSpc>
             </a:pPr>
             <a:r>
-              <a:rPr sz="1080" b="0" i="0">
+              <a:rPr sz="979" b="0" i="0">
                 <a:solidFill>
                   <a:srgbClr val="8A7A6A"/>
                 </a:solidFill>
@@ -47334,7 +47334,7 @@
               </a:lnSpc>
             </a:pPr>
             <a:r>
-              <a:rPr sz="1080" b="0" i="0">
+              <a:rPr sz="979" b="0" i="0">
                 <a:solidFill>
                   <a:srgbClr val="8A7A6A"/>
                 </a:solidFill>
@@ -47419,7 +47419,7 @@
               </a:lnSpc>
             </a:pPr>
             <a:r>
-              <a:rPr sz="1080" b="0" i="0">
+              <a:rPr sz="979" b="0" i="0">
                 <a:solidFill>
                   <a:srgbClr val="8A7A6A"/>
                 </a:solidFill>
@@ -47504,7 +47504,7 @@
               </a:lnSpc>
             </a:pPr>
             <a:r>
-              <a:rPr sz="1080" b="0" i="0">
+              <a:rPr sz="979" b="0" i="0">
                 <a:solidFill>
                   <a:srgbClr val="8A7A6A"/>
                 </a:solidFill>
@@ -47686,7 +47686,7 @@
               </a:lnSpc>
             </a:pPr>
             <a:r>
-              <a:rPr sz="1200" b="1" i="0">
+              <a:rPr sz="1100" b="1" i="0">
                 <a:solidFill>
                   <a:srgbClr val="C9A96E"/>
                 </a:solidFill>
@@ -47725,7 +47725,7 @@
               </a:lnSpc>
             </a:pPr>
             <a:r>
-              <a:rPr sz="2640" b="1" i="0">
+              <a:rPr sz="2540" b="1" i="0">
                 <a:solidFill>
                   <a:srgbClr val="4A403A"/>
                 </a:solidFill>
@@ -47764,7 +47764,7 @@
               </a:lnSpc>
             </a:pPr>
             <a:r>
-              <a:rPr sz="1080" b="0" i="0">
+              <a:rPr sz="979" b="0" i="0">
                 <a:solidFill>
                   <a:srgbClr val="8A7A6A"/>
                 </a:solidFill>
@@ -47987,7 +47987,7 @@
               </a:lnSpc>
             </a:pPr>
             <a:r>
-              <a:rPr sz="1800" b="1" i="0">
+              <a:rPr sz="1700" b="1" i="0">
                 <a:solidFill>
                   <a:srgbClr val="A95C66"/>
                 </a:solidFill>
@@ -48026,7 +48026,7 @@
               </a:lnSpc>
             </a:pPr>
             <a:r>
-              <a:rPr sz="1260" b="0" i="0">
+              <a:rPr sz="1160" b="0" i="0">
                 <a:solidFill>
                   <a:srgbClr val="8A7A6A"/>
                 </a:solidFill>
@@ -48065,7 +48065,7 @@
               </a:lnSpc>
             </a:pPr>
             <a:r>
-              <a:rPr sz="1380" b="0" i="0">
+              <a:rPr sz="1280" b="0" i="0">
                 <a:solidFill>
                   <a:srgbClr val="4A403A"/>
                 </a:solidFill>
@@ -48104,7 +48104,7 @@
               </a:lnSpc>
             </a:pPr>
             <a:r>
-              <a:rPr sz="1320" b="1" i="0">
+              <a:rPr sz="1220" b="1" i="0">
                 <a:solidFill>
                   <a:srgbClr val="C9A96E"/>
                 </a:solidFill>
@@ -48327,7 +48327,7 @@
               </a:lnSpc>
             </a:pPr>
             <a:r>
-              <a:rPr sz="1800" b="1" i="0">
+              <a:rPr sz="1700" b="1" i="0">
                 <a:solidFill>
                   <a:srgbClr val="A95C66"/>
                 </a:solidFill>
@@ -48366,7 +48366,7 @@
               </a:lnSpc>
             </a:pPr>
             <a:r>
-              <a:rPr sz="1260" b="0" i="0">
+              <a:rPr sz="1160" b="0" i="0">
                 <a:solidFill>
                   <a:srgbClr val="8A7A6A"/>
                 </a:solidFill>
@@ -48405,7 +48405,7 @@
               </a:lnSpc>
             </a:pPr>
             <a:r>
-              <a:rPr sz="1380" b="0" i="0">
+              <a:rPr sz="1280" b="0" i="0">
                 <a:solidFill>
                   <a:srgbClr val="4A403A"/>
                 </a:solidFill>
@@ -48444,7 +48444,7 @@
               </a:lnSpc>
             </a:pPr>
             <a:r>
-              <a:rPr sz="1320" b="1" i="0">
+              <a:rPr sz="1220" b="1" i="0">
                 <a:solidFill>
                   <a:srgbClr val="C9A96E"/>
                 </a:solidFill>
@@ -48621,7 +48621,7 @@
               </a:lnSpc>
             </a:pPr>
             <a:r>
-              <a:rPr sz="1800" b="1" i="0">
+              <a:rPr sz="1700" b="1" i="0">
                 <a:solidFill>
                   <a:srgbClr val="A95C66"/>
                 </a:solidFill>
@@ -48660,7 +48660,7 @@
               </a:lnSpc>
             </a:pPr>
             <a:r>
-              <a:rPr sz="1260" b="0" i="0">
+              <a:rPr sz="1160" b="0" i="0">
                 <a:solidFill>
                   <a:srgbClr val="8A7A6A"/>
                 </a:solidFill>
@@ -48699,7 +48699,7 @@
               </a:lnSpc>
             </a:pPr>
             <a:r>
-              <a:rPr sz="1380" b="0" i="0">
+              <a:rPr sz="1280" b="0" i="0">
                 <a:solidFill>
                   <a:srgbClr val="4A403A"/>
                 </a:solidFill>
@@ -48738,7 +48738,7 @@
               </a:lnSpc>
             </a:pPr>
             <a:r>
-              <a:rPr sz="1320" b="1" i="0">
+              <a:rPr sz="1220" b="1" i="0">
                 <a:solidFill>
                   <a:srgbClr val="C9A96E"/>
                 </a:solidFill>
@@ -48961,7 +48961,7 @@
               </a:lnSpc>
             </a:pPr>
             <a:r>
-              <a:rPr sz="1800" b="1" i="0">
+              <a:rPr sz="1700" b="1" i="0">
                 <a:solidFill>
                   <a:srgbClr val="A95C66"/>
                 </a:solidFill>
@@ -49000,7 +49000,7 @@
               </a:lnSpc>
             </a:pPr>
             <a:r>
-              <a:rPr sz="1260" b="0" i="0">
+              <a:rPr sz="1160" b="0" i="0">
                 <a:solidFill>
                   <a:srgbClr val="8A7A6A"/>
                 </a:solidFill>
@@ -49039,7 +49039,7 @@
               </a:lnSpc>
             </a:pPr>
             <a:r>
-              <a:rPr sz="1380" b="0" i="0">
+              <a:rPr sz="1280" b="0" i="0">
                 <a:solidFill>
                   <a:srgbClr val="4A403A"/>
                 </a:solidFill>
@@ -49078,7 +49078,7 @@
               </a:lnSpc>
             </a:pPr>
             <a:r>
-              <a:rPr sz="1320" b="1" i="0">
+              <a:rPr sz="1220" b="1" i="0">
                 <a:solidFill>
                   <a:srgbClr val="C9A96E"/>
                 </a:solidFill>
@@ -49301,7 +49301,7 @@
               </a:lnSpc>
             </a:pPr>
             <a:r>
-              <a:rPr sz="1800" b="1" i="0">
+              <a:rPr sz="1700" b="1" i="0">
                 <a:solidFill>
                   <a:srgbClr val="A95C66"/>
                 </a:solidFill>
@@ -49340,7 +49340,7 @@
               </a:lnSpc>
             </a:pPr>
             <a:r>
-              <a:rPr sz="1260" b="0" i="0">
+              <a:rPr sz="1160" b="0" i="0">
                 <a:solidFill>
                   <a:srgbClr val="8A7A6A"/>
                 </a:solidFill>
@@ -49379,7 +49379,7 @@
               </a:lnSpc>
             </a:pPr>
             <a:r>
-              <a:rPr sz="1380" b="0" i="0">
+              <a:rPr sz="1280" b="0" i="0">
                 <a:solidFill>
                   <a:srgbClr val="4A403A"/>
                 </a:solidFill>
@@ -49418,7 +49418,7 @@
               </a:lnSpc>
             </a:pPr>
             <a:r>
-              <a:rPr sz="1320" b="1" i="0">
+              <a:rPr sz="1220" b="1" i="0">
                 <a:solidFill>
                   <a:srgbClr val="C9A96E"/>
                 </a:solidFill>
@@ -49600,7 +49600,7 @@
               </a:lnSpc>
             </a:pPr>
             <a:r>
-              <a:rPr sz="1200" b="1" i="0">
+              <a:rPr sz="1100" b="1" i="0">
                 <a:solidFill>
                   <a:srgbClr val="C9A96E"/>
                 </a:solidFill>
@@ -49639,7 +49639,7 @@
               </a:lnSpc>
             </a:pPr>
             <a:r>
-              <a:rPr sz="2640" b="1" i="0">
+              <a:rPr sz="2540" b="1" i="0">
                 <a:solidFill>
                   <a:srgbClr val="4A403A"/>
                 </a:solidFill>
@@ -49678,7 +49678,7 @@
               </a:lnSpc>
             </a:pPr>
             <a:r>
-              <a:rPr sz="1080" b="0" i="0">
+              <a:rPr sz="979" b="0" i="0">
                 <a:solidFill>
                   <a:srgbClr val="8A7A6A"/>
                 </a:solidFill>
@@ -49807,7 +49807,7 @@
               </a:lnSpc>
             </a:pPr>
             <a:r>
-              <a:rPr sz="1800" b="1" i="0">
+              <a:rPr sz="1700" b="1" i="0">
                 <a:solidFill>
                   <a:srgbClr val="A95C66"/>
                 </a:solidFill>
@@ -49846,7 +49846,7 @@
               </a:lnSpc>
             </a:pPr>
             <a:r>
-              <a:rPr sz="1560" b="0" i="0">
+              <a:rPr sz="1460" b="0" i="0">
                 <a:solidFill>
                   <a:srgbClr val="8A7A6A"/>
                 </a:solidFill>
@@ -49975,7 +49975,7 @@
               </a:lnSpc>
             </a:pPr>
             <a:r>
-              <a:rPr sz="1800" b="1" i="0">
+              <a:rPr sz="1700" b="1" i="0">
                 <a:solidFill>
                   <a:srgbClr val="A95C66"/>
                 </a:solidFill>
@@ -50014,7 +50014,7 @@
               </a:lnSpc>
             </a:pPr>
             <a:r>
-              <a:rPr sz="1560" b="0" i="0">
+              <a:rPr sz="1460" b="0" i="0">
                 <a:solidFill>
                   <a:srgbClr val="8A7A6A"/>
                 </a:solidFill>
@@ -50143,7 +50143,7 @@
               </a:lnSpc>
             </a:pPr>
             <a:r>
-              <a:rPr sz="1800" b="1" i="0">
+              <a:rPr sz="1700" b="1" i="0">
                 <a:solidFill>
                   <a:srgbClr val="A95C66"/>
                 </a:solidFill>
@@ -50182,7 +50182,7 @@
               </a:lnSpc>
             </a:pPr>
             <a:r>
-              <a:rPr sz="1560" b="0" i="0">
+              <a:rPr sz="1460" b="0" i="0">
                 <a:solidFill>
                   <a:srgbClr val="8A7A6A"/>
                 </a:solidFill>
@@ -50311,7 +50311,7 @@
               </a:lnSpc>
             </a:pPr>
             <a:r>
-              <a:rPr sz="1800" b="1" i="0">
+              <a:rPr sz="1700" b="1" i="0">
                 <a:solidFill>
                   <a:srgbClr val="A95C66"/>
                 </a:solidFill>
@@ -50350,7 +50350,7 @@
               </a:lnSpc>
             </a:pPr>
             <a:r>
-              <a:rPr sz="1560" b="0" i="0">
+              <a:rPr sz="1460" b="0" i="0">
                 <a:solidFill>
                   <a:srgbClr val="8A7A6A"/>
                 </a:solidFill>
@@ -50479,7 +50479,7 @@
               </a:lnSpc>
             </a:pPr>
             <a:r>
-              <a:rPr sz="1800" b="1" i="0">
+              <a:rPr sz="1700" b="1" i="0">
                 <a:solidFill>
                   <a:srgbClr val="A95C66"/>
                 </a:solidFill>
@@ -50518,7 +50518,7 @@
               </a:lnSpc>
             </a:pPr>
             <a:r>
-              <a:rPr sz="1560" b="0" i="0">
+              <a:rPr sz="1460" b="0" i="0">
                 <a:solidFill>
                   <a:srgbClr val="8A7A6A"/>
                 </a:solidFill>
@@ -50647,7 +50647,7 @@
               </a:lnSpc>
             </a:pPr>
             <a:r>
-              <a:rPr sz="1800" b="1" i="0">
+              <a:rPr sz="1700" b="1" i="0">
                 <a:solidFill>
                   <a:srgbClr val="A95C66"/>
                 </a:solidFill>
@@ -50686,7 +50686,7 @@
               </a:lnSpc>
             </a:pPr>
             <a:r>
-              <a:rPr sz="1560" b="0" i="0">
+              <a:rPr sz="1460" b="0" i="0">
                 <a:solidFill>
                   <a:srgbClr val="8A7A6A"/>
                 </a:solidFill>
@@ -50868,7 +50868,7 @@
               </a:lnSpc>
             </a:pPr>
             <a:r>
-              <a:rPr sz="1200" b="1" i="0">
+              <a:rPr sz="1100" b="1" i="0">
                 <a:solidFill>
                   <a:srgbClr val="C9A96E"/>
                 </a:solidFill>
@@ -50907,7 +50907,7 @@
               </a:lnSpc>
             </a:pPr>
             <a:r>
-              <a:rPr sz="2640" b="1" i="0">
+              <a:rPr sz="2540" b="1" i="0">
                 <a:solidFill>
                   <a:srgbClr val="4A403A"/>
                 </a:solidFill>
@@ -50946,7 +50946,7 @@
               </a:lnSpc>
             </a:pPr>
             <a:r>
-              <a:rPr sz="1080" b="0" i="0">
+              <a:rPr sz="979" b="0" i="0">
                 <a:solidFill>
                   <a:srgbClr val="8A7A6A"/>
                 </a:solidFill>
@@ -50985,7 +50985,7 @@
               </a:lnSpc>
             </a:pPr>
             <a:r>
-              <a:rPr sz="1439" b="0" i="0">
+              <a:rPr sz="1339" b="0" i="0">
                 <a:solidFill>
                   <a:srgbClr val="8A7A6A"/>
                 </a:solidFill>
@@ -51158,7 +51158,7 @@
               </a:lnSpc>
             </a:pPr>
             <a:r>
-              <a:rPr sz="1920" b="1" i="0">
+              <a:rPr sz="1820" b="1" i="0">
                 <a:solidFill>
                   <a:srgbClr val="FFFFFF"/>
                 </a:solidFill>
@@ -51197,7 +51197,7 @@
               </a:lnSpc>
             </a:pPr>
             <a:r>
-              <a:rPr sz="1320" b="1" i="0">
+              <a:rPr sz="1220" b="1" i="0">
                 <a:solidFill>
                   <a:srgbClr val="A95C66"/>
                 </a:solidFill>
@@ -51236,7 +51236,7 @@
               </a:lnSpc>
             </a:pPr>
             <a:r>
-              <a:rPr sz="1260" b="0" i="0">
+              <a:rPr sz="1160" b="0" i="0">
                 <a:solidFill>
                   <a:srgbClr val="8A7A6A"/>
                 </a:solidFill>
@@ -51409,7 +51409,7 @@
               </a:lnSpc>
             </a:pPr>
             <a:r>
-              <a:rPr sz="1920" b="1" i="0">
+              <a:rPr sz="1820" b="1" i="0">
                 <a:solidFill>
                   <a:srgbClr val="FFFFFF"/>
                 </a:solidFill>
@@ -51448,7 +51448,7 @@
               </a:lnSpc>
             </a:pPr>
             <a:r>
-              <a:rPr sz="1320" b="1" i="0">
+              <a:rPr sz="1220" b="1" i="0">
                 <a:solidFill>
                   <a:srgbClr val="A95C66"/>
                 </a:solidFill>
@@ -51487,7 +51487,7 @@
               </a:lnSpc>
             </a:pPr>
             <a:r>
-              <a:rPr sz="1260" b="0" i="0">
+              <a:rPr sz="1160" b="0" i="0">
                 <a:solidFill>
                   <a:srgbClr val="8A7A6A"/>
                 </a:solidFill>
@@ -51660,7 +51660,7 @@
               </a:lnSpc>
             </a:pPr>
             <a:r>
-              <a:rPr sz="1920" b="1" i="0">
+              <a:rPr sz="1820" b="1" i="0">
                 <a:solidFill>
                   <a:srgbClr val="FFFFFF"/>
                 </a:solidFill>
@@ -51699,7 +51699,7 @@
               </a:lnSpc>
             </a:pPr>
             <a:r>
-              <a:rPr sz="1320" b="1" i="0">
+              <a:rPr sz="1220" b="1" i="0">
                 <a:solidFill>
                   <a:srgbClr val="A95C66"/>
                 </a:solidFill>
@@ -51738,7 +51738,7 @@
               </a:lnSpc>
             </a:pPr>
             <a:r>
-              <a:rPr sz="1260" b="0" i="0">
+              <a:rPr sz="1160" b="0" i="0">
                 <a:solidFill>
                   <a:srgbClr val="8A7A6A"/>
                 </a:solidFill>
@@ -51911,7 +51911,7 @@
               </a:lnSpc>
             </a:pPr>
             <a:r>
-              <a:rPr sz="1920" b="1" i="0">
+              <a:rPr sz="1820" b="1" i="0">
                 <a:solidFill>
                   <a:srgbClr val="FFFFFF"/>
                 </a:solidFill>
@@ -51950,7 +51950,7 @@
               </a:lnSpc>
             </a:pPr>
             <a:r>
-              <a:rPr sz="1320" b="1" i="0">
+              <a:rPr sz="1220" b="1" i="0">
                 <a:solidFill>
                   <a:srgbClr val="A95C66"/>
                 </a:solidFill>
@@ -51989,7 +51989,7 @@
               </a:lnSpc>
             </a:pPr>
             <a:r>
-              <a:rPr sz="1260" b="0" i="0">
+              <a:rPr sz="1160" b="0" i="0">
                 <a:solidFill>
                   <a:srgbClr val="8A7A6A"/>
                 </a:solidFill>
@@ -52162,7 +52162,7 @@
               </a:lnSpc>
             </a:pPr>
             <a:r>
-              <a:rPr sz="1920" b="1" i="0">
+              <a:rPr sz="1820" b="1" i="0">
                 <a:solidFill>
                   <a:srgbClr val="FFFFFF"/>
                 </a:solidFill>
@@ -52201,7 +52201,7 @@
               </a:lnSpc>
             </a:pPr>
             <a:r>
-              <a:rPr sz="1320" b="1" i="0">
+              <a:rPr sz="1220" b="1" i="0">
                 <a:solidFill>
                   <a:srgbClr val="A95C66"/>
                 </a:solidFill>
@@ -52240,7 +52240,7 @@
               </a:lnSpc>
             </a:pPr>
             <a:r>
-              <a:rPr sz="1260" b="0" i="0">
+              <a:rPr sz="1160" b="0" i="0">
                 <a:solidFill>
                   <a:srgbClr val="8A7A6A"/>
                 </a:solidFill>
@@ -52413,7 +52413,7 @@
               </a:lnSpc>
             </a:pPr>
             <a:r>
-              <a:rPr sz="1920" b="1" i="0">
+              <a:rPr sz="1820" b="1" i="0">
                 <a:solidFill>
                   <a:srgbClr val="FFFFFF"/>
                 </a:solidFill>
@@ -52452,7 +52452,7 @@
               </a:lnSpc>
             </a:pPr>
             <a:r>
-              <a:rPr sz="1320" b="1" i="0">
+              <a:rPr sz="1220" b="1" i="0">
                 <a:solidFill>
                   <a:srgbClr val="A95C66"/>
                 </a:solidFill>
@@ -52491,7 +52491,7 @@
               </a:lnSpc>
             </a:pPr>
             <a:r>
-              <a:rPr sz="1260" b="0" i="0">
+              <a:rPr sz="1160" b="0" i="0">
                 <a:solidFill>
                   <a:srgbClr val="8A7A6A"/>
                 </a:solidFill>
@@ -52664,7 +52664,7 @@
               </a:lnSpc>
             </a:pPr>
             <a:r>
-              <a:rPr sz="1920" b="1" i="0">
+              <a:rPr sz="1820" b="1" i="0">
                 <a:solidFill>
                   <a:srgbClr val="FFFFFF"/>
                 </a:solidFill>
@@ -52703,7 +52703,7 @@
               </a:lnSpc>
             </a:pPr>
             <a:r>
-              <a:rPr sz="1320" b="1" i="0">
+              <a:rPr sz="1220" b="1" i="0">
                 <a:solidFill>
                   <a:srgbClr val="A95C66"/>
                 </a:solidFill>
@@ -52742,7 +52742,7 @@
               </a:lnSpc>
             </a:pPr>
             <a:r>
-              <a:rPr sz="1260" b="0" i="0">
+              <a:rPr sz="1160" b="0" i="0">
                 <a:solidFill>
                   <a:srgbClr val="8A7A6A"/>
                 </a:solidFill>
@@ -52915,7 +52915,7 @@
               </a:lnSpc>
             </a:pPr>
             <a:r>
-              <a:rPr sz="1920" b="1" i="0">
+              <a:rPr sz="1820" b="1" i="0">
                 <a:solidFill>
                   <a:srgbClr val="FFFFFF"/>
                 </a:solidFill>
@@ -52954,7 +52954,7 @@
               </a:lnSpc>
             </a:pPr>
             <a:r>
-              <a:rPr sz="1320" b="1" i="0">
+              <a:rPr sz="1220" b="1" i="0">
                 <a:solidFill>
                   <a:srgbClr val="A95C66"/>
                 </a:solidFill>
@@ -52993,7 +52993,7 @@
               </a:lnSpc>
             </a:pPr>
             <a:r>
-              <a:rPr sz="1260" b="0" i="0">
+              <a:rPr sz="1160" b="0" i="0">
                 <a:solidFill>
                   <a:srgbClr val="8A7A6A"/>
                 </a:solidFill>
@@ -53175,7 +53175,7 @@
               </a:lnSpc>
             </a:pPr>
             <a:r>
-              <a:rPr sz="1200" b="1" i="0">
+              <a:rPr sz="1100" b="1" i="0">
                 <a:solidFill>
                   <a:srgbClr val="C9A96E"/>
                 </a:solidFill>
@@ -53214,7 +53214,7 @@
               </a:lnSpc>
             </a:pPr>
             <a:r>
-              <a:rPr sz="2640" b="1" i="0">
+              <a:rPr sz="2540" b="1" i="0">
                 <a:solidFill>
                   <a:srgbClr val="4A403A"/>
                 </a:solidFill>
@@ -53253,7 +53253,7 @@
               </a:lnSpc>
             </a:pPr>
             <a:r>
-              <a:rPr sz="1080" b="0" i="0">
+              <a:rPr sz="979" b="0" i="0">
                 <a:solidFill>
                   <a:srgbClr val="8A7A6A"/>
                 </a:solidFill>
@@ -53426,7 +53426,7 @@
               </a:lnSpc>
             </a:pPr>
             <a:r>
-              <a:rPr sz="2400" b="1" i="0">
+              <a:rPr sz="2300" b="1" i="0">
                 <a:solidFill>
                   <a:srgbClr val="FFFFFF"/>
                 </a:solidFill>
@@ -53465,7 +53465,7 @@
               </a:lnSpc>
             </a:pPr>
             <a:r>
-              <a:rPr sz="1320" b="1" i="0">
+              <a:rPr sz="1220" b="1" i="0">
                 <a:solidFill>
                   <a:srgbClr val="E8434B"/>
                 </a:solidFill>
@@ -53548,7 +53548,7 @@
               </a:lnSpc>
             </a:pPr>
             <a:r>
-              <a:rPr sz="1320" b="0" i="0">
+              <a:rPr sz="1220" b="0" i="0">
                 <a:solidFill>
                   <a:srgbClr val="8A7A6A"/>
                 </a:solidFill>
@@ -53564,7 +53564,7 @@
               </a:lnSpc>
             </a:pPr>
             <a:r>
-              <a:rPr sz="1320" b="0" i="0">
+              <a:rPr sz="1220" b="0" i="0">
                 <a:solidFill>
                   <a:srgbClr val="8A7A6A"/>
                 </a:solidFill>
@@ -53737,7 +53737,7 @@
               </a:lnSpc>
             </a:pPr>
             <a:r>
-              <a:rPr sz="2400" b="1" i="0">
+              <a:rPr sz="2300" b="1" i="0">
                 <a:solidFill>
                   <a:srgbClr val="FFFFFF"/>
                 </a:solidFill>
@@ -53776,7 +53776,7 @@
               </a:lnSpc>
             </a:pPr>
             <a:r>
-              <a:rPr sz="1320" b="1" i="0">
+              <a:rPr sz="1220" b="1" i="0">
                 <a:solidFill>
                   <a:srgbClr val="E89A3A"/>
                 </a:solidFill>
@@ -53859,7 +53859,7 @@
               </a:lnSpc>
             </a:pPr>
             <a:r>
-              <a:rPr sz="1320" b="0" i="0">
+              <a:rPr sz="1220" b="0" i="0">
                 <a:solidFill>
                   <a:srgbClr val="8A7A6A"/>
                 </a:solidFill>
@@ -53875,7 +53875,7 @@
               </a:lnSpc>
             </a:pPr>
             <a:r>
-              <a:rPr sz="1320" b="0" i="0">
+              <a:rPr sz="1220" b="0" i="0">
                 <a:solidFill>
                   <a:srgbClr val="8A7A6A"/>
                 </a:solidFill>
@@ -54048,7 +54048,7 @@
               </a:lnSpc>
             </a:pPr>
             <a:r>
-              <a:rPr sz="2400" b="1" i="0">
+              <a:rPr sz="2300" b="1" i="0">
                 <a:solidFill>
                   <a:srgbClr val="FFFFFF"/>
                 </a:solidFill>
@@ -54087,7 +54087,7 @@
               </a:lnSpc>
             </a:pPr>
             <a:r>
-              <a:rPr sz="1320" b="1" i="0">
+              <a:rPr sz="1220" b="1" i="0">
                 <a:solidFill>
                   <a:srgbClr val="E6DA55"/>
                 </a:solidFill>
@@ -54170,7 +54170,7 @@
               </a:lnSpc>
             </a:pPr>
             <a:r>
-              <a:rPr sz="1320" b="0" i="0">
+              <a:rPr sz="1220" b="0" i="0">
                 <a:solidFill>
                   <a:srgbClr val="8A7A6A"/>
                 </a:solidFill>
@@ -54186,7 +54186,7 @@
               </a:lnSpc>
             </a:pPr>
             <a:r>
-              <a:rPr sz="1320" b="0" i="0">
+              <a:rPr sz="1220" b="0" i="0">
                 <a:solidFill>
                   <a:srgbClr val="8A7A6A"/>
                 </a:solidFill>
@@ -54359,7 +54359,7 @@
               </a:lnSpc>
             </a:pPr>
             <a:r>
-              <a:rPr sz="2400" b="1" i="0">
+              <a:rPr sz="2300" b="1" i="0">
                 <a:solidFill>
                   <a:srgbClr val="FFFFFF"/>
                 </a:solidFill>
@@ -54398,7 +54398,7 @@
               </a:lnSpc>
             </a:pPr>
             <a:r>
-              <a:rPr sz="1320" b="1" i="0">
+              <a:rPr sz="1220" b="1" i="0">
                 <a:solidFill>
                   <a:srgbClr val="5AA85A"/>
                 </a:solidFill>
@@ -54481,7 +54481,7 @@
               </a:lnSpc>
             </a:pPr>
             <a:r>
-              <a:rPr sz="1320" b="0" i="0">
+              <a:rPr sz="1220" b="0" i="0">
                 <a:solidFill>
                   <a:srgbClr val="8A7A6A"/>
                 </a:solidFill>
@@ -54497,7 +54497,7 @@
               </a:lnSpc>
             </a:pPr>
             <a:r>
-              <a:rPr sz="1320" b="0" i="0">
+              <a:rPr sz="1220" b="0" i="0">
                 <a:solidFill>
                   <a:srgbClr val="8A7A6A"/>
                 </a:solidFill>
@@ -54670,7 +54670,7 @@
               </a:lnSpc>
             </a:pPr>
             <a:r>
-              <a:rPr sz="2400" b="1" i="0">
+              <a:rPr sz="2300" b="1" i="0">
                 <a:solidFill>
                   <a:srgbClr val="FFFFFF"/>
                 </a:solidFill>
@@ -54709,7 +54709,7 @@
               </a:lnSpc>
             </a:pPr>
             <a:r>
-              <a:rPr sz="1320" b="1" i="0">
+              <a:rPr sz="1220" b="1" i="0">
                 <a:solidFill>
                   <a:srgbClr val="4A7AC8"/>
                 </a:solidFill>
@@ -54792,7 +54792,7 @@
               </a:lnSpc>
             </a:pPr>
             <a:r>
-              <a:rPr sz="1320" b="0" i="0">
+              <a:rPr sz="1220" b="0" i="0">
                 <a:solidFill>
                   <a:srgbClr val="8A7A6A"/>
                 </a:solidFill>
@@ -54808,7 +54808,7 @@
               </a:lnSpc>
             </a:pPr>
             <a:r>
-              <a:rPr sz="1320" b="0" i="0">
+              <a:rPr sz="1220" b="0" i="0">
                 <a:solidFill>
                   <a:srgbClr val="8A7A6A"/>
                 </a:solidFill>
@@ -54981,7 +54981,7 @@
               </a:lnSpc>
             </a:pPr>
             <a:r>
-              <a:rPr sz="2400" b="1" i="0">
+              <a:rPr sz="2300" b="1" i="0">
                 <a:solidFill>
                   <a:srgbClr val="FFFFFF"/>
                 </a:solidFill>
@@ -55020,7 +55020,7 @@
               </a:lnSpc>
             </a:pPr>
             <a:r>
-              <a:rPr sz="1320" b="1" i="0">
+              <a:rPr sz="1220" b="1" i="0">
                 <a:solidFill>
                   <a:srgbClr val="9A5AB8"/>
                 </a:solidFill>
@@ -55103,7 +55103,7 @@
               </a:lnSpc>
             </a:pPr>
             <a:r>
-              <a:rPr sz="1320" b="0" i="0">
+              <a:rPr sz="1220" b="0" i="0">
                 <a:solidFill>
                   <a:srgbClr val="8A7A6A"/>
                 </a:solidFill>
@@ -55119,7 +55119,7 @@
               </a:lnSpc>
             </a:pPr>
             <a:r>
-              <a:rPr sz="1320" b="0" i="0">
+              <a:rPr sz="1220" b="0" i="0">
                 <a:solidFill>
                   <a:srgbClr val="8A7A6A"/>
                 </a:solidFill>
@@ -55292,7 +55292,7 @@
               </a:lnSpc>
             </a:pPr>
             <a:r>
-              <a:rPr sz="2400" b="1" i="0">
+              <a:rPr sz="2300" b="1" i="0">
                 <a:solidFill>
                   <a:srgbClr val="FFFFFF"/>
                 </a:solidFill>
@@ -55331,7 +55331,7 @@
               </a:lnSpc>
             </a:pPr>
             <a:r>
-              <a:rPr sz="1320" b="1" i="0">
+              <a:rPr sz="1220" b="1" i="0">
                 <a:solidFill>
                   <a:srgbClr val="E6A9C0"/>
                 </a:solidFill>
@@ -55414,7 +55414,7 @@
               </a:lnSpc>
             </a:pPr>
             <a:r>
-              <a:rPr sz="1320" b="0" i="0">
+              <a:rPr sz="1220" b="0" i="0">
                 <a:solidFill>
                   <a:srgbClr val="8A7A6A"/>
                 </a:solidFill>
@@ -55430,7 +55430,7 @@
               </a:lnSpc>
             </a:pPr>
             <a:r>
-              <a:rPr sz="1320" b="0" i="0">
+              <a:rPr sz="1220" b="0" i="0">
                 <a:solidFill>
                   <a:srgbClr val="8A7A6A"/>
                 </a:solidFill>
@@ -55603,7 +55603,7 @@
               </a:lnSpc>
             </a:pPr>
             <a:r>
-              <a:rPr sz="2400" b="1" i="0">
+              <a:rPr sz="2300" b="1" i="0">
                 <a:solidFill>
                   <a:srgbClr val="FFFFFF"/>
                 </a:solidFill>
@@ -55642,7 +55642,7 @@
               </a:lnSpc>
             </a:pPr>
             <a:r>
-              <a:rPr sz="1320" b="1" i="0">
+              <a:rPr sz="1220" b="1" i="0">
                 <a:solidFill>
                   <a:srgbClr val="CCCCC0"/>
                 </a:solidFill>
@@ -55725,7 +55725,7 @@
               </a:lnSpc>
             </a:pPr>
             <a:r>
-              <a:rPr sz="1320" b="0" i="0">
+              <a:rPr sz="1220" b="0" i="0">
                 <a:solidFill>
                   <a:srgbClr val="8A7A6A"/>
                 </a:solidFill>
@@ -55741,7 +55741,7 @@
               </a:lnSpc>
             </a:pPr>
             <a:r>
-              <a:rPr sz="1320" b="0" i="0">
+              <a:rPr sz="1220" b="0" i="0">
                 <a:solidFill>
                   <a:srgbClr val="8A7A6A"/>
                 </a:solidFill>

--- a/mandala_l1_handout.pptx
+++ b/mandala_l1_handout.pptx
@@ -23659,7 +23659,7 @@
         </p:nvSpPr>
         <p:spPr>
           <a:xfrm>
-            <a:off x="502920" y="1143000"/>
+            <a:off x="502920" y="1691640"/>
             <a:ext cx="3177540" cy="1444752"/>
           </a:xfrm>
           <a:prstGeom prst="roundRect">
@@ -23705,7 +23705,7 @@
         </p:nvSpPr>
         <p:spPr>
           <a:xfrm>
-            <a:off x="502920" y="1143000"/>
+            <a:off x="502920" y="1691640"/>
             <a:ext cx="3177540" cy="384048"/>
           </a:xfrm>
           <a:prstGeom prst="roundRect">
@@ -23749,7 +23749,7 @@
         </p:nvSpPr>
         <p:spPr>
           <a:xfrm>
-            <a:off x="640080" y="1179576"/>
+            <a:off x="640080" y="1728216"/>
             <a:ext cx="3040380" cy="347472"/>
           </a:xfrm>
           <a:prstGeom prst="rect">
@@ -23793,7 +23793,7 @@
         </p:nvSpPr>
         <p:spPr>
           <a:xfrm>
-            <a:off x="649224" y="1207008"/>
+            <a:off x="649224" y="1755648"/>
             <a:ext cx="457200" cy="274320"/>
           </a:xfrm>
           <a:prstGeom prst="rect">
@@ -23832,7 +23832,7 @@
         </p:nvSpPr>
         <p:spPr>
           <a:xfrm>
-            <a:off x="1051560" y="1197864"/>
+            <a:off x="1051560" y="1746504"/>
             <a:ext cx="2491740" cy="310896"/>
           </a:xfrm>
           <a:prstGeom prst="rect">
@@ -23871,7 +23871,7 @@
         </p:nvSpPr>
         <p:spPr>
           <a:xfrm>
-            <a:off x="704088" y="1655064"/>
+            <a:off x="704088" y="2203704"/>
             <a:ext cx="2830068" cy="841248"/>
           </a:xfrm>
           <a:prstGeom prst="rect">
@@ -23910,7 +23910,7 @@
         </p:nvSpPr>
         <p:spPr>
           <a:xfrm>
-            <a:off x="3881628" y="1143000"/>
+            <a:off x="3881628" y="1691640"/>
             <a:ext cx="3177540" cy="1444752"/>
           </a:xfrm>
           <a:prstGeom prst="roundRect">
@@ -23956,7 +23956,7 @@
         </p:nvSpPr>
         <p:spPr>
           <a:xfrm>
-            <a:off x="3881628" y="1143000"/>
+            <a:off x="3881628" y="1691640"/>
             <a:ext cx="3177540" cy="384048"/>
           </a:xfrm>
           <a:prstGeom prst="roundRect">
@@ -24000,7 +24000,7 @@
         </p:nvSpPr>
         <p:spPr>
           <a:xfrm>
-            <a:off x="4018788" y="1179576"/>
+            <a:off x="4018788" y="1728216"/>
             <a:ext cx="3040380" cy="347472"/>
           </a:xfrm>
           <a:prstGeom prst="rect">
@@ -24044,7 +24044,7 @@
         </p:nvSpPr>
         <p:spPr>
           <a:xfrm>
-            <a:off x="4027932" y="1207008"/>
+            <a:off x="4027932" y="1755648"/>
             <a:ext cx="457200" cy="274320"/>
           </a:xfrm>
           <a:prstGeom prst="rect">
@@ -24083,7 +24083,7 @@
         </p:nvSpPr>
         <p:spPr>
           <a:xfrm>
-            <a:off x="4430268" y="1197864"/>
+            <a:off x="4430268" y="1746504"/>
             <a:ext cx="2491740" cy="310896"/>
           </a:xfrm>
           <a:prstGeom prst="rect">
@@ -24122,7 +24122,7 @@
         </p:nvSpPr>
         <p:spPr>
           <a:xfrm>
-            <a:off x="4082796" y="1655064"/>
+            <a:off x="4082796" y="2203704"/>
             <a:ext cx="2830068" cy="841248"/>
           </a:xfrm>
           <a:prstGeom prst="rect">
@@ -24161,7 +24161,7 @@
         </p:nvSpPr>
         <p:spPr>
           <a:xfrm>
-            <a:off x="502920" y="2788920"/>
+            <a:off x="502920" y="3849624"/>
             <a:ext cx="3177540" cy="1444752"/>
           </a:xfrm>
           <a:prstGeom prst="roundRect">
@@ -24207,7 +24207,7 @@
         </p:nvSpPr>
         <p:spPr>
           <a:xfrm>
-            <a:off x="502920" y="2788920"/>
+            <a:off x="502920" y="3849624"/>
             <a:ext cx="3177540" cy="384048"/>
           </a:xfrm>
           <a:prstGeom prst="roundRect">
@@ -24251,7 +24251,7 @@
         </p:nvSpPr>
         <p:spPr>
           <a:xfrm>
-            <a:off x="640080" y="2825496"/>
+            <a:off x="640080" y="3886200"/>
             <a:ext cx="3040380" cy="347472"/>
           </a:xfrm>
           <a:prstGeom prst="rect">
@@ -24295,7 +24295,7 @@
         </p:nvSpPr>
         <p:spPr>
           <a:xfrm>
-            <a:off x="649224" y="2852927"/>
+            <a:off x="649224" y="3913632"/>
             <a:ext cx="457200" cy="274320"/>
           </a:xfrm>
           <a:prstGeom prst="rect">
@@ -24334,7 +24334,7 @@
         </p:nvSpPr>
         <p:spPr>
           <a:xfrm>
-            <a:off x="1051560" y="2843784"/>
+            <a:off x="1051560" y="3904488"/>
             <a:ext cx="2491740" cy="310896"/>
           </a:xfrm>
           <a:prstGeom prst="rect">
@@ -24373,7 +24373,7 @@
         </p:nvSpPr>
         <p:spPr>
           <a:xfrm>
-            <a:off x="704088" y="3300984"/>
+            <a:off x="704088" y="4361688"/>
             <a:ext cx="2830068" cy="841248"/>
           </a:xfrm>
           <a:prstGeom prst="rect">
@@ -24412,7 +24412,7 @@
         </p:nvSpPr>
         <p:spPr>
           <a:xfrm>
-            <a:off x="3881628" y="2788920"/>
+            <a:off x="3881628" y="3849624"/>
             <a:ext cx="3177540" cy="1444752"/>
           </a:xfrm>
           <a:prstGeom prst="roundRect">
@@ -24458,7 +24458,7 @@
         </p:nvSpPr>
         <p:spPr>
           <a:xfrm>
-            <a:off x="3881628" y="2788920"/>
+            <a:off x="3881628" y="3849624"/>
             <a:ext cx="3177540" cy="384048"/>
           </a:xfrm>
           <a:prstGeom prst="roundRect">
@@ -24502,7 +24502,7 @@
         </p:nvSpPr>
         <p:spPr>
           <a:xfrm>
-            <a:off x="4018788" y="2825496"/>
+            <a:off x="4018788" y="3886200"/>
             <a:ext cx="3040380" cy="347472"/>
           </a:xfrm>
           <a:prstGeom prst="rect">
@@ -24546,7 +24546,7 @@
         </p:nvSpPr>
         <p:spPr>
           <a:xfrm>
-            <a:off x="4027932" y="2852927"/>
+            <a:off x="4027932" y="3913632"/>
             <a:ext cx="457200" cy="274320"/>
           </a:xfrm>
           <a:prstGeom prst="rect">
@@ -24585,7 +24585,7 @@
         </p:nvSpPr>
         <p:spPr>
           <a:xfrm>
-            <a:off x="4430268" y="2843784"/>
+            <a:off x="4430268" y="3904488"/>
             <a:ext cx="2491740" cy="310896"/>
           </a:xfrm>
           <a:prstGeom prst="rect">
@@ -24624,7 +24624,7 @@
         </p:nvSpPr>
         <p:spPr>
           <a:xfrm>
-            <a:off x="4082796" y="3300984"/>
+            <a:off x="4082796" y="4361688"/>
             <a:ext cx="2830068" cy="841248"/>
           </a:xfrm>
           <a:prstGeom prst="rect">
@@ -24663,7 +24663,7 @@
         </p:nvSpPr>
         <p:spPr>
           <a:xfrm>
-            <a:off x="502920" y="4434840"/>
+            <a:off x="502920" y="6007608"/>
             <a:ext cx="3177540" cy="1444752"/>
           </a:xfrm>
           <a:prstGeom prst="roundRect">
@@ -24709,7 +24709,7 @@
         </p:nvSpPr>
         <p:spPr>
           <a:xfrm>
-            <a:off x="502920" y="4434840"/>
+            <a:off x="502920" y="6007608"/>
             <a:ext cx="3177540" cy="384048"/>
           </a:xfrm>
           <a:prstGeom prst="roundRect">
@@ -24753,7 +24753,7 @@
         </p:nvSpPr>
         <p:spPr>
           <a:xfrm>
-            <a:off x="640080" y="4471416"/>
+            <a:off x="640080" y="6044184"/>
             <a:ext cx="3040380" cy="347472"/>
           </a:xfrm>
           <a:prstGeom prst="rect">
@@ -24797,7 +24797,7 @@
         </p:nvSpPr>
         <p:spPr>
           <a:xfrm>
-            <a:off x="649224" y="4498848"/>
+            <a:off x="649224" y="6071616"/>
             <a:ext cx="457200" cy="274320"/>
           </a:xfrm>
           <a:prstGeom prst="rect">
@@ -24836,7 +24836,7 @@
         </p:nvSpPr>
         <p:spPr>
           <a:xfrm>
-            <a:off x="1051560" y="4489703"/>
+            <a:off x="1051560" y="6062472"/>
             <a:ext cx="2491740" cy="310896"/>
           </a:xfrm>
           <a:prstGeom prst="rect">
@@ -24875,7 +24875,7 @@
         </p:nvSpPr>
         <p:spPr>
           <a:xfrm>
-            <a:off x="704088" y="4946904"/>
+            <a:off x="704088" y="6519672"/>
             <a:ext cx="2830068" cy="841248"/>
           </a:xfrm>
           <a:prstGeom prst="rect">
@@ -24914,7 +24914,7 @@
         </p:nvSpPr>
         <p:spPr>
           <a:xfrm>
-            <a:off x="3881628" y="4434840"/>
+            <a:off x="3881628" y="6007608"/>
             <a:ext cx="3177540" cy="1444752"/>
           </a:xfrm>
           <a:prstGeom prst="roundRect">
@@ -24960,7 +24960,7 @@
         </p:nvSpPr>
         <p:spPr>
           <a:xfrm>
-            <a:off x="3881628" y="4434840"/>
+            <a:off x="3881628" y="6007608"/>
             <a:ext cx="3177540" cy="384048"/>
           </a:xfrm>
           <a:prstGeom prst="roundRect">
@@ -25004,7 +25004,7 @@
         </p:nvSpPr>
         <p:spPr>
           <a:xfrm>
-            <a:off x="4018788" y="4471416"/>
+            <a:off x="4018788" y="6044184"/>
             <a:ext cx="3040380" cy="347472"/>
           </a:xfrm>
           <a:prstGeom prst="rect">
@@ -25048,7 +25048,7 @@
         </p:nvSpPr>
         <p:spPr>
           <a:xfrm>
-            <a:off x="4027932" y="4498848"/>
+            <a:off x="4027932" y="6071616"/>
             <a:ext cx="457200" cy="274320"/>
           </a:xfrm>
           <a:prstGeom prst="rect">
@@ -25087,7 +25087,7 @@
         </p:nvSpPr>
         <p:spPr>
           <a:xfrm>
-            <a:off x="4430268" y="4489703"/>
+            <a:off x="4430268" y="6062472"/>
             <a:ext cx="2491740" cy="310896"/>
           </a:xfrm>
           <a:prstGeom prst="rect">
@@ -25126,7 +25126,7 @@
         </p:nvSpPr>
         <p:spPr>
           <a:xfrm>
-            <a:off x="4082796" y="4946904"/>
+            <a:off x="4082796" y="6519672"/>
             <a:ext cx="2830068" cy="841248"/>
           </a:xfrm>
           <a:prstGeom prst="rect">
@@ -40636,8 +40636,8 @@
         </p:nvSpPr>
         <p:spPr>
           <a:xfrm>
-            <a:off x="502920" y="1143000"/>
-            <a:ext cx="3177540" cy="1115568"/>
+            <a:off x="502920" y="1691640"/>
+            <a:ext cx="3177540" cy="1280160"/>
           </a:xfrm>
           <a:prstGeom prst="roundRect">
             <a:avLst/>
@@ -40682,8 +40682,8 @@
         </p:nvSpPr>
         <p:spPr>
           <a:xfrm>
-            <a:off x="502920" y="1143000"/>
-            <a:ext cx="91440" cy="1115568"/>
+            <a:off x="502920" y="1691640"/>
+            <a:ext cx="91440" cy="1280160"/>
           </a:xfrm>
           <a:prstGeom prst="rect">
             <a:avLst/>
@@ -40726,7 +40726,7 @@
         </p:nvSpPr>
         <p:spPr>
           <a:xfrm>
-            <a:off x="740664" y="1252728"/>
+            <a:off x="740664" y="1801368"/>
             <a:ext cx="2811780" cy="438912"/>
           </a:xfrm>
           <a:prstGeom prst="rect">
@@ -40765,7 +40765,7 @@
         </p:nvSpPr>
         <p:spPr>
           <a:xfrm>
-            <a:off x="758952" y="1728216"/>
+            <a:off x="758952" y="2276856"/>
             <a:ext cx="2793492" cy="438912"/>
           </a:xfrm>
           <a:prstGeom prst="rect">
@@ -40804,8 +40804,8 @@
         </p:nvSpPr>
         <p:spPr>
           <a:xfrm>
-            <a:off x="3881628" y="1143000"/>
-            <a:ext cx="3177540" cy="1115568"/>
+            <a:off x="3881628" y="1691640"/>
+            <a:ext cx="3177540" cy="1280160"/>
           </a:xfrm>
           <a:prstGeom prst="roundRect">
             <a:avLst/>
@@ -40850,8 +40850,8 @@
         </p:nvSpPr>
         <p:spPr>
           <a:xfrm>
-            <a:off x="3881628" y="1143000"/>
-            <a:ext cx="91440" cy="1115568"/>
+            <a:off x="3881628" y="1691640"/>
+            <a:ext cx="91440" cy="1280160"/>
           </a:xfrm>
           <a:prstGeom prst="rect">
             <a:avLst/>
@@ -40894,7 +40894,7 @@
         </p:nvSpPr>
         <p:spPr>
           <a:xfrm>
-            <a:off x="4119372" y="1252728"/>
+            <a:off x="4119372" y="1801368"/>
             <a:ext cx="2811780" cy="438912"/>
           </a:xfrm>
           <a:prstGeom prst="rect">
@@ -40933,7 +40933,7 @@
         </p:nvSpPr>
         <p:spPr>
           <a:xfrm>
-            <a:off x="4137660" y="1728216"/>
+            <a:off x="4137660" y="2276856"/>
             <a:ext cx="2793492" cy="438912"/>
           </a:xfrm>
           <a:prstGeom prst="rect">
@@ -40972,8 +40972,8 @@
         </p:nvSpPr>
         <p:spPr>
           <a:xfrm>
-            <a:off x="502920" y="2459736"/>
-            <a:ext cx="3177540" cy="1115568"/>
+            <a:off x="502920" y="3840479"/>
+            <a:ext cx="3177540" cy="1280160"/>
           </a:xfrm>
           <a:prstGeom prst="roundRect">
             <a:avLst/>
@@ -41018,8 +41018,8 @@
         </p:nvSpPr>
         <p:spPr>
           <a:xfrm>
-            <a:off x="502920" y="2459736"/>
-            <a:ext cx="91440" cy="1115568"/>
+            <a:off x="502920" y="3840479"/>
+            <a:ext cx="91440" cy="1280160"/>
           </a:xfrm>
           <a:prstGeom prst="rect">
             <a:avLst/>
@@ -41062,7 +41062,7 @@
         </p:nvSpPr>
         <p:spPr>
           <a:xfrm>
-            <a:off x="740664" y="2569464"/>
+            <a:off x="740664" y="3950207"/>
             <a:ext cx="2811780" cy="438912"/>
           </a:xfrm>
           <a:prstGeom prst="rect">
@@ -41101,7 +41101,7 @@
         </p:nvSpPr>
         <p:spPr>
           <a:xfrm>
-            <a:off x="758952" y="3044952"/>
+            <a:off x="758952" y="4425695"/>
             <a:ext cx="2793492" cy="438912"/>
           </a:xfrm>
           <a:prstGeom prst="rect">
@@ -41140,8 +41140,8 @@
         </p:nvSpPr>
         <p:spPr>
           <a:xfrm>
-            <a:off x="3881628" y="2459736"/>
-            <a:ext cx="3177540" cy="1115568"/>
+            <a:off x="3881628" y="3840479"/>
+            <a:ext cx="3177540" cy="1280160"/>
           </a:xfrm>
           <a:prstGeom prst="roundRect">
             <a:avLst/>
@@ -41186,8 +41186,8 @@
         </p:nvSpPr>
         <p:spPr>
           <a:xfrm>
-            <a:off x="3881628" y="2459736"/>
-            <a:ext cx="91440" cy="1115568"/>
+            <a:off x="3881628" y="3840479"/>
+            <a:ext cx="91440" cy="1280160"/>
           </a:xfrm>
           <a:prstGeom prst="rect">
             <a:avLst/>
@@ -41230,7 +41230,7 @@
         </p:nvSpPr>
         <p:spPr>
           <a:xfrm>
-            <a:off x="4119372" y="2569464"/>
+            <a:off x="4119372" y="3950207"/>
             <a:ext cx="2811780" cy="438912"/>
           </a:xfrm>
           <a:prstGeom prst="rect">
@@ -41269,7 +41269,7 @@
         </p:nvSpPr>
         <p:spPr>
           <a:xfrm>
-            <a:off x="4137660" y="3044952"/>
+            <a:off x="4137660" y="4425695"/>
             <a:ext cx="2793492" cy="438912"/>
           </a:xfrm>
           <a:prstGeom prst="rect">
@@ -41308,8 +41308,8 @@
         </p:nvSpPr>
         <p:spPr>
           <a:xfrm>
-            <a:off x="502920" y="3776472"/>
-            <a:ext cx="3177540" cy="1115568"/>
+            <a:off x="502920" y="5989319"/>
+            <a:ext cx="3177540" cy="1280160"/>
           </a:xfrm>
           <a:prstGeom prst="roundRect">
             <a:avLst/>
@@ -41354,8 +41354,8 @@
         </p:nvSpPr>
         <p:spPr>
           <a:xfrm>
-            <a:off x="502920" y="3776472"/>
-            <a:ext cx="91440" cy="1115568"/>
+            <a:off x="502920" y="5989319"/>
+            <a:ext cx="91440" cy="1280160"/>
           </a:xfrm>
           <a:prstGeom prst="rect">
             <a:avLst/>
@@ -41398,7 +41398,7 @@
         </p:nvSpPr>
         <p:spPr>
           <a:xfrm>
-            <a:off x="740664" y="3886200"/>
+            <a:off x="740664" y="6099047"/>
             <a:ext cx="2811780" cy="438912"/>
           </a:xfrm>
           <a:prstGeom prst="rect">
@@ -41437,7 +41437,7 @@
         </p:nvSpPr>
         <p:spPr>
           <a:xfrm>
-            <a:off x="758952" y="4361688"/>
+            <a:off x="758952" y="6574535"/>
             <a:ext cx="2793492" cy="438912"/>
           </a:xfrm>
           <a:prstGeom prst="rect">
@@ -45976,7 +45976,7 @@
         </p:nvSpPr>
         <p:spPr>
           <a:xfrm>
-            <a:off x="502920" y="1216152"/>
+            <a:off x="502920" y="1490472"/>
             <a:ext cx="109728" cy="109728"/>
           </a:xfrm>
           <a:prstGeom prst="ellipse">
@@ -46020,7 +46020,7 @@
         </p:nvSpPr>
         <p:spPr>
           <a:xfrm>
-            <a:off x="758952" y="1124712"/>
+            <a:off x="758952" y="1399032"/>
             <a:ext cx="6281928" cy="347472"/>
           </a:xfrm>
           <a:prstGeom prst="rect">
@@ -46059,7 +46059,7 @@
         </p:nvSpPr>
         <p:spPr>
           <a:xfrm>
-            <a:off x="777240" y="1490472"/>
+            <a:off x="777240" y="1764792"/>
             <a:ext cx="6263640" cy="548640"/>
           </a:xfrm>
           <a:prstGeom prst="rect">
@@ -46098,7 +46098,7 @@
         </p:nvSpPr>
         <p:spPr>
           <a:xfrm>
-            <a:off x="502920" y="2221992"/>
+            <a:off x="502920" y="2423160"/>
             <a:ext cx="109728" cy="109728"/>
           </a:xfrm>
           <a:prstGeom prst="ellipse">
@@ -46142,7 +46142,7 @@
         </p:nvSpPr>
         <p:spPr>
           <a:xfrm>
-            <a:off x="758952" y="2130552"/>
+            <a:off x="758952" y="2331720"/>
             <a:ext cx="6281928" cy="347472"/>
           </a:xfrm>
           <a:prstGeom prst="rect">
@@ -46181,7 +46181,7 @@
         </p:nvSpPr>
         <p:spPr>
           <a:xfrm>
-            <a:off x="777240" y="2496312"/>
+            <a:off x="777240" y="2697480"/>
             <a:ext cx="6263640" cy="548640"/>
           </a:xfrm>
           <a:prstGeom prst="rect">
@@ -46220,7 +46220,7 @@
         </p:nvSpPr>
         <p:spPr>
           <a:xfrm>
-            <a:off x="502920" y="3227832"/>
+            <a:off x="502920" y="3355848"/>
             <a:ext cx="109728" cy="109728"/>
           </a:xfrm>
           <a:prstGeom prst="ellipse">
@@ -46264,7 +46264,7 @@
         </p:nvSpPr>
         <p:spPr>
           <a:xfrm>
-            <a:off x="758952" y="3136392"/>
+            <a:off x="758952" y="3264408"/>
             <a:ext cx="6281928" cy="347472"/>
           </a:xfrm>
           <a:prstGeom prst="rect">
@@ -46303,7 +46303,7 @@
         </p:nvSpPr>
         <p:spPr>
           <a:xfrm>
-            <a:off x="777240" y="3502152"/>
+            <a:off x="777240" y="3630168"/>
             <a:ext cx="6263640" cy="548640"/>
           </a:xfrm>
           <a:prstGeom prst="rect">
@@ -46342,7 +46342,7 @@
         </p:nvSpPr>
         <p:spPr>
           <a:xfrm>
-            <a:off x="502920" y="4233672"/>
+            <a:off x="502920" y="4288536"/>
             <a:ext cx="109728" cy="109728"/>
           </a:xfrm>
           <a:prstGeom prst="ellipse">
@@ -46386,7 +46386,7 @@
         </p:nvSpPr>
         <p:spPr>
           <a:xfrm>
-            <a:off x="758952" y="4142232"/>
+            <a:off x="758952" y="4197096"/>
             <a:ext cx="6281928" cy="347472"/>
           </a:xfrm>
           <a:prstGeom prst="rect">
@@ -46425,7 +46425,7 @@
         </p:nvSpPr>
         <p:spPr>
           <a:xfrm>
-            <a:off x="777240" y="4507992"/>
+            <a:off x="777240" y="4562856"/>
             <a:ext cx="6263640" cy="548640"/>
           </a:xfrm>
           <a:prstGeom prst="rect">
@@ -47783,7 +47783,7 @@
         </p:nvSpPr>
         <p:spPr>
           <a:xfrm>
-            <a:off x="502920" y="1115568"/>
+            <a:off x="502920" y="1280160"/>
             <a:ext cx="6556248" cy="1572768"/>
           </a:xfrm>
           <a:prstGeom prst="roundRect">
@@ -47829,7 +47829,7 @@
         </p:nvSpPr>
         <p:spPr>
           <a:xfrm>
-            <a:off x="667512" y="1664207"/>
+            <a:off x="667512" y="1828800"/>
             <a:ext cx="438912" cy="438912"/>
           </a:xfrm>
           <a:prstGeom prst="ellipse">
@@ -47875,7 +47875,7 @@
         </p:nvSpPr>
         <p:spPr>
           <a:xfrm>
-            <a:off x="1197864" y="1664207"/>
+            <a:off x="1197864" y="1828800"/>
             <a:ext cx="438912" cy="438912"/>
           </a:xfrm>
           <a:prstGeom prst="ellipse">
@@ -47921,7 +47921,7 @@
         </p:nvSpPr>
         <p:spPr>
           <a:xfrm>
-            <a:off x="1728216" y="1664207"/>
+            <a:off x="1728216" y="1828800"/>
             <a:ext cx="438912" cy="438912"/>
           </a:xfrm>
           <a:prstGeom prst="ellipse">
@@ -47967,7 +47967,7 @@
         </p:nvSpPr>
         <p:spPr>
           <a:xfrm>
-            <a:off x="704088" y="1207008"/>
+            <a:off x="704088" y="1371600"/>
             <a:ext cx="2377440" cy="384048"/>
           </a:xfrm>
           <a:prstGeom prst="rect">
@@ -48006,7 +48006,7 @@
         </p:nvSpPr>
         <p:spPr>
           <a:xfrm>
-            <a:off x="3172968" y="1225295"/>
+            <a:off x="3172968" y="1389888"/>
             <a:ext cx="3721608" cy="329184"/>
           </a:xfrm>
           <a:prstGeom prst="rect">
@@ -48045,7 +48045,7 @@
         </p:nvSpPr>
         <p:spPr>
           <a:xfrm>
-            <a:off x="2606039" y="1618488"/>
+            <a:off x="2606039" y="1783080"/>
             <a:ext cx="4270248" cy="987552"/>
           </a:xfrm>
           <a:prstGeom prst="rect">
@@ -48084,7 +48084,7 @@
         </p:nvSpPr>
         <p:spPr>
           <a:xfrm>
-            <a:off x="704088" y="2350008"/>
+            <a:off x="704088" y="2514600"/>
             <a:ext cx="2011680" cy="274320"/>
           </a:xfrm>
           <a:prstGeom prst="rect">
@@ -48123,7 +48123,7 @@
         </p:nvSpPr>
         <p:spPr>
           <a:xfrm>
-            <a:off x="502920" y="2871215"/>
+            <a:off x="502920" y="3072384"/>
             <a:ext cx="6556248" cy="1572768"/>
           </a:xfrm>
           <a:prstGeom prst="roundRect">
@@ -48169,7 +48169,7 @@
         </p:nvSpPr>
         <p:spPr>
           <a:xfrm>
-            <a:off x="667512" y="3419856"/>
+            <a:off x="667512" y="3621024"/>
             <a:ext cx="438912" cy="438912"/>
           </a:xfrm>
           <a:prstGeom prst="ellipse">
@@ -48215,7 +48215,7 @@
         </p:nvSpPr>
         <p:spPr>
           <a:xfrm>
-            <a:off x="1197864" y="3419856"/>
+            <a:off x="1197864" y="3621024"/>
             <a:ext cx="438912" cy="438912"/>
           </a:xfrm>
           <a:prstGeom prst="ellipse">
@@ -48261,7 +48261,7 @@
         </p:nvSpPr>
         <p:spPr>
           <a:xfrm>
-            <a:off x="1728216" y="3419856"/>
+            <a:off x="1728216" y="3621024"/>
             <a:ext cx="438912" cy="438912"/>
           </a:xfrm>
           <a:prstGeom prst="ellipse">
@@ -48307,7 +48307,7 @@
         </p:nvSpPr>
         <p:spPr>
           <a:xfrm>
-            <a:off x="704088" y="2962656"/>
+            <a:off x="704088" y="3163824"/>
             <a:ext cx="2377440" cy="384048"/>
           </a:xfrm>
           <a:prstGeom prst="rect">
@@ -48346,7 +48346,7 @@
         </p:nvSpPr>
         <p:spPr>
           <a:xfrm>
-            <a:off x="3172968" y="2980944"/>
+            <a:off x="3172968" y="3182112"/>
             <a:ext cx="3721608" cy="329184"/>
           </a:xfrm>
           <a:prstGeom prst="rect">
@@ -48385,7 +48385,7 @@
         </p:nvSpPr>
         <p:spPr>
           <a:xfrm>
-            <a:off x="2606039" y="3374135"/>
+            <a:off x="2606039" y="3575304"/>
             <a:ext cx="4270248" cy="987552"/>
           </a:xfrm>
           <a:prstGeom prst="rect">
@@ -48424,7 +48424,7 @@
         </p:nvSpPr>
         <p:spPr>
           <a:xfrm>
-            <a:off x="704088" y="4105656"/>
+            <a:off x="704088" y="4306824"/>
             <a:ext cx="2011680" cy="274320"/>
           </a:xfrm>
           <a:prstGeom prst="rect">
@@ -48463,7 +48463,7 @@
         </p:nvSpPr>
         <p:spPr>
           <a:xfrm>
-            <a:off x="502920" y="4626864"/>
+            <a:off x="502920" y="4864608"/>
             <a:ext cx="6556248" cy="1572768"/>
           </a:xfrm>
           <a:prstGeom prst="roundRect">
@@ -48509,7 +48509,7 @@
         </p:nvSpPr>
         <p:spPr>
           <a:xfrm>
-            <a:off x="667512" y="5175503"/>
+            <a:off x="667512" y="5413248"/>
             <a:ext cx="438912" cy="438912"/>
           </a:xfrm>
           <a:prstGeom prst="ellipse">
@@ -48555,7 +48555,7 @@
         </p:nvSpPr>
         <p:spPr>
           <a:xfrm>
-            <a:off x="1197864" y="5175503"/>
+            <a:off x="1197864" y="5413248"/>
             <a:ext cx="438912" cy="438912"/>
           </a:xfrm>
           <a:prstGeom prst="ellipse">
@@ -48601,7 +48601,7 @@
         </p:nvSpPr>
         <p:spPr>
           <a:xfrm>
-            <a:off x="704088" y="4718303"/>
+            <a:off x="704088" y="4956048"/>
             <a:ext cx="2377440" cy="384048"/>
           </a:xfrm>
           <a:prstGeom prst="rect">
@@ -48640,7 +48640,7 @@
         </p:nvSpPr>
         <p:spPr>
           <a:xfrm>
-            <a:off x="3172968" y="4736592"/>
+            <a:off x="3172968" y="4974336"/>
             <a:ext cx="3721608" cy="329184"/>
           </a:xfrm>
           <a:prstGeom prst="rect">
@@ -48679,7 +48679,7 @@
         </p:nvSpPr>
         <p:spPr>
           <a:xfrm>
-            <a:off x="2606039" y="5129783"/>
+            <a:off x="2606039" y="5367528"/>
             <a:ext cx="4270248" cy="987552"/>
           </a:xfrm>
           <a:prstGeom prst="rect">
@@ -48718,7 +48718,7 @@
         </p:nvSpPr>
         <p:spPr>
           <a:xfrm>
-            <a:off x="704088" y="5861304"/>
+            <a:off x="704088" y="6099048"/>
             <a:ext cx="2011680" cy="274320"/>
           </a:xfrm>
           <a:prstGeom prst="rect">
@@ -48757,7 +48757,7 @@
         </p:nvSpPr>
         <p:spPr>
           <a:xfrm>
-            <a:off x="502920" y="6382512"/>
+            <a:off x="502920" y="6656831"/>
             <a:ext cx="6556248" cy="1572768"/>
           </a:xfrm>
           <a:prstGeom prst="roundRect">
@@ -48803,7 +48803,7 @@
         </p:nvSpPr>
         <p:spPr>
           <a:xfrm>
-            <a:off x="667512" y="6931151"/>
+            <a:off x="667512" y="7205471"/>
             <a:ext cx="438912" cy="438912"/>
           </a:xfrm>
           <a:prstGeom prst="ellipse">
@@ -48849,7 +48849,7 @@
         </p:nvSpPr>
         <p:spPr>
           <a:xfrm>
-            <a:off x="1197864" y="6931151"/>
+            <a:off x="1197864" y="7205471"/>
             <a:ext cx="438912" cy="438912"/>
           </a:xfrm>
           <a:prstGeom prst="ellipse">
@@ -48895,7 +48895,7 @@
         </p:nvSpPr>
         <p:spPr>
           <a:xfrm>
-            <a:off x="1728216" y="6931151"/>
+            <a:off x="1728216" y="7205471"/>
             <a:ext cx="438912" cy="438912"/>
           </a:xfrm>
           <a:prstGeom prst="ellipse">
@@ -48941,7 +48941,7 @@
         </p:nvSpPr>
         <p:spPr>
           <a:xfrm>
-            <a:off x="704088" y="6473951"/>
+            <a:off x="704088" y="6748271"/>
             <a:ext cx="2377440" cy="384048"/>
           </a:xfrm>
           <a:prstGeom prst="rect">
@@ -48980,7 +48980,7 @@
         </p:nvSpPr>
         <p:spPr>
           <a:xfrm>
-            <a:off x="3172968" y="6492240"/>
+            <a:off x="3172968" y="6766559"/>
             <a:ext cx="3721608" cy="329184"/>
           </a:xfrm>
           <a:prstGeom prst="rect">
@@ -49019,7 +49019,7 @@
         </p:nvSpPr>
         <p:spPr>
           <a:xfrm>
-            <a:off x="2606039" y="6885431"/>
+            <a:off x="2606039" y="7159751"/>
             <a:ext cx="4270248" cy="987552"/>
           </a:xfrm>
           <a:prstGeom prst="rect">
@@ -49058,7 +49058,7 @@
         </p:nvSpPr>
         <p:spPr>
           <a:xfrm>
-            <a:off x="704088" y="7616952"/>
+            <a:off x="704088" y="7891271"/>
             <a:ext cx="2011680" cy="274320"/>
           </a:xfrm>
           <a:prstGeom prst="rect">
@@ -49097,7 +49097,7 @@
         </p:nvSpPr>
         <p:spPr>
           <a:xfrm>
-            <a:off x="502920" y="8138160"/>
+            <a:off x="502920" y="8449056"/>
             <a:ext cx="6556248" cy="1572768"/>
           </a:xfrm>
           <a:prstGeom prst="roundRect">
@@ -49143,7 +49143,7 @@
         </p:nvSpPr>
         <p:spPr>
           <a:xfrm>
-            <a:off x="667512" y="8686800"/>
+            <a:off x="667512" y="8997696"/>
             <a:ext cx="438912" cy="438912"/>
           </a:xfrm>
           <a:prstGeom prst="ellipse">
@@ -49189,7 +49189,7 @@
         </p:nvSpPr>
         <p:spPr>
           <a:xfrm>
-            <a:off x="1197864" y="8686800"/>
+            <a:off x="1197864" y="8997696"/>
             <a:ext cx="438912" cy="438912"/>
           </a:xfrm>
           <a:prstGeom prst="ellipse">
@@ -49235,7 +49235,7 @@
         </p:nvSpPr>
         <p:spPr>
           <a:xfrm>
-            <a:off x="1728216" y="8686800"/>
+            <a:off x="1728216" y="8997696"/>
             <a:ext cx="438912" cy="438912"/>
           </a:xfrm>
           <a:prstGeom prst="ellipse">
@@ -49281,7 +49281,7 @@
         </p:nvSpPr>
         <p:spPr>
           <a:xfrm>
-            <a:off x="704088" y="8229600"/>
+            <a:off x="704088" y="8540496"/>
             <a:ext cx="2377440" cy="384048"/>
           </a:xfrm>
           <a:prstGeom prst="rect">
@@ -49320,7 +49320,7 @@
         </p:nvSpPr>
         <p:spPr>
           <a:xfrm>
-            <a:off x="3172968" y="8247888"/>
+            <a:off x="3172968" y="8558784"/>
             <a:ext cx="3721608" cy="329184"/>
           </a:xfrm>
           <a:prstGeom prst="rect">
@@ -49359,7 +49359,7 @@
         </p:nvSpPr>
         <p:spPr>
           <a:xfrm>
-            <a:off x="2606039" y="8641080"/>
+            <a:off x="2606039" y="8951976"/>
             <a:ext cx="4270248" cy="987552"/>
           </a:xfrm>
           <a:prstGeom prst="rect">
@@ -49398,7 +49398,7 @@
         </p:nvSpPr>
         <p:spPr>
           <a:xfrm>
-            <a:off x="704088" y="9372600"/>
+            <a:off x="704088" y="9683496"/>
             <a:ext cx="2011680" cy="274320"/>
           </a:xfrm>
           <a:prstGeom prst="rect">
@@ -49697,7 +49697,7 @@
         </p:nvSpPr>
         <p:spPr>
           <a:xfrm>
-            <a:off x="502920" y="1115568"/>
+            <a:off x="502920" y="1298448"/>
             <a:ext cx="6556248" cy="1234440"/>
           </a:xfrm>
           <a:prstGeom prst="roundRect">
@@ -49743,7 +49743,7 @@
         </p:nvSpPr>
         <p:spPr>
           <a:xfrm>
-            <a:off x="502920" y="1115568"/>
+            <a:off x="502920" y="1298448"/>
             <a:ext cx="91440" cy="1234440"/>
           </a:xfrm>
           <a:prstGeom prst="rect">
@@ -49787,7 +49787,7 @@
         </p:nvSpPr>
         <p:spPr>
           <a:xfrm>
-            <a:off x="758952" y="1243584"/>
+            <a:off x="758952" y="1426464"/>
             <a:ext cx="1920240" cy="411480"/>
           </a:xfrm>
           <a:prstGeom prst="rect">
@@ -49826,7 +49826,7 @@
         </p:nvSpPr>
         <p:spPr>
           <a:xfrm>
-            <a:off x="2743200" y="1152144"/>
+            <a:off x="2743200" y="1335024"/>
             <a:ext cx="4178808" cy="1234440"/>
           </a:xfrm>
           <a:prstGeom prst="rect">
@@ -49865,7 +49865,7 @@
         </p:nvSpPr>
         <p:spPr>
           <a:xfrm>
-            <a:off x="502920" y="2551176"/>
+            <a:off x="502920" y="2807208"/>
             <a:ext cx="6556248" cy="1234440"/>
           </a:xfrm>
           <a:prstGeom prst="roundRect">
@@ -49911,7 +49911,7 @@
         </p:nvSpPr>
         <p:spPr>
           <a:xfrm>
-            <a:off x="502920" y="2551176"/>
+            <a:off x="502920" y="2807208"/>
             <a:ext cx="91440" cy="1234440"/>
           </a:xfrm>
           <a:prstGeom prst="rect">
@@ -49955,7 +49955,7 @@
         </p:nvSpPr>
         <p:spPr>
           <a:xfrm>
-            <a:off x="758952" y="2679192"/>
+            <a:off x="758952" y="2935224"/>
             <a:ext cx="1920240" cy="411480"/>
           </a:xfrm>
           <a:prstGeom prst="rect">
@@ -49994,7 +49994,7 @@
         </p:nvSpPr>
         <p:spPr>
           <a:xfrm>
-            <a:off x="2743200" y="2587752"/>
+            <a:off x="2743200" y="2843784"/>
             <a:ext cx="4178808" cy="1234440"/>
           </a:xfrm>
           <a:prstGeom prst="rect">
@@ -50033,7 +50033,7 @@
         </p:nvSpPr>
         <p:spPr>
           <a:xfrm>
-            <a:off x="502920" y="3986784"/>
+            <a:off x="502920" y="4315968"/>
             <a:ext cx="6556248" cy="1234440"/>
           </a:xfrm>
           <a:prstGeom prst="roundRect">
@@ -50079,7 +50079,7 @@
         </p:nvSpPr>
         <p:spPr>
           <a:xfrm>
-            <a:off x="502920" y="3986784"/>
+            <a:off x="502920" y="4315968"/>
             <a:ext cx="91440" cy="1234440"/>
           </a:xfrm>
           <a:prstGeom prst="rect">
@@ -50123,7 +50123,7 @@
         </p:nvSpPr>
         <p:spPr>
           <a:xfrm>
-            <a:off x="758952" y="4114800"/>
+            <a:off x="758952" y="4443984"/>
             <a:ext cx="1920240" cy="411480"/>
           </a:xfrm>
           <a:prstGeom prst="rect">
@@ -50162,7 +50162,7 @@
         </p:nvSpPr>
         <p:spPr>
           <a:xfrm>
-            <a:off x="2743200" y="4023360"/>
+            <a:off x="2743200" y="4352544"/>
             <a:ext cx="4178808" cy="1234440"/>
           </a:xfrm>
           <a:prstGeom prst="rect">
@@ -50201,7 +50201,7 @@
         </p:nvSpPr>
         <p:spPr>
           <a:xfrm>
-            <a:off x="502920" y="5422392"/>
+            <a:off x="502920" y="5824728"/>
             <a:ext cx="6556248" cy="1234440"/>
           </a:xfrm>
           <a:prstGeom prst="roundRect">
@@ -50247,7 +50247,7 @@
         </p:nvSpPr>
         <p:spPr>
           <a:xfrm>
-            <a:off x="502920" y="5422392"/>
+            <a:off x="502920" y="5824728"/>
             <a:ext cx="91440" cy="1234440"/>
           </a:xfrm>
           <a:prstGeom prst="rect">
@@ -50291,7 +50291,7 @@
         </p:nvSpPr>
         <p:spPr>
           <a:xfrm>
-            <a:off x="758952" y="5550407"/>
+            <a:off x="758952" y="5952744"/>
             <a:ext cx="1920240" cy="411480"/>
           </a:xfrm>
           <a:prstGeom prst="rect">
@@ -50330,7 +50330,7 @@
         </p:nvSpPr>
         <p:spPr>
           <a:xfrm>
-            <a:off x="2743200" y="5458968"/>
+            <a:off x="2743200" y="5861304"/>
             <a:ext cx="4178808" cy="1234440"/>
           </a:xfrm>
           <a:prstGeom prst="rect">
@@ -50369,7 +50369,7 @@
         </p:nvSpPr>
         <p:spPr>
           <a:xfrm>
-            <a:off x="502920" y="6858000"/>
+            <a:off x="502920" y="7333488"/>
             <a:ext cx="6556248" cy="1234440"/>
           </a:xfrm>
           <a:prstGeom prst="roundRect">
@@ -50415,7 +50415,7 @@
         </p:nvSpPr>
         <p:spPr>
           <a:xfrm>
-            <a:off x="502920" y="6858000"/>
+            <a:off x="502920" y="7333488"/>
             <a:ext cx="91440" cy="1234440"/>
           </a:xfrm>
           <a:prstGeom prst="rect">
@@ -50459,7 +50459,7 @@
         </p:nvSpPr>
         <p:spPr>
           <a:xfrm>
-            <a:off x="758952" y="6986016"/>
+            <a:off x="758952" y="7461504"/>
             <a:ext cx="1920240" cy="411480"/>
           </a:xfrm>
           <a:prstGeom prst="rect">
@@ -50498,7 +50498,7 @@
         </p:nvSpPr>
         <p:spPr>
           <a:xfrm>
-            <a:off x="2743200" y="6894576"/>
+            <a:off x="2743200" y="7370063"/>
             <a:ext cx="4178808" cy="1234440"/>
           </a:xfrm>
           <a:prstGeom prst="rect">
@@ -50537,7 +50537,7 @@
         </p:nvSpPr>
         <p:spPr>
           <a:xfrm>
-            <a:off x="502920" y="8293608"/>
+            <a:off x="502920" y="8842248"/>
             <a:ext cx="6556248" cy="1234440"/>
           </a:xfrm>
           <a:prstGeom prst="roundRect">
@@ -50583,7 +50583,7 @@
         </p:nvSpPr>
         <p:spPr>
           <a:xfrm>
-            <a:off x="502920" y="8293608"/>
+            <a:off x="502920" y="8842248"/>
             <a:ext cx="91440" cy="1234440"/>
           </a:xfrm>
           <a:prstGeom prst="rect">
@@ -50627,7 +50627,7 @@
         </p:nvSpPr>
         <p:spPr>
           <a:xfrm>
-            <a:off x="758952" y="8421624"/>
+            <a:off x="758952" y="8970264"/>
             <a:ext cx="1920240" cy="411480"/>
           </a:xfrm>
           <a:prstGeom prst="rect">
@@ -50666,7 +50666,7 @@
         </p:nvSpPr>
         <p:spPr>
           <a:xfrm>
-            <a:off x="2743200" y="8330183"/>
+            <a:off x="2743200" y="8878824"/>
             <a:ext cx="4178808" cy="1234440"/>
           </a:xfrm>
           <a:prstGeom prst="rect">
@@ -51004,7 +51004,7 @@
         </p:nvSpPr>
         <p:spPr>
           <a:xfrm>
-            <a:off x="502920" y="1481328"/>
+            <a:off x="502920" y="1645920"/>
             <a:ext cx="3177540" cy="1389888"/>
           </a:xfrm>
           <a:prstGeom prst="roundRect">
@@ -51050,7 +51050,7 @@
         </p:nvSpPr>
         <p:spPr>
           <a:xfrm>
-            <a:off x="502920" y="1481328"/>
+            <a:off x="502920" y="1645920"/>
             <a:ext cx="420624" cy="1389888"/>
           </a:xfrm>
           <a:prstGeom prst="roundRect">
@@ -51094,7 +51094,7 @@
         </p:nvSpPr>
         <p:spPr>
           <a:xfrm>
-            <a:off x="713232" y="1481328"/>
+            <a:off x="713232" y="1645920"/>
             <a:ext cx="210312" cy="1389888"/>
           </a:xfrm>
           <a:prstGeom prst="rect">
@@ -51138,7 +51138,7 @@
         </p:nvSpPr>
         <p:spPr>
           <a:xfrm>
-            <a:off x="539496" y="1984248"/>
+            <a:off x="539496" y="2148840"/>
             <a:ext cx="347472" cy="384048"/>
           </a:xfrm>
           <a:prstGeom prst="rect">
@@ -51177,7 +51177,7 @@
         </p:nvSpPr>
         <p:spPr>
           <a:xfrm>
-            <a:off x="1051560" y="1572768"/>
+            <a:off x="1051560" y="1737360"/>
             <a:ext cx="2500884" cy="329184"/>
           </a:xfrm>
           <a:prstGeom prst="rect">
@@ -51216,7 +51216,7 @@
         </p:nvSpPr>
         <p:spPr>
           <a:xfrm>
-            <a:off x="1051560" y="1956816"/>
+            <a:off x="1051560" y="2121408"/>
             <a:ext cx="2500884" cy="822960"/>
           </a:xfrm>
           <a:prstGeom prst="rect">
@@ -51255,7 +51255,7 @@
         </p:nvSpPr>
         <p:spPr>
           <a:xfrm>
-            <a:off x="3881628" y="1481328"/>
+            <a:off x="3881628" y="1645920"/>
             <a:ext cx="3177540" cy="1389888"/>
           </a:xfrm>
           <a:prstGeom prst="roundRect">
@@ -51301,7 +51301,7 @@
         </p:nvSpPr>
         <p:spPr>
           <a:xfrm>
-            <a:off x="3881628" y="1481328"/>
+            <a:off x="3881628" y="1645920"/>
             <a:ext cx="420624" cy="1389888"/>
           </a:xfrm>
           <a:prstGeom prst="roundRect">
@@ -51345,7 +51345,7 @@
         </p:nvSpPr>
         <p:spPr>
           <a:xfrm>
-            <a:off x="4091940" y="1481328"/>
+            <a:off x="4091940" y="1645920"/>
             <a:ext cx="210312" cy="1389888"/>
           </a:xfrm>
           <a:prstGeom prst="rect">
@@ -51389,7 +51389,7 @@
         </p:nvSpPr>
         <p:spPr>
           <a:xfrm>
-            <a:off x="3918204" y="1984248"/>
+            <a:off x="3918204" y="2148840"/>
             <a:ext cx="347472" cy="384048"/>
           </a:xfrm>
           <a:prstGeom prst="rect">
@@ -51428,7 +51428,7 @@
         </p:nvSpPr>
         <p:spPr>
           <a:xfrm>
-            <a:off x="4430268" y="1572768"/>
+            <a:off x="4430268" y="1737360"/>
             <a:ext cx="2500884" cy="329184"/>
           </a:xfrm>
           <a:prstGeom prst="rect">
@@ -51467,7 +51467,7 @@
         </p:nvSpPr>
         <p:spPr>
           <a:xfrm>
-            <a:off x="4430268" y="1956816"/>
+            <a:off x="4430268" y="2121408"/>
             <a:ext cx="2500884" cy="822960"/>
           </a:xfrm>
           <a:prstGeom prst="rect">
@@ -51506,7 +51506,7 @@
         </p:nvSpPr>
         <p:spPr>
           <a:xfrm>
-            <a:off x="502920" y="3035808"/>
+            <a:off x="502920" y="3456432"/>
             <a:ext cx="3177540" cy="1389888"/>
           </a:xfrm>
           <a:prstGeom prst="roundRect">
@@ -51552,7 +51552,7 @@
         </p:nvSpPr>
         <p:spPr>
           <a:xfrm>
-            <a:off x="502920" y="3035808"/>
+            <a:off x="502920" y="3456432"/>
             <a:ext cx="420624" cy="1389888"/>
           </a:xfrm>
           <a:prstGeom prst="roundRect">
@@ -51596,7 +51596,7 @@
         </p:nvSpPr>
         <p:spPr>
           <a:xfrm>
-            <a:off x="713232" y="3035808"/>
+            <a:off x="713232" y="3456432"/>
             <a:ext cx="210312" cy="1389888"/>
           </a:xfrm>
           <a:prstGeom prst="rect">
@@ -51640,7 +51640,7 @@
         </p:nvSpPr>
         <p:spPr>
           <a:xfrm>
-            <a:off x="539496" y="3538728"/>
+            <a:off x="539496" y="3959352"/>
             <a:ext cx="347472" cy="384048"/>
           </a:xfrm>
           <a:prstGeom prst="rect">
@@ -51679,7 +51679,7 @@
         </p:nvSpPr>
         <p:spPr>
           <a:xfrm>
-            <a:off x="1051560" y="3127248"/>
+            <a:off x="1051560" y="3547872"/>
             <a:ext cx="2500884" cy="329184"/>
           </a:xfrm>
           <a:prstGeom prst="rect">
@@ -51718,7 +51718,7 @@
         </p:nvSpPr>
         <p:spPr>
           <a:xfrm>
-            <a:off x="1051560" y="3511296"/>
+            <a:off x="1051560" y="3931920"/>
             <a:ext cx="2500884" cy="822960"/>
           </a:xfrm>
           <a:prstGeom prst="rect">
@@ -51757,7 +51757,7 @@
         </p:nvSpPr>
         <p:spPr>
           <a:xfrm>
-            <a:off x="3881628" y="3035808"/>
+            <a:off x="3881628" y="3456432"/>
             <a:ext cx="3177540" cy="1389888"/>
           </a:xfrm>
           <a:prstGeom prst="roundRect">
@@ -51803,7 +51803,7 @@
         </p:nvSpPr>
         <p:spPr>
           <a:xfrm>
-            <a:off x="3881628" y="3035808"/>
+            <a:off x="3881628" y="3456432"/>
             <a:ext cx="420624" cy="1389888"/>
           </a:xfrm>
           <a:prstGeom prst="roundRect">
@@ -51847,7 +51847,7 @@
         </p:nvSpPr>
         <p:spPr>
           <a:xfrm>
-            <a:off x="4091940" y="3035808"/>
+            <a:off x="4091940" y="3456432"/>
             <a:ext cx="210312" cy="1389888"/>
           </a:xfrm>
           <a:prstGeom prst="rect">
@@ -51891,7 +51891,7 @@
         </p:nvSpPr>
         <p:spPr>
           <a:xfrm>
-            <a:off x="3918204" y="3538728"/>
+            <a:off x="3918204" y="3959352"/>
             <a:ext cx="347472" cy="384048"/>
           </a:xfrm>
           <a:prstGeom prst="rect">
@@ -51930,7 +51930,7 @@
         </p:nvSpPr>
         <p:spPr>
           <a:xfrm>
-            <a:off x="4430268" y="3127248"/>
+            <a:off x="4430268" y="3547872"/>
             <a:ext cx="2500884" cy="329184"/>
           </a:xfrm>
           <a:prstGeom prst="rect">
@@ -51969,7 +51969,7 @@
         </p:nvSpPr>
         <p:spPr>
           <a:xfrm>
-            <a:off x="4430268" y="3511296"/>
+            <a:off x="4430268" y="3931920"/>
             <a:ext cx="2500884" cy="822960"/>
           </a:xfrm>
           <a:prstGeom prst="rect">
@@ -52008,7 +52008,7 @@
         </p:nvSpPr>
         <p:spPr>
           <a:xfrm>
-            <a:off x="502920" y="4590288"/>
+            <a:off x="502920" y="5266944"/>
             <a:ext cx="3177540" cy="1389888"/>
           </a:xfrm>
           <a:prstGeom prst="roundRect">
@@ -52054,7 +52054,7 @@
         </p:nvSpPr>
         <p:spPr>
           <a:xfrm>
-            <a:off x="502920" y="4590288"/>
+            <a:off x="502920" y="5266944"/>
             <a:ext cx="420624" cy="1389888"/>
           </a:xfrm>
           <a:prstGeom prst="roundRect">
@@ -52098,7 +52098,7 @@
         </p:nvSpPr>
         <p:spPr>
           <a:xfrm>
-            <a:off x="713232" y="4590288"/>
+            <a:off x="713232" y="5266944"/>
             <a:ext cx="210312" cy="1389888"/>
           </a:xfrm>
           <a:prstGeom prst="rect">
@@ -52142,7 +52142,7 @@
         </p:nvSpPr>
         <p:spPr>
           <a:xfrm>
-            <a:off x="539496" y="5093207"/>
+            <a:off x="539496" y="5769864"/>
             <a:ext cx="347472" cy="384048"/>
           </a:xfrm>
           <a:prstGeom prst="rect">
@@ -52181,7 +52181,7 @@
         </p:nvSpPr>
         <p:spPr>
           <a:xfrm>
-            <a:off x="1051560" y="4681727"/>
+            <a:off x="1051560" y="5358383"/>
             <a:ext cx="2500884" cy="329184"/>
           </a:xfrm>
           <a:prstGeom prst="rect">
@@ -52220,7 +52220,7 @@
         </p:nvSpPr>
         <p:spPr>
           <a:xfrm>
-            <a:off x="1051560" y="5065775"/>
+            <a:off x="1051560" y="5742431"/>
             <a:ext cx="2500884" cy="822960"/>
           </a:xfrm>
           <a:prstGeom prst="rect">
@@ -52259,7 +52259,7 @@
         </p:nvSpPr>
         <p:spPr>
           <a:xfrm>
-            <a:off x="3881628" y="4590288"/>
+            <a:off x="3881628" y="5266944"/>
             <a:ext cx="3177540" cy="1389888"/>
           </a:xfrm>
           <a:prstGeom prst="roundRect">
@@ -52305,7 +52305,7 @@
         </p:nvSpPr>
         <p:spPr>
           <a:xfrm>
-            <a:off x="3881628" y="4590288"/>
+            <a:off x="3881628" y="5266944"/>
             <a:ext cx="420624" cy="1389888"/>
           </a:xfrm>
           <a:prstGeom prst="roundRect">
@@ -52349,7 +52349,7 @@
         </p:nvSpPr>
         <p:spPr>
           <a:xfrm>
-            <a:off x="4091940" y="4590288"/>
+            <a:off x="4091940" y="5266944"/>
             <a:ext cx="210312" cy="1389888"/>
           </a:xfrm>
           <a:prstGeom prst="rect">
@@ -52393,7 +52393,7 @@
         </p:nvSpPr>
         <p:spPr>
           <a:xfrm>
-            <a:off x="3918204" y="5093207"/>
+            <a:off x="3918204" y="5769864"/>
             <a:ext cx="347472" cy="384048"/>
           </a:xfrm>
           <a:prstGeom prst="rect">
@@ -52432,7 +52432,7 @@
         </p:nvSpPr>
         <p:spPr>
           <a:xfrm>
-            <a:off x="4430268" y="4681727"/>
+            <a:off x="4430268" y="5358383"/>
             <a:ext cx="2500884" cy="329184"/>
           </a:xfrm>
           <a:prstGeom prst="rect">
@@ -52471,7 +52471,7 @@
         </p:nvSpPr>
         <p:spPr>
           <a:xfrm>
-            <a:off x="4430268" y="5065775"/>
+            <a:off x="4430268" y="5742431"/>
             <a:ext cx="2500884" cy="822960"/>
           </a:xfrm>
           <a:prstGeom prst="rect">
@@ -52510,7 +52510,7 @@
         </p:nvSpPr>
         <p:spPr>
           <a:xfrm>
-            <a:off x="502920" y="6144768"/>
+            <a:off x="502920" y="7077455"/>
             <a:ext cx="3177540" cy="1389888"/>
           </a:xfrm>
           <a:prstGeom prst="roundRect">
@@ -52556,7 +52556,7 @@
         </p:nvSpPr>
         <p:spPr>
           <a:xfrm>
-            <a:off x="502920" y="6144768"/>
+            <a:off x="502920" y="7077455"/>
             <a:ext cx="420624" cy="1389888"/>
           </a:xfrm>
           <a:prstGeom prst="roundRect">
@@ -52600,7 +52600,7 @@
         </p:nvSpPr>
         <p:spPr>
           <a:xfrm>
-            <a:off x="713232" y="6144768"/>
+            <a:off x="713232" y="7077455"/>
             <a:ext cx="210312" cy="1389888"/>
           </a:xfrm>
           <a:prstGeom prst="rect">
@@ -52644,7 +52644,7 @@
         </p:nvSpPr>
         <p:spPr>
           <a:xfrm>
-            <a:off x="539496" y="6647688"/>
+            <a:off x="539496" y="7580375"/>
             <a:ext cx="347472" cy="384048"/>
           </a:xfrm>
           <a:prstGeom prst="rect">
@@ -52683,7 +52683,7 @@
         </p:nvSpPr>
         <p:spPr>
           <a:xfrm>
-            <a:off x="1051560" y="6236207"/>
+            <a:off x="1051560" y="7168895"/>
             <a:ext cx="2500884" cy="329184"/>
           </a:xfrm>
           <a:prstGeom prst="rect">
@@ -52722,7 +52722,7 @@
         </p:nvSpPr>
         <p:spPr>
           <a:xfrm>
-            <a:off x="1051560" y="6620256"/>
+            <a:off x="1051560" y="7552944"/>
             <a:ext cx="2500884" cy="822960"/>
           </a:xfrm>
           <a:prstGeom prst="rect">
@@ -52761,7 +52761,7 @@
         </p:nvSpPr>
         <p:spPr>
           <a:xfrm>
-            <a:off x="3881628" y="6144768"/>
+            <a:off x="3881628" y="7077455"/>
             <a:ext cx="3177540" cy="1389888"/>
           </a:xfrm>
           <a:prstGeom prst="roundRect">
@@ -52807,7 +52807,7 @@
         </p:nvSpPr>
         <p:spPr>
           <a:xfrm>
-            <a:off x="3881628" y="6144768"/>
+            <a:off x="3881628" y="7077455"/>
             <a:ext cx="420624" cy="1389888"/>
           </a:xfrm>
           <a:prstGeom prst="roundRect">
@@ -52851,7 +52851,7 @@
         </p:nvSpPr>
         <p:spPr>
           <a:xfrm>
-            <a:off x="4091940" y="6144768"/>
+            <a:off x="4091940" y="7077455"/>
             <a:ext cx="210312" cy="1389888"/>
           </a:xfrm>
           <a:prstGeom prst="rect">
@@ -52895,7 +52895,7 @@
         </p:nvSpPr>
         <p:spPr>
           <a:xfrm>
-            <a:off x="3918204" y="6647688"/>
+            <a:off x="3918204" y="7580375"/>
             <a:ext cx="347472" cy="384048"/>
           </a:xfrm>
           <a:prstGeom prst="rect">
@@ -52934,7 +52934,7 @@
         </p:nvSpPr>
         <p:spPr>
           <a:xfrm>
-            <a:off x="4430268" y="6236207"/>
+            <a:off x="4430268" y="7168895"/>
             <a:ext cx="2500884" cy="329184"/>
           </a:xfrm>
           <a:prstGeom prst="rect">
@@ -52973,7 +52973,7 @@
         </p:nvSpPr>
         <p:spPr>
           <a:xfrm>
-            <a:off x="4430268" y="6620256"/>
+            <a:off x="4430268" y="7552944"/>
             <a:ext cx="2500884" cy="822960"/>
           </a:xfrm>
           <a:prstGeom prst="rect">
